--- a/exports/pptx/lessons/middle-module-10-herbs-aushadhi/day-05-adraka.pptx
+++ b/exports/pptx/lessons/middle-module-10-herbs-aushadhi/day-05-adraka.pptx
@@ -17,9 +17,18 @@
     <p:sldId id="265" r:id="rId11"/>
     <p:sldId id="266" r:id="rId12"/>
     <p:sldId id="267" r:id="rId13"/>
+    <p:sldId id="268" r:id="rId14"/>
+    <p:sldId id="269" r:id="rId15"/>
+    <p:sldId id="270" r:id="rId16"/>
+    <p:sldId id="271" r:id="rId17"/>
+    <p:sldId id="272" r:id="rId18"/>
+    <p:sldId id="273" r:id="rId19"/>
+    <p:sldId id="274" r:id="rId20"/>
+    <p:sldId id="275" r:id="rId21"/>
+    <p:sldId id="276" r:id="rId22"/>
   </p:sldIdLst>
   <p:notesMasterIdLst>
-    <p:notesMasterId r:id="rId14"/>
+    <p:notesMasterId r:id="rId23"/>
   </p:notesMasterIdLst>
   <p:sldSz cx="9144000" cy="5143500"/>
   <p:notesSz cx="5143500" cy="9144000"/>
@@ -819,6 +828,622 @@
 </p:notes>
 </file>
 
+<file path=ppt/notesSlides/notesSlide13.xml><?xml version="1.0" encoding="utf-8"?>
+<p:notes xmlns:a="http://schemas.openxmlformats.org/drawingml/2006/main" xmlns:r="http://schemas.openxmlformats.org/officeDocument/2006/relationships" xmlns:p="http://schemas.openxmlformats.org/presentationml/2006/main">
+  <p:cSld>
+    <p:spTree>
+      <p:nvGrpSpPr>
+        <p:cNvPr id="1" name=""/>
+        <p:cNvGrpSpPr/>
+        <p:nvPr/>
+      </p:nvGrpSpPr>
+      <p:grpSpPr>
+        <a:xfrm>
+          <a:off x="0" y="0"/>
+          <a:ext cx="0" cy="0"/>
+          <a:chOff x="0" y="0"/>
+          <a:chExt cx="0" cy="0"/>
+        </a:xfrm>
+      </p:grpSpPr>
+      <p:sp>
+        <p:nvSpPr>
+          <p:cNvPr id="2" name="Slide Image Placeholder 1"/>
+          <p:cNvSpPr>
+            <a:spLocks noGrp="1" noRot="1" noChangeAspect="1"/>
+          </p:cNvSpPr>
+          <p:nvPr>
+            <p:ph type="sldImg"/>
+          </p:nvPr>
+        </p:nvSpPr>
+        <p:spPr/>
+      </p:sp>
+      <p:sp>
+        <p:nvSpPr>
+          <p:cNvPr id="3" name="Notes Placeholder 2"/>
+          <p:cNvSpPr>
+            <a:spLocks noGrp="1"/>
+          </p:cNvSpPr>
+          <p:nvPr>
+            <p:ph type="body" idx="1"/>
+          </p:nvPr>
+        </p:nvSpPr>
+        <p:spPr/>
+        <p:txBody>
+          <a:bodyPr/>
+          <a:lstStyle/>
+          <a:p>
+            <a:r>
+              <a:rPr lang="en-US" dirty="0"/>
+              <a:t/>
+            </a:r>
+            <a:endParaRPr lang="en-US" dirty="0"/>
+          </a:p>
+        </p:txBody>
+      </p:sp>
+      <p:sp>
+        <p:nvSpPr>
+          <p:cNvPr id="4" name="Slide Number Placeholder 3"/>
+          <p:cNvSpPr>
+            <a:spLocks noGrp="1"/>
+          </p:cNvSpPr>
+          <p:nvPr>
+            <p:ph type="sldNum" sz="quarter" idx="10"/>
+          </p:nvPr>
+        </p:nvSpPr>
+        <p:spPr/>
+        <p:txBody>
+          <a:bodyPr/>
+          <a:lstStyle/>
+          <a:p>
+            <a:fld id="{F7021451-1387-4CA6-816F-3879F97B5CBC}" type="slidenum">
+              <a:rPr lang="en-US"/>
+              <a:t>13</a:t>
+            </a:fld>
+            <a:endParaRPr lang="en-US"/>
+          </a:p>
+        </p:txBody>
+      </p:sp>
+    </p:spTree>
+    <p:extLst>
+      <p:ext uri="{BB962C8B-B14F-4D97-AF65-F5344CB8AC3E}">
+        <p14:creationId xmlns:p14="http://schemas.microsoft.com/office/powerpoint/2010/main" val="1024086991"/>
+      </p:ext>
+    </p:extLst>
+  </p:cSld>
+  <p:clrMapOvr>
+    <a:masterClrMapping/>
+  </p:clrMapOvr>
+</p:notes>
+</file>
+
+<file path=ppt/notesSlides/notesSlide14.xml><?xml version="1.0" encoding="utf-8"?>
+<p:notes xmlns:a="http://schemas.openxmlformats.org/drawingml/2006/main" xmlns:r="http://schemas.openxmlformats.org/officeDocument/2006/relationships" xmlns:p="http://schemas.openxmlformats.org/presentationml/2006/main">
+  <p:cSld>
+    <p:spTree>
+      <p:nvGrpSpPr>
+        <p:cNvPr id="1" name=""/>
+        <p:cNvGrpSpPr/>
+        <p:nvPr/>
+      </p:nvGrpSpPr>
+      <p:grpSpPr>
+        <a:xfrm>
+          <a:off x="0" y="0"/>
+          <a:ext cx="0" cy="0"/>
+          <a:chOff x="0" y="0"/>
+          <a:chExt cx="0" cy="0"/>
+        </a:xfrm>
+      </p:grpSpPr>
+      <p:sp>
+        <p:nvSpPr>
+          <p:cNvPr id="2" name="Slide Image Placeholder 1"/>
+          <p:cNvSpPr>
+            <a:spLocks noGrp="1" noRot="1" noChangeAspect="1"/>
+          </p:cNvSpPr>
+          <p:nvPr>
+            <p:ph type="sldImg"/>
+          </p:nvPr>
+        </p:nvSpPr>
+        <p:spPr/>
+      </p:sp>
+      <p:sp>
+        <p:nvSpPr>
+          <p:cNvPr id="3" name="Notes Placeholder 2"/>
+          <p:cNvSpPr>
+            <a:spLocks noGrp="1"/>
+          </p:cNvSpPr>
+          <p:nvPr>
+            <p:ph type="body" idx="1"/>
+          </p:nvPr>
+        </p:nvSpPr>
+        <p:spPr/>
+        <p:txBody>
+          <a:bodyPr/>
+          <a:lstStyle/>
+          <a:p>
+            <a:r>
+              <a:rPr lang="en-US" dirty="0"/>
+              <a:t/>
+            </a:r>
+            <a:endParaRPr lang="en-US" dirty="0"/>
+          </a:p>
+        </p:txBody>
+      </p:sp>
+      <p:sp>
+        <p:nvSpPr>
+          <p:cNvPr id="4" name="Slide Number Placeholder 3"/>
+          <p:cNvSpPr>
+            <a:spLocks noGrp="1"/>
+          </p:cNvSpPr>
+          <p:nvPr>
+            <p:ph type="sldNum" sz="quarter" idx="10"/>
+          </p:nvPr>
+        </p:nvSpPr>
+        <p:spPr/>
+        <p:txBody>
+          <a:bodyPr/>
+          <a:lstStyle/>
+          <a:p>
+            <a:fld id="{F7021451-1387-4CA6-816F-3879F97B5CBC}" type="slidenum">
+              <a:rPr lang="en-US"/>
+              <a:t>14</a:t>
+            </a:fld>
+            <a:endParaRPr lang="en-US"/>
+          </a:p>
+        </p:txBody>
+      </p:sp>
+    </p:spTree>
+    <p:extLst>
+      <p:ext uri="{BB962C8B-B14F-4D97-AF65-F5344CB8AC3E}">
+        <p14:creationId xmlns:p14="http://schemas.microsoft.com/office/powerpoint/2010/main" val="1024086991"/>
+      </p:ext>
+    </p:extLst>
+  </p:cSld>
+  <p:clrMapOvr>
+    <a:masterClrMapping/>
+  </p:clrMapOvr>
+</p:notes>
+</file>
+
+<file path=ppt/notesSlides/notesSlide15.xml><?xml version="1.0" encoding="utf-8"?>
+<p:notes xmlns:a="http://schemas.openxmlformats.org/drawingml/2006/main" xmlns:r="http://schemas.openxmlformats.org/officeDocument/2006/relationships" xmlns:p="http://schemas.openxmlformats.org/presentationml/2006/main">
+  <p:cSld>
+    <p:spTree>
+      <p:nvGrpSpPr>
+        <p:cNvPr id="1" name=""/>
+        <p:cNvGrpSpPr/>
+        <p:nvPr/>
+      </p:nvGrpSpPr>
+      <p:grpSpPr>
+        <a:xfrm>
+          <a:off x="0" y="0"/>
+          <a:ext cx="0" cy="0"/>
+          <a:chOff x="0" y="0"/>
+          <a:chExt cx="0" cy="0"/>
+        </a:xfrm>
+      </p:grpSpPr>
+      <p:sp>
+        <p:nvSpPr>
+          <p:cNvPr id="2" name="Slide Image Placeholder 1"/>
+          <p:cNvSpPr>
+            <a:spLocks noGrp="1" noRot="1" noChangeAspect="1"/>
+          </p:cNvSpPr>
+          <p:nvPr>
+            <p:ph type="sldImg"/>
+          </p:nvPr>
+        </p:nvSpPr>
+        <p:spPr/>
+      </p:sp>
+      <p:sp>
+        <p:nvSpPr>
+          <p:cNvPr id="3" name="Notes Placeholder 2"/>
+          <p:cNvSpPr>
+            <a:spLocks noGrp="1"/>
+          </p:cNvSpPr>
+          <p:nvPr>
+            <p:ph type="body" idx="1"/>
+          </p:nvPr>
+        </p:nvSpPr>
+        <p:spPr/>
+        <p:txBody>
+          <a:bodyPr/>
+          <a:lstStyle/>
+          <a:p>
+            <a:r>
+              <a:rPr lang="en-US" dirty="0"/>
+              <a:t/>
+            </a:r>
+            <a:endParaRPr lang="en-US" dirty="0"/>
+          </a:p>
+        </p:txBody>
+      </p:sp>
+      <p:sp>
+        <p:nvSpPr>
+          <p:cNvPr id="4" name="Slide Number Placeholder 3"/>
+          <p:cNvSpPr>
+            <a:spLocks noGrp="1"/>
+          </p:cNvSpPr>
+          <p:nvPr>
+            <p:ph type="sldNum" sz="quarter" idx="10"/>
+          </p:nvPr>
+        </p:nvSpPr>
+        <p:spPr/>
+        <p:txBody>
+          <a:bodyPr/>
+          <a:lstStyle/>
+          <a:p>
+            <a:fld id="{F7021451-1387-4CA6-816F-3879F97B5CBC}" type="slidenum">
+              <a:rPr lang="en-US"/>
+              <a:t>15</a:t>
+            </a:fld>
+            <a:endParaRPr lang="en-US"/>
+          </a:p>
+        </p:txBody>
+      </p:sp>
+    </p:spTree>
+    <p:extLst>
+      <p:ext uri="{BB962C8B-B14F-4D97-AF65-F5344CB8AC3E}">
+        <p14:creationId xmlns:p14="http://schemas.microsoft.com/office/powerpoint/2010/main" val="1024086991"/>
+      </p:ext>
+    </p:extLst>
+  </p:cSld>
+  <p:clrMapOvr>
+    <a:masterClrMapping/>
+  </p:clrMapOvr>
+</p:notes>
+</file>
+
+<file path=ppt/notesSlides/notesSlide16.xml><?xml version="1.0" encoding="utf-8"?>
+<p:notes xmlns:a="http://schemas.openxmlformats.org/drawingml/2006/main" xmlns:r="http://schemas.openxmlformats.org/officeDocument/2006/relationships" xmlns:p="http://schemas.openxmlformats.org/presentationml/2006/main">
+  <p:cSld>
+    <p:spTree>
+      <p:nvGrpSpPr>
+        <p:cNvPr id="1" name=""/>
+        <p:cNvGrpSpPr/>
+        <p:nvPr/>
+      </p:nvGrpSpPr>
+      <p:grpSpPr>
+        <a:xfrm>
+          <a:off x="0" y="0"/>
+          <a:ext cx="0" cy="0"/>
+          <a:chOff x="0" y="0"/>
+          <a:chExt cx="0" cy="0"/>
+        </a:xfrm>
+      </p:grpSpPr>
+      <p:sp>
+        <p:nvSpPr>
+          <p:cNvPr id="2" name="Slide Image Placeholder 1"/>
+          <p:cNvSpPr>
+            <a:spLocks noGrp="1" noRot="1" noChangeAspect="1"/>
+          </p:cNvSpPr>
+          <p:nvPr>
+            <p:ph type="sldImg"/>
+          </p:nvPr>
+        </p:nvSpPr>
+        <p:spPr/>
+      </p:sp>
+      <p:sp>
+        <p:nvSpPr>
+          <p:cNvPr id="3" name="Notes Placeholder 2"/>
+          <p:cNvSpPr>
+            <a:spLocks noGrp="1"/>
+          </p:cNvSpPr>
+          <p:nvPr>
+            <p:ph type="body" idx="1"/>
+          </p:nvPr>
+        </p:nvSpPr>
+        <p:spPr/>
+        <p:txBody>
+          <a:bodyPr/>
+          <a:lstStyle/>
+          <a:p>
+            <a:r>
+              <a:rPr lang="en-US" dirty="0"/>
+              <a:t/>
+            </a:r>
+            <a:endParaRPr lang="en-US" dirty="0"/>
+          </a:p>
+        </p:txBody>
+      </p:sp>
+      <p:sp>
+        <p:nvSpPr>
+          <p:cNvPr id="4" name="Slide Number Placeholder 3"/>
+          <p:cNvSpPr>
+            <a:spLocks noGrp="1"/>
+          </p:cNvSpPr>
+          <p:nvPr>
+            <p:ph type="sldNum" sz="quarter" idx="10"/>
+          </p:nvPr>
+        </p:nvSpPr>
+        <p:spPr/>
+        <p:txBody>
+          <a:bodyPr/>
+          <a:lstStyle/>
+          <a:p>
+            <a:fld id="{F7021451-1387-4CA6-816F-3879F97B5CBC}" type="slidenum">
+              <a:rPr lang="en-US"/>
+              <a:t>16</a:t>
+            </a:fld>
+            <a:endParaRPr lang="en-US"/>
+          </a:p>
+        </p:txBody>
+      </p:sp>
+    </p:spTree>
+    <p:extLst>
+      <p:ext uri="{BB962C8B-B14F-4D97-AF65-F5344CB8AC3E}">
+        <p14:creationId xmlns:p14="http://schemas.microsoft.com/office/powerpoint/2010/main" val="1024086991"/>
+      </p:ext>
+    </p:extLst>
+  </p:cSld>
+  <p:clrMapOvr>
+    <a:masterClrMapping/>
+  </p:clrMapOvr>
+</p:notes>
+</file>
+
+<file path=ppt/notesSlides/notesSlide17.xml><?xml version="1.0" encoding="utf-8"?>
+<p:notes xmlns:a="http://schemas.openxmlformats.org/drawingml/2006/main" xmlns:r="http://schemas.openxmlformats.org/officeDocument/2006/relationships" xmlns:p="http://schemas.openxmlformats.org/presentationml/2006/main">
+  <p:cSld>
+    <p:spTree>
+      <p:nvGrpSpPr>
+        <p:cNvPr id="1" name=""/>
+        <p:cNvGrpSpPr/>
+        <p:nvPr/>
+      </p:nvGrpSpPr>
+      <p:grpSpPr>
+        <a:xfrm>
+          <a:off x="0" y="0"/>
+          <a:ext cx="0" cy="0"/>
+          <a:chOff x="0" y="0"/>
+          <a:chExt cx="0" cy="0"/>
+        </a:xfrm>
+      </p:grpSpPr>
+      <p:sp>
+        <p:nvSpPr>
+          <p:cNvPr id="2" name="Slide Image Placeholder 1"/>
+          <p:cNvSpPr>
+            <a:spLocks noGrp="1" noRot="1" noChangeAspect="1"/>
+          </p:cNvSpPr>
+          <p:nvPr>
+            <p:ph type="sldImg"/>
+          </p:nvPr>
+        </p:nvSpPr>
+        <p:spPr/>
+      </p:sp>
+      <p:sp>
+        <p:nvSpPr>
+          <p:cNvPr id="3" name="Notes Placeholder 2"/>
+          <p:cNvSpPr>
+            <a:spLocks noGrp="1"/>
+          </p:cNvSpPr>
+          <p:nvPr>
+            <p:ph type="body" idx="1"/>
+          </p:nvPr>
+        </p:nvSpPr>
+        <p:spPr/>
+        <p:txBody>
+          <a:bodyPr/>
+          <a:lstStyle/>
+          <a:p>
+            <a:r>
+              <a:rPr lang="en-US" dirty="0"/>
+              <a:t/>
+            </a:r>
+            <a:endParaRPr lang="en-US" dirty="0"/>
+          </a:p>
+        </p:txBody>
+      </p:sp>
+      <p:sp>
+        <p:nvSpPr>
+          <p:cNvPr id="4" name="Slide Number Placeholder 3"/>
+          <p:cNvSpPr>
+            <a:spLocks noGrp="1"/>
+          </p:cNvSpPr>
+          <p:nvPr>
+            <p:ph type="sldNum" sz="quarter" idx="10"/>
+          </p:nvPr>
+        </p:nvSpPr>
+        <p:spPr/>
+        <p:txBody>
+          <a:bodyPr/>
+          <a:lstStyle/>
+          <a:p>
+            <a:fld id="{F7021451-1387-4CA6-816F-3879F97B5CBC}" type="slidenum">
+              <a:rPr lang="en-US"/>
+              <a:t>17</a:t>
+            </a:fld>
+            <a:endParaRPr lang="en-US"/>
+          </a:p>
+        </p:txBody>
+      </p:sp>
+    </p:spTree>
+    <p:extLst>
+      <p:ext uri="{BB962C8B-B14F-4D97-AF65-F5344CB8AC3E}">
+        <p14:creationId xmlns:p14="http://schemas.microsoft.com/office/powerpoint/2010/main" val="1024086991"/>
+      </p:ext>
+    </p:extLst>
+  </p:cSld>
+  <p:clrMapOvr>
+    <a:masterClrMapping/>
+  </p:clrMapOvr>
+</p:notes>
+</file>
+
+<file path=ppt/notesSlides/notesSlide18.xml><?xml version="1.0" encoding="utf-8"?>
+<p:notes xmlns:a="http://schemas.openxmlformats.org/drawingml/2006/main" xmlns:r="http://schemas.openxmlformats.org/officeDocument/2006/relationships" xmlns:p="http://schemas.openxmlformats.org/presentationml/2006/main">
+  <p:cSld>
+    <p:spTree>
+      <p:nvGrpSpPr>
+        <p:cNvPr id="1" name=""/>
+        <p:cNvGrpSpPr/>
+        <p:nvPr/>
+      </p:nvGrpSpPr>
+      <p:grpSpPr>
+        <a:xfrm>
+          <a:off x="0" y="0"/>
+          <a:ext cx="0" cy="0"/>
+          <a:chOff x="0" y="0"/>
+          <a:chExt cx="0" cy="0"/>
+        </a:xfrm>
+      </p:grpSpPr>
+      <p:sp>
+        <p:nvSpPr>
+          <p:cNvPr id="2" name="Slide Image Placeholder 1"/>
+          <p:cNvSpPr>
+            <a:spLocks noGrp="1" noRot="1" noChangeAspect="1"/>
+          </p:cNvSpPr>
+          <p:nvPr>
+            <p:ph type="sldImg"/>
+          </p:nvPr>
+        </p:nvSpPr>
+        <p:spPr/>
+      </p:sp>
+      <p:sp>
+        <p:nvSpPr>
+          <p:cNvPr id="3" name="Notes Placeholder 2"/>
+          <p:cNvSpPr>
+            <a:spLocks noGrp="1"/>
+          </p:cNvSpPr>
+          <p:nvPr>
+            <p:ph type="body" idx="1"/>
+          </p:nvPr>
+        </p:nvSpPr>
+        <p:spPr/>
+        <p:txBody>
+          <a:bodyPr/>
+          <a:lstStyle/>
+          <a:p>
+            <a:r>
+              <a:rPr lang="en-US" dirty="0"/>
+              <a:t/>
+            </a:r>
+            <a:endParaRPr lang="en-US" dirty="0"/>
+          </a:p>
+        </p:txBody>
+      </p:sp>
+      <p:sp>
+        <p:nvSpPr>
+          <p:cNvPr id="4" name="Slide Number Placeholder 3"/>
+          <p:cNvSpPr>
+            <a:spLocks noGrp="1"/>
+          </p:cNvSpPr>
+          <p:nvPr>
+            <p:ph type="sldNum" sz="quarter" idx="10"/>
+          </p:nvPr>
+        </p:nvSpPr>
+        <p:spPr/>
+        <p:txBody>
+          <a:bodyPr/>
+          <a:lstStyle/>
+          <a:p>
+            <a:fld id="{F7021451-1387-4CA6-816F-3879F97B5CBC}" type="slidenum">
+              <a:rPr lang="en-US"/>
+              <a:t>18</a:t>
+            </a:fld>
+            <a:endParaRPr lang="en-US"/>
+          </a:p>
+        </p:txBody>
+      </p:sp>
+    </p:spTree>
+    <p:extLst>
+      <p:ext uri="{BB962C8B-B14F-4D97-AF65-F5344CB8AC3E}">
+        <p14:creationId xmlns:p14="http://schemas.microsoft.com/office/powerpoint/2010/main" val="1024086991"/>
+      </p:ext>
+    </p:extLst>
+  </p:cSld>
+  <p:clrMapOvr>
+    <a:masterClrMapping/>
+  </p:clrMapOvr>
+</p:notes>
+</file>
+
+<file path=ppt/notesSlides/notesSlide19.xml><?xml version="1.0" encoding="utf-8"?>
+<p:notes xmlns:a="http://schemas.openxmlformats.org/drawingml/2006/main" xmlns:r="http://schemas.openxmlformats.org/officeDocument/2006/relationships" xmlns:p="http://schemas.openxmlformats.org/presentationml/2006/main">
+  <p:cSld>
+    <p:spTree>
+      <p:nvGrpSpPr>
+        <p:cNvPr id="1" name=""/>
+        <p:cNvGrpSpPr/>
+        <p:nvPr/>
+      </p:nvGrpSpPr>
+      <p:grpSpPr>
+        <a:xfrm>
+          <a:off x="0" y="0"/>
+          <a:ext cx="0" cy="0"/>
+          <a:chOff x="0" y="0"/>
+          <a:chExt cx="0" cy="0"/>
+        </a:xfrm>
+      </p:grpSpPr>
+      <p:sp>
+        <p:nvSpPr>
+          <p:cNvPr id="2" name="Slide Image Placeholder 1"/>
+          <p:cNvSpPr>
+            <a:spLocks noGrp="1" noRot="1" noChangeAspect="1"/>
+          </p:cNvSpPr>
+          <p:nvPr>
+            <p:ph type="sldImg"/>
+          </p:nvPr>
+        </p:nvSpPr>
+        <p:spPr/>
+      </p:sp>
+      <p:sp>
+        <p:nvSpPr>
+          <p:cNvPr id="3" name="Notes Placeholder 2"/>
+          <p:cNvSpPr>
+            <a:spLocks noGrp="1"/>
+          </p:cNvSpPr>
+          <p:nvPr>
+            <p:ph type="body" idx="1"/>
+          </p:nvPr>
+        </p:nvSpPr>
+        <p:spPr/>
+        <p:txBody>
+          <a:bodyPr/>
+          <a:lstStyle/>
+          <a:p>
+            <a:r>
+              <a:rPr lang="en-US" dirty="0"/>
+              <a:t/>
+            </a:r>
+            <a:endParaRPr lang="en-US" dirty="0"/>
+          </a:p>
+        </p:txBody>
+      </p:sp>
+      <p:sp>
+        <p:nvSpPr>
+          <p:cNvPr id="4" name="Slide Number Placeholder 3"/>
+          <p:cNvSpPr>
+            <a:spLocks noGrp="1"/>
+          </p:cNvSpPr>
+          <p:nvPr>
+            <p:ph type="sldNum" sz="quarter" idx="10"/>
+          </p:nvPr>
+        </p:nvSpPr>
+        <p:spPr/>
+        <p:txBody>
+          <a:bodyPr/>
+          <a:lstStyle/>
+          <a:p>
+            <a:fld id="{F7021451-1387-4CA6-816F-3879F97B5CBC}" type="slidenum">
+              <a:rPr lang="en-US"/>
+              <a:t>19</a:t>
+            </a:fld>
+            <a:endParaRPr lang="en-US"/>
+          </a:p>
+        </p:txBody>
+      </p:sp>
+    </p:spTree>
+    <p:extLst>
+      <p:ext uri="{BB962C8B-B14F-4D97-AF65-F5344CB8AC3E}">
+        <p14:creationId xmlns:p14="http://schemas.microsoft.com/office/powerpoint/2010/main" val="1024086991"/>
+      </p:ext>
+    </p:extLst>
+  </p:cSld>
+  <p:clrMapOvr>
+    <a:masterClrMapping/>
+  </p:clrMapOvr>
+</p:notes>
+</file>
+
 <file path=ppt/notesSlides/notesSlide2.xml><?xml version="1.0" encoding="utf-8"?>
 <p:notes xmlns:a="http://schemas.openxmlformats.org/drawingml/2006/main" xmlns:r="http://schemas.openxmlformats.org/officeDocument/2006/relationships" xmlns:p="http://schemas.openxmlformats.org/presentationml/2006/main">
   <p:cSld>
@@ -889,6 +1514,182 @@
             <a:fld id="{F7021451-1387-4CA6-816F-3879F97B5CBC}" type="slidenum">
               <a:rPr lang="en-US"/>
               <a:t>2</a:t>
+            </a:fld>
+            <a:endParaRPr lang="en-US"/>
+          </a:p>
+        </p:txBody>
+      </p:sp>
+    </p:spTree>
+    <p:extLst>
+      <p:ext uri="{BB962C8B-B14F-4D97-AF65-F5344CB8AC3E}">
+        <p14:creationId xmlns:p14="http://schemas.microsoft.com/office/powerpoint/2010/main" val="1024086991"/>
+      </p:ext>
+    </p:extLst>
+  </p:cSld>
+  <p:clrMapOvr>
+    <a:masterClrMapping/>
+  </p:clrMapOvr>
+</p:notes>
+</file>
+
+<file path=ppt/notesSlides/notesSlide20.xml><?xml version="1.0" encoding="utf-8"?>
+<p:notes xmlns:a="http://schemas.openxmlformats.org/drawingml/2006/main" xmlns:r="http://schemas.openxmlformats.org/officeDocument/2006/relationships" xmlns:p="http://schemas.openxmlformats.org/presentationml/2006/main">
+  <p:cSld>
+    <p:spTree>
+      <p:nvGrpSpPr>
+        <p:cNvPr id="1" name=""/>
+        <p:cNvGrpSpPr/>
+        <p:nvPr/>
+      </p:nvGrpSpPr>
+      <p:grpSpPr>
+        <a:xfrm>
+          <a:off x="0" y="0"/>
+          <a:ext cx="0" cy="0"/>
+          <a:chOff x="0" y="0"/>
+          <a:chExt cx="0" cy="0"/>
+        </a:xfrm>
+      </p:grpSpPr>
+      <p:sp>
+        <p:nvSpPr>
+          <p:cNvPr id="2" name="Slide Image Placeholder 1"/>
+          <p:cNvSpPr>
+            <a:spLocks noGrp="1" noRot="1" noChangeAspect="1"/>
+          </p:cNvSpPr>
+          <p:nvPr>
+            <p:ph type="sldImg"/>
+          </p:nvPr>
+        </p:nvSpPr>
+        <p:spPr/>
+      </p:sp>
+      <p:sp>
+        <p:nvSpPr>
+          <p:cNvPr id="3" name="Notes Placeholder 2"/>
+          <p:cNvSpPr>
+            <a:spLocks noGrp="1"/>
+          </p:cNvSpPr>
+          <p:nvPr>
+            <p:ph type="body" idx="1"/>
+          </p:nvPr>
+        </p:nvSpPr>
+        <p:spPr/>
+        <p:txBody>
+          <a:bodyPr/>
+          <a:lstStyle/>
+          <a:p>
+            <a:r>
+              <a:rPr lang="en-US" dirty="0"/>
+              <a:t/>
+            </a:r>
+            <a:endParaRPr lang="en-US" dirty="0"/>
+          </a:p>
+        </p:txBody>
+      </p:sp>
+      <p:sp>
+        <p:nvSpPr>
+          <p:cNvPr id="4" name="Slide Number Placeholder 3"/>
+          <p:cNvSpPr>
+            <a:spLocks noGrp="1"/>
+          </p:cNvSpPr>
+          <p:nvPr>
+            <p:ph type="sldNum" sz="quarter" idx="10"/>
+          </p:nvPr>
+        </p:nvSpPr>
+        <p:spPr/>
+        <p:txBody>
+          <a:bodyPr/>
+          <a:lstStyle/>
+          <a:p>
+            <a:fld id="{F7021451-1387-4CA6-816F-3879F97B5CBC}" type="slidenum">
+              <a:rPr lang="en-US"/>
+              <a:t>20</a:t>
+            </a:fld>
+            <a:endParaRPr lang="en-US"/>
+          </a:p>
+        </p:txBody>
+      </p:sp>
+    </p:spTree>
+    <p:extLst>
+      <p:ext uri="{BB962C8B-B14F-4D97-AF65-F5344CB8AC3E}">
+        <p14:creationId xmlns:p14="http://schemas.microsoft.com/office/powerpoint/2010/main" val="1024086991"/>
+      </p:ext>
+    </p:extLst>
+  </p:cSld>
+  <p:clrMapOvr>
+    <a:masterClrMapping/>
+  </p:clrMapOvr>
+</p:notes>
+</file>
+
+<file path=ppt/notesSlides/notesSlide21.xml><?xml version="1.0" encoding="utf-8"?>
+<p:notes xmlns:a="http://schemas.openxmlformats.org/drawingml/2006/main" xmlns:r="http://schemas.openxmlformats.org/officeDocument/2006/relationships" xmlns:p="http://schemas.openxmlformats.org/presentationml/2006/main">
+  <p:cSld>
+    <p:spTree>
+      <p:nvGrpSpPr>
+        <p:cNvPr id="1" name=""/>
+        <p:cNvGrpSpPr/>
+        <p:nvPr/>
+      </p:nvGrpSpPr>
+      <p:grpSpPr>
+        <a:xfrm>
+          <a:off x="0" y="0"/>
+          <a:ext cx="0" cy="0"/>
+          <a:chOff x="0" y="0"/>
+          <a:chExt cx="0" cy="0"/>
+        </a:xfrm>
+      </p:grpSpPr>
+      <p:sp>
+        <p:nvSpPr>
+          <p:cNvPr id="2" name="Slide Image Placeholder 1"/>
+          <p:cNvSpPr>
+            <a:spLocks noGrp="1" noRot="1" noChangeAspect="1"/>
+          </p:cNvSpPr>
+          <p:nvPr>
+            <p:ph type="sldImg"/>
+          </p:nvPr>
+        </p:nvSpPr>
+        <p:spPr/>
+      </p:sp>
+      <p:sp>
+        <p:nvSpPr>
+          <p:cNvPr id="3" name="Notes Placeholder 2"/>
+          <p:cNvSpPr>
+            <a:spLocks noGrp="1"/>
+          </p:cNvSpPr>
+          <p:nvPr>
+            <p:ph type="body" idx="1"/>
+          </p:nvPr>
+        </p:nvSpPr>
+        <p:spPr/>
+        <p:txBody>
+          <a:bodyPr/>
+          <a:lstStyle/>
+          <a:p>
+            <a:r>
+              <a:rPr lang="en-US" dirty="0"/>
+              <a:t/>
+            </a:r>
+            <a:endParaRPr lang="en-US" dirty="0"/>
+          </a:p>
+        </p:txBody>
+      </p:sp>
+      <p:sp>
+        <p:nvSpPr>
+          <p:cNvPr id="4" name="Slide Number Placeholder 3"/>
+          <p:cNvSpPr>
+            <a:spLocks noGrp="1"/>
+          </p:cNvSpPr>
+          <p:nvPr>
+            <p:ph type="sldNum" sz="quarter" idx="10"/>
+          </p:nvPr>
+        </p:nvSpPr>
+        <p:spPr/>
+        <p:txBody>
+          <a:bodyPr/>
+          <a:lstStyle/>
+          <a:p>
+            <a:fld id="{F7021451-1387-4CA6-816F-3879F97B5CBC}" type="slidenum">
+              <a:rPr lang="en-US"/>
+              <a:t>21</a:t>
             </a:fld>
             <a:endParaRPr lang="en-US"/>
           </a:p>
@@ -2140,424 +2941,6 @@
         </p:nvSpPr>
         <p:spPr>
           <a:xfrm>
-            <a:off x="406301" y="1223963"/>
-            <a:ext cx="8498026" cy="274290"/>
-          </a:xfrm>
-          <a:prstGeom prst="rect">
-            <a:avLst/>
-          </a:prstGeom>
-          <a:noFill/>
-          <a:ln/>
-        </p:spPr>
-        <p:txBody>
-          <a:bodyPr wrap="square" lIns="0" tIns="0" rIns="0" bIns="0" rtlCol="0" anchor="t"/>
-          <a:lstStyle/>
-          <a:p>
-            <a:pPr algn="l" indent="0" marL="0">
-              <a:lnSpc>
-                <a:spcPts val="2160"/>
-              </a:lnSpc>
-              <a:spcBef>
-                <a:spcPts val="600"/>
-              </a:spcBef>
-              <a:spcAft>
-                <a:spcPts val="800"/>
-              </a:spcAft>
-              <a:buNone/>
-            </a:pPr>
-            <a:r>
-              <a:rPr lang="en-US" sz="1800" b="1" dirty="0">
-                <a:solidFill>
-                  <a:srgbClr val="FE4447"/>
-                </a:solidFill>
-                <a:latin typeface="Georgia" pitchFamily="34" charset="0"/>
-                <a:ea typeface="Georgia" pitchFamily="34" charset="-122"/>
-                <a:cs typeface="Georgia" pitchFamily="34" charset="-120"/>
-              </a:rPr>
-              <a:t>Learning objective</a:t>
-            </a:r>
-            <a:endParaRPr lang="en-US" sz="1800" dirty="0"/>
-          </a:p>
-        </p:txBody>
-      </p:sp>
-      <p:sp>
-        <p:nvSpPr>
-          <p:cNvPr id="6" name="Text 4"/>
-          <p:cNvSpPr/>
-          <p:nvPr/>
-        </p:nvSpPr>
-        <p:spPr>
-          <a:xfrm>
-            <a:off x="406301" y="1637854"/>
-            <a:ext cx="8498026" cy="639812"/>
-          </a:xfrm>
-          <a:prstGeom prst="rect">
-            <a:avLst/>
-          </a:prstGeom>
-          <a:noFill/>
-          <a:ln/>
-        </p:spPr>
-        <p:txBody>
-          <a:bodyPr wrap="square" lIns="0" tIns="0" rIns="0" bIns="0" rtlCol="0" anchor="t"/>
-          <a:lstStyle/>
-          <a:p>
-            <a:pPr algn="l" indent="0" marL="0">
-              <a:lnSpc>
-                <a:spcPts val="1680"/>
-              </a:lnSpc>
-              <a:spcBef>
-                <a:spcPts val="300"/>
-              </a:spcBef>
-              <a:spcAft>
-                <a:spcPts val="300"/>
-              </a:spcAft>
-              <a:buNone/>
-            </a:pPr>
-            <a:r>
-              <a:rPr lang="en-US" sz="1200" dirty="0">
-                <a:solidFill>
-                  <a:srgbClr val="1C2833"/>
-                </a:solidFill>
-                <a:latin typeface="Arial" pitchFamily="34" charset="0"/>
-                <a:ea typeface="Arial" pitchFamily="34" charset="-122"/>
-                <a:cs typeface="Arial" pitchFamily="34" charset="-120"/>
-              </a:rPr>
-              <a:t>By the end of this lesson, students can identify </a:t>
-            </a:r>
-            <a:pPr algn="l" indent="0" marL="0">
-              <a:lnSpc>
-                <a:spcPts val="1680"/>
-              </a:lnSpc>
-              <a:spcBef>
-                <a:spcPts val="300"/>
-              </a:spcBef>
-              <a:spcAft>
-                <a:spcPts val="300"/>
-              </a:spcAft>
-              <a:buNone/>
-            </a:pPr>
-            <a:r>
-              <a:rPr lang="en-US" sz="1200" i="1" dirty="0">
-                <a:solidFill>
-                  <a:srgbClr val="1C2833"/>
-                </a:solidFill>
-                <a:latin typeface="Arial" pitchFamily="34" charset="0"/>
-                <a:ea typeface="Arial" pitchFamily="34" charset="-122"/>
-                <a:cs typeface="Arial" pitchFamily="34" charset="-120"/>
-              </a:rPr>
-              <a:t>adraka</a:t>
-            </a:r>
-            <a:pPr algn="l" indent="0" marL="0">
-              <a:lnSpc>
-                <a:spcPts val="1680"/>
-              </a:lnSpc>
-              <a:spcBef>
-                <a:spcPts val="300"/>
-              </a:spcBef>
-              <a:spcAft>
-                <a:spcPts val="300"/>
-              </a:spcAft>
-              <a:buNone/>
-            </a:pPr>
-            <a:r>
-              <a:rPr lang="en-US" sz="1200" dirty="0">
-                <a:solidFill>
-                  <a:srgbClr val="1C2833"/>
-                </a:solidFill>
-                <a:latin typeface="Arial" pitchFamily="34" charset="0"/>
-                <a:ea typeface="Arial" pitchFamily="34" charset="-122"/>
-                <a:cs typeface="Arial" pitchFamily="34" charset="-120"/>
-              </a:rPr>
-              <a:t> (</a:t>
-            </a:r>
-            <a:pPr algn="l" indent="0" marL="0">
-              <a:lnSpc>
-                <a:spcPts val="1680"/>
-              </a:lnSpc>
-              <a:spcBef>
-                <a:spcPts val="300"/>
-              </a:spcBef>
-              <a:spcAft>
-                <a:spcPts val="300"/>
-              </a:spcAft>
-              <a:buNone/>
-            </a:pPr>
-            <a:r>
-              <a:rPr lang="en-US" sz="1200" i="1" dirty="0">
-                <a:solidFill>
-                  <a:srgbClr val="1C2833"/>
-                </a:solidFill>
-                <a:latin typeface="Arial" pitchFamily="34" charset="0"/>
-                <a:ea typeface="Arial" pitchFamily="34" charset="-122"/>
-                <a:cs typeface="Arial" pitchFamily="34" charset="-120"/>
-              </a:rPr>
-              <a:t>Zingiber officinale</a:t>
-            </a:r>
-            <a:pPr algn="l" indent="0" marL="0">
-              <a:lnSpc>
-                <a:spcPts val="1680"/>
-              </a:lnSpc>
-              <a:spcBef>
-                <a:spcPts val="300"/>
-              </a:spcBef>
-              <a:spcAft>
-                <a:spcPts val="300"/>
-              </a:spcAft>
-              <a:buNone/>
-            </a:pPr>
-            <a:r>
-              <a:rPr lang="en-US" sz="1200" dirty="0">
-                <a:solidFill>
-                  <a:srgbClr val="1C2833"/>
-                </a:solidFill>
-                <a:latin typeface="Arial" pitchFamily="34" charset="0"/>
-                <a:ea typeface="Arial" pitchFamily="34" charset="-122"/>
-                <a:cs typeface="Arial" pitchFamily="34" charset="-120"/>
-              </a:rPr>
-              <a:t>) as a rhizome, distinguish </a:t>
-            </a:r>
-            <a:pPr algn="l" indent="0" marL="0">
-              <a:lnSpc>
-                <a:spcPts val="1680"/>
-              </a:lnSpc>
-              <a:spcBef>
-                <a:spcPts val="300"/>
-              </a:spcBef>
-              <a:spcAft>
-                <a:spcPts val="300"/>
-              </a:spcAft>
-              <a:buNone/>
-            </a:pPr>
-            <a:r>
-              <a:rPr lang="en-US" sz="1200" i="1" dirty="0">
-                <a:solidFill>
-                  <a:srgbClr val="1C2833"/>
-                </a:solidFill>
-                <a:latin typeface="Arial" pitchFamily="34" charset="0"/>
-                <a:ea typeface="Arial" pitchFamily="34" charset="-122"/>
-                <a:cs typeface="Arial" pitchFamily="34" charset="-120"/>
-              </a:rPr>
-              <a:t>adraka</a:t>
-            </a:r>
-            <a:pPr algn="l" indent="0" marL="0">
-              <a:lnSpc>
-                <a:spcPts val="1680"/>
-              </a:lnSpc>
-              <a:spcBef>
-                <a:spcPts val="300"/>
-              </a:spcBef>
-              <a:spcAft>
-                <a:spcPts val="300"/>
-              </a:spcAft>
-              <a:buNone/>
-            </a:pPr>
-            <a:r>
-              <a:rPr lang="en-US" sz="1200" dirty="0">
-                <a:solidFill>
-                  <a:srgbClr val="1C2833"/>
-                </a:solidFill>
-                <a:latin typeface="Arial" pitchFamily="34" charset="0"/>
-                <a:ea typeface="Arial" pitchFamily="34" charset="-122"/>
-                <a:cs typeface="Arial" pitchFamily="34" charset="-120"/>
-              </a:rPr>
-              <a:t> (fresh) from </a:t>
-            </a:r>
-            <a:pPr algn="l" indent="0" marL="0">
-              <a:lnSpc>
-                <a:spcPts val="1680"/>
-              </a:lnSpc>
-              <a:spcBef>
-                <a:spcPts val="300"/>
-              </a:spcBef>
-              <a:spcAft>
-                <a:spcPts val="300"/>
-              </a:spcAft>
-              <a:buNone/>
-            </a:pPr>
-            <a:r>
-              <a:rPr lang="en-US" sz="1200" i="1" dirty="0">
-                <a:solidFill>
-                  <a:srgbClr val="1C2833"/>
-                </a:solidFill>
-                <a:latin typeface="Arial" pitchFamily="34" charset="0"/>
-                <a:ea typeface="Arial" pitchFamily="34" charset="-122"/>
-                <a:cs typeface="Arial" pitchFamily="34" charset="-120"/>
-              </a:rPr>
-              <a:t>sūnṭhī</a:t>
-            </a:r>
-            <a:pPr algn="l" indent="0" marL="0">
-              <a:lnSpc>
-                <a:spcPts val="1680"/>
-              </a:lnSpc>
-              <a:spcBef>
-                <a:spcPts val="300"/>
-              </a:spcBef>
-              <a:spcAft>
-                <a:spcPts val="300"/>
-              </a:spcAft>
-              <a:buNone/>
-            </a:pPr>
-            <a:r>
-              <a:rPr lang="en-US" sz="1200" dirty="0">
-                <a:solidFill>
-                  <a:srgbClr val="1C2833"/>
-                </a:solidFill>
-                <a:latin typeface="Arial" pitchFamily="34" charset="0"/>
-                <a:ea typeface="Arial" pitchFamily="34" charset="-122"/>
-                <a:cs typeface="Arial" pitchFamily="34" charset="-120"/>
-              </a:rPr>
-              <a:t> (dried) and explain that the active compound shifts from </a:t>
-            </a:r>
-            <a:pPr algn="l" indent="0" marL="0">
-              <a:lnSpc>
-                <a:spcPts val="1680"/>
-              </a:lnSpc>
-              <a:spcBef>
-                <a:spcPts val="300"/>
-              </a:spcBef>
-              <a:spcAft>
-                <a:spcPts val="300"/>
-              </a:spcAft>
-              <a:buNone/>
-            </a:pPr>
-            <a:r>
-              <a:rPr lang="en-US" sz="1200" b="1" dirty="0">
-                <a:solidFill>
-                  <a:srgbClr val="1C2833"/>
-                </a:solidFill>
-                <a:latin typeface="Arial" pitchFamily="34" charset="0"/>
-                <a:ea typeface="Arial" pitchFamily="34" charset="-122"/>
-                <a:cs typeface="Arial" pitchFamily="34" charset="-120"/>
-              </a:rPr>
-              <a:t>gingerol</a:t>
-            </a:r>
-            <a:pPr algn="l" indent="0" marL="0">
-              <a:lnSpc>
-                <a:spcPts val="1680"/>
-              </a:lnSpc>
-              <a:spcBef>
-                <a:spcPts val="300"/>
-              </a:spcBef>
-              <a:spcAft>
-                <a:spcPts val="300"/>
-              </a:spcAft>
-              <a:buNone/>
-            </a:pPr>
-            <a:r>
-              <a:rPr lang="en-US" sz="1200" dirty="0">
-                <a:solidFill>
-                  <a:srgbClr val="1C2833"/>
-                </a:solidFill>
-                <a:latin typeface="Arial" pitchFamily="34" charset="0"/>
-                <a:ea typeface="Arial" pitchFamily="34" charset="-122"/>
-                <a:cs typeface="Arial" pitchFamily="34" charset="-120"/>
-              </a:rPr>
-              <a:t> to </a:t>
-            </a:r>
-            <a:pPr algn="l" indent="0" marL="0">
-              <a:lnSpc>
-                <a:spcPts val="1680"/>
-              </a:lnSpc>
-              <a:spcBef>
-                <a:spcPts val="300"/>
-              </a:spcBef>
-              <a:spcAft>
-                <a:spcPts val="300"/>
-              </a:spcAft>
-              <a:buNone/>
-            </a:pPr>
-            <a:r>
-              <a:rPr lang="en-US" sz="1200" b="1" dirty="0">
-                <a:solidFill>
-                  <a:srgbClr val="1C2833"/>
-                </a:solidFill>
-                <a:latin typeface="Arial" pitchFamily="34" charset="0"/>
-                <a:ea typeface="Arial" pitchFamily="34" charset="-122"/>
-                <a:cs typeface="Arial" pitchFamily="34" charset="-120"/>
-              </a:rPr>
-              <a:t>shogaol</a:t>
-            </a:r>
-            <a:pPr algn="l" indent="0" marL="0">
-              <a:lnSpc>
-                <a:spcPts val="1680"/>
-              </a:lnSpc>
-              <a:spcBef>
-                <a:spcPts val="300"/>
-              </a:spcBef>
-              <a:spcAft>
-                <a:spcPts val="300"/>
-              </a:spcAft>
-              <a:buNone/>
-            </a:pPr>
-            <a:r>
-              <a:rPr lang="en-US" sz="1200" dirty="0">
-                <a:solidFill>
-                  <a:srgbClr val="1C2833"/>
-                </a:solidFill>
-                <a:latin typeface="Arial" pitchFamily="34" charset="0"/>
-                <a:ea typeface="Arial" pitchFamily="34" charset="-122"/>
-                <a:cs typeface="Arial" pitchFamily="34" charset="-120"/>
-              </a:rPr>
-              <a:t> on drying, and describe ginger's traditional classification as </a:t>
-            </a:r>
-            <a:pPr algn="l" indent="0" marL="0">
-              <a:lnSpc>
-                <a:spcPts val="1680"/>
-              </a:lnSpc>
-              <a:spcBef>
-                <a:spcPts val="300"/>
-              </a:spcBef>
-              <a:spcAft>
-                <a:spcPts val="300"/>
-              </a:spcAft>
-              <a:buNone/>
-            </a:pPr>
-            <a:r>
-              <a:rPr lang="en-US" sz="1200" i="1" dirty="0">
-                <a:solidFill>
-                  <a:srgbClr val="1C2833"/>
-                </a:solidFill>
-                <a:latin typeface="Arial" pitchFamily="34" charset="0"/>
-                <a:ea typeface="Arial" pitchFamily="34" charset="-122"/>
-                <a:cs typeface="Arial" pitchFamily="34" charset="-120"/>
-              </a:rPr>
-              <a:t>uṣṇa</a:t>
-            </a:r>
-            <a:pPr algn="l" indent="0" marL="0">
-              <a:lnSpc>
-                <a:spcPts val="1680"/>
-              </a:lnSpc>
-              <a:spcBef>
-                <a:spcPts val="300"/>
-              </a:spcBef>
-              <a:spcAft>
-                <a:spcPts val="300"/>
-              </a:spcAft>
-              <a:buNone/>
-            </a:pPr>
-            <a:r>
-              <a:rPr lang="en-US" sz="1200" dirty="0">
-                <a:solidFill>
-                  <a:srgbClr val="1C2833"/>
-                </a:solidFill>
-                <a:latin typeface="Arial" pitchFamily="34" charset="0"/>
-                <a:ea typeface="Arial" pitchFamily="34" charset="-122"/>
-                <a:cs typeface="Arial" pitchFamily="34" charset="-120"/>
-              </a:rPr>
-              <a:t> (heating) with one well-supported modern use.</a:t>
-            </a:r>
-            <a:endParaRPr lang="en-US" sz="1200" dirty="0"/>
-          </a:p>
-        </p:txBody>
-      </p:sp>
-      <p:sp>
-        <p:nvSpPr>
-          <p:cNvPr id="7" name="Text 5"/>
-          <p:cNvSpPr/>
-          <p:nvPr/>
-        </p:nvSpPr>
-        <p:spPr>
-          <a:xfrm>
             <a:off x="406301" y="4434929"/>
             <a:ext cx="8498026" cy="213271"/>
           </a:xfrm>
@@ -2702,7 +3085,7 @@
                 <a:ea typeface="Georgia" pitchFamily="34" charset="-122"/>
                 <a:cs typeface="Georgia" pitchFamily="34" charset="-120"/>
               </a:rPr>
-              <a:t>Differentiation</a:t>
+              <a:t>Core (20 min) (cont.)</a:t>
             </a:r>
             <a:endParaRPr lang="en-US" sz="1800" dirty="0"/>
           </a:p>
@@ -2717,7 +3100,7 @@
         <p:spPr>
           <a:xfrm>
             <a:off x="634901" y="883593"/>
-            <a:ext cx="8102798" cy="731341"/>
+            <a:ext cx="8102798" cy="281880"/>
           </a:xfrm>
           <a:prstGeom prst="rect">
             <a:avLst/>
@@ -2748,30 +3131,32 @@
                 <a:ea typeface="Arial" pitchFamily="34" charset="-122"/>
                 <a:cs typeface="Arial" pitchFamily="34" charset="-120"/>
               </a:rPr>
-              <a:t>One tier up:</a:t>
-            </a:r>
-            <a:pPr algn="l" indent="0" marL="0">
-              <a:lnSpc>
-                <a:spcPts val="1620"/>
-              </a:lnSpc>
-              <a:spcAft>
-                <a:spcPts val="300"/>
-              </a:spcAft>
-              <a:buNone/>
-            </a:pPr>
-            <a:r>
-              <a:rPr lang="en-US" sz="1200" dirty="0">
-                <a:solidFill>
-                  <a:srgbClr val="1C2833"/>
-                </a:solidFill>
-                <a:latin typeface="Arial" pitchFamily="34" charset="0"/>
-                <a:ea typeface="Arial" pitchFamily="34" charset="-122"/>
-                <a:cs typeface="Arial" pitchFamily="34" charset="-120"/>
-              </a:rPr>
-              <a:t> Look up the chemical structure of gingerol and shogaol. Identify the difference (one OH group + one double bond gain). Sketch both in your notebook.</a:t>
+              <a:t>What ginger does — well-supported uses.</a:t>
             </a:r>
             <a:endParaRPr lang="en-US" sz="1200" dirty="0"/>
           </a:p>
+        </p:txBody>
+      </p:sp>
+      <p:sp>
+        <p:nvSpPr>
+          <p:cNvPr id="5" name="Text 3"/>
+          <p:cNvSpPr/>
+          <p:nvPr/>
+        </p:nvSpPr>
+        <p:spPr>
+          <a:xfrm>
+            <a:off x="634901" y="1266974"/>
+            <a:ext cx="8102798" cy="1462683"/>
+          </a:xfrm>
+          <a:prstGeom prst="rect">
+            <a:avLst/>
+          </a:prstGeom>
+          <a:noFill/>
+          <a:ln/>
+        </p:spPr>
+        <p:txBody>
+          <a:bodyPr wrap="square" lIns="0" tIns="0" rIns="0" bIns="0" rtlCol="0" anchor="t"/>
+          <a:lstStyle/>
           <a:p>
             <a:pPr algn="l" marL="342900" indent="-342900">
               <a:lnSpc>
@@ -2792,7 +3177,7 @@
                 <a:ea typeface="Arial" pitchFamily="34" charset="-122"/>
                 <a:cs typeface="Arial" pitchFamily="34" charset="-120"/>
               </a:rPr>
-              <a:t>One tier down:</a:t>
+              <a:t>Anti-nausea</a:t>
             </a:r>
             <a:pPr algn="l" indent="0" marL="0">
               <a:lnSpc>
@@ -2812,15 +3197,171 @@
                 <a:ea typeface="Arial" pitchFamily="34" charset="-122"/>
                 <a:cs typeface="Arial" pitchFamily="34" charset="-120"/>
               </a:rPr>
-              <a:t> Focus on identifying ginger by sight and smell, and remembering "fresh = gingerol, dried = shogaol."</a:t>
+              <a:t> — one of the few traditional herbs with </a:t>
+            </a:r>
+            <a:pPr algn="l" indent="0" marL="0">
+              <a:lnSpc>
+                <a:spcPts val="1620"/>
+              </a:lnSpc>
+              <a:spcAft>
+                <a:spcPts val="300"/>
+              </a:spcAft>
+              <a:buNone/>
+            </a:pPr>
+            <a:r>
+              <a:rPr lang="en-US" sz="1200" b="1" dirty="0">
+                <a:solidFill>
+                  <a:srgbClr val="1C2833"/>
+                </a:solidFill>
+                <a:latin typeface="Arial" pitchFamily="34" charset="0"/>
+                <a:ea typeface="Arial" pitchFamily="34" charset="-122"/>
+                <a:cs typeface="Arial" pitchFamily="34" charset="-120"/>
+              </a:rPr>
+              <a:t>multiple positive clinical trials</a:t>
+            </a:r>
+            <a:pPr algn="l" indent="0" marL="0">
+              <a:lnSpc>
+                <a:spcPts val="1620"/>
+              </a:lnSpc>
+              <a:spcAft>
+                <a:spcPts val="300"/>
+              </a:spcAft>
+              <a:buNone/>
+            </a:pPr>
+            <a:r>
+              <a:rPr lang="en-US" sz="1200" dirty="0">
+                <a:solidFill>
+                  <a:srgbClr val="1C2833"/>
+                </a:solidFill>
+                <a:latin typeface="Arial" pitchFamily="34" charset="0"/>
+                <a:ea typeface="Arial" pitchFamily="34" charset="-122"/>
+                <a:cs typeface="Arial" pitchFamily="34" charset="-120"/>
+              </a:rPr>
+              <a:t>, especially for:</a:t>
             </a:r>
             <a:endParaRPr lang="en-US" sz="1200" dirty="0"/>
           </a:p>
-        </p:txBody>
-      </p:sp>
-      <p:sp>
-        <p:nvSpPr>
-          <p:cNvPr id="5" name="Text 3"/>
+          <a:p>
+            <a:pPr algn="l" marL="342900" indent="-342900">
+              <a:lnSpc>
+                <a:spcPts val="1620"/>
+              </a:lnSpc>
+              <a:spcAft>
+                <a:spcPts val="300"/>
+              </a:spcAft>
+              <a:buSzPct val="100000"/>
+              <a:buChar char="•"/>
+            </a:pPr>
+            <a:r>
+              <a:rPr lang="en-US" sz="1200" dirty="0">
+                <a:solidFill>
+                  <a:srgbClr val="1C2833"/>
+                </a:solidFill>
+                <a:latin typeface="Arial" pitchFamily="34" charset="0"/>
+                <a:ea typeface="Arial" pitchFamily="34" charset="-122"/>
+                <a:cs typeface="Arial" pitchFamily="34" charset="-120"/>
+              </a:rPr>
+              <a:t>Pregnancy-related nausea (under doctor supervision — pregnancy dosing is not a school question).</a:t>
+            </a:r>
+            <a:endParaRPr lang="en-US" sz="1200" dirty="0"/>
+          </a:p>
+          <a:p>
+            <a:pPr algn="l" marL="342900" indent="-342900">
+              <a:lnSpc>
+                <a:spcPts val="1620"/>
+              </a:lnSpc>
+              <a:spcAft>
+                <a:spcPts val="300"/>
+              </a:spcAft>
+              <a:buSzPct val="100000"/>
+              <a:buChar char="•"/>
+            </a:pPr>
+            <a:r>
+              <a:rPr lang="en-US" sz="1200" dirty="0">
+                <a:solidFill>
+                  <a:srgbClr val="1C2833"/>
+                </a:solidFill>
+                <a:latin typeface="Arial" pitchFamily="34" charset="0"/>
+                <a:ea typeface="Arial" pitchFamily="34" charset="-122"/>
+                <a:cs typeface="Arial" pitchFamily="34" charset="-120"/>
+              </a:rPr>
+              <a:t>Motion sickness — small ginger doses (1–2 g, e.g. a chewed slice) have outperformed placebo in some trials.</a:t>
+            </a:r>
+            <a:endParaRPr lang="en-US" sz="1200" dirty="0"/>
+          </a:p>
+          <a:p>
+            <a:pPr algn="l" marL="342900" indent="-342900">
+              <a:lnSpc>
+                <a:spcPts val="1620"/>
+              </a:lnSpc>
+              <a:spcAft>
+                <a:spcPts val="300"/>
+              </a:spcAft>
+              <a:buSzPct val="100000"/>
+              <a:buChar char="•"/>
+            </a:pPr>
+            <a:r>
+              <a:rPr lang="en-US" sz="1200" dirty="0">
+                <a:solidFill>
+                  <a:srgbClr val="1C2833"/>
+                </a:solidFill>
+                <a:latin typeface="Arial" pitchFamily="34" charset="0"/>
+                <a:ea typeface="Arial" pitchFamily="34" charset="-122"/>
+                <a:cs typeface="Arial" pitchFamily="34" charset="-120"/>
+              </a:rPr>
+              <a:t>Post-surgical nausea — used in some hospital protocols.</a:t>
+            </a:r>
+            <a:endParaRPr lang="en-US" sz="1200" dirty="0"/>
+          </a:p>
+          <a:p>
+            <a:pPr algn="l" marL="342900" indent="-342900">
+              <a:lnSpc>
+                <a:spcPts val="1620"/>
+              </a:lnSpc>
+              <a:spcAft>
+                <a:spcPts val="300"/>
+              </a:spcAft>
+              <a:buSzPct val="100000"/>
+              <a:buChar char="•"/>
+            </a:pPr>
+            <a:r>
+              <a:rPr lang="en-US" sz="1200" b="1" dirty="0">
+                <a:solidFill>
+                  <a:srgbClr val="1C2833"/>
+                </a:solidFill>
+                <a:latin typeface="Arial" pitchFamily="34" charset="0"/>
+                <a:ea typeface="Arial" pitchFamily="34" charset="-122"/>
+                <a:cs typeface="Arial" pitchFamily="34" charset="-120"/>
+              </a:rPr>
+              <a:t>Warming feeling</a:t>
+            </a:r>
+            <a:pPr algn="l" indent="0" marL="0">
+              <a:lnSpc>
+                <a:spcPts val="1620"/>
+              </a:lnSpc>
+              <a:spcAft>
+                <a:spcPts val="300"/>
+              </a:spcAft>
+              <a:buNone/>
+            </a:pPr>
+            <a:r>
+              <a:rPr lang="en-US" sz="1200" dirty="0">
+                <a:solidFill>
+                  <a:srgbClr val="1C2833"/>
+                </a:solidFill>
+                <a:latin typeface="Arial" pitchFamily="34" charset="0"/>
+                <a:ea typeface="Arial" pitchFamily="34" charset="-122"/>
+                <a:cs typeface="Arial" pitchFamily="34" charset="-120"/>
+              </a:rPr>
+              <a:t> — ginger does cause a measurable rise in skin and body temperature ("thermogenic" effect). Activates TRPV1 receptors — the same receptor activated by capsaicin in chillies.</a:t>
+            </a:r>
+            <a:endParaRPr lang="en-US" sz="1200" dirty="0"/>
+          </a:p>
+        </p:txBody>
+      </p:sp>
+      <p:sp>
+        <p:nvSpPr>
+          <p:cNvPr id="6" name="Text 4"/>
           <p:cNvSpPr/>
           <p:nvPr/>
         </p:nvSpPr>
@@ -2970,7 +3511,7 @@
                 <a:ea typeface="Georgia" pitchFamily="34" charset="-122"/>
                 <a:cs typeface="Georgia" pitchFamily="34" charset="-120"/>
               </a:rPr>
-              <a:t>Teacher notes</a:t>
+              <a:t>Core (20 min) (cont.)</a:t>
             </a:r>
             <a:endParaRPr lang="en-US" sz="1800" dirty="0"/>
           </a:p>
@@ -2984,8 +3525,8 @@
         </p:nvSpPr>
         <p:spPr>
           <a:xfrm>
-            <a:off x="406301" y="870942"/>
-            <a:ext cx="8498026" cy="1279624"/>
+            <a:off x="634901" y="883593"/>
+            <a:ext cx="8102798" cy="487561"/>
           </a:xfrm>
           <a:prstGeom prst="rect">
             <a:avLst/>
@@ -2997,13 +3538,31 @@
           <a:bodyPr wrap="square" lIns="0" tIns="0" rIns="0" bIns="0" rtlCol="0" anchor="t"/>
           <a:lstStyle/>
           <a:p>
-            <a:pPr algn="l" indent="0" marL="0">
-              <a:lnSpc>
-                <a:spcPts val="1680"/>
-              </a:lnSpc>
-              <a:spcBef>
-                <a:spcPts val="300"/>
-              </a:spcBef>
+            <a:pPr algn="l" marL="342900" indent="-342900">
+              <a:lnSpc>
+                <a:spcPts val="1620"/>
+              </a:lnSpc>
+              <a:spcAft>
+                <a:spcPts val="300"/>
+              </a:spcAft>
+              <a:buSzPct val="100000"/>
+              <a:buChar char="•"/>
+            </a:pPr>
+            <a:r>
+              <a:rPr lang="en-US" sz="1200" b="1" dirty="0">
+                <a:solidFill>
+                  <a:srgbClr val="1C2833"/>
+                </a:solidFill>
+                <a:latin typeface="Arial" pitchFamily="34" charset="0"/>
+                <a:ea typeface="Arial" pitchFamily="34" charset="-122"/>
+                <a:cs typeface="Arial" pitchFamily="34" charset="-120"/>
+              </a:rPr>
+              <a:t>Digestive support</a:t>
+            </a:r>
+            <a:pPr algn="l" indent="0" marL="0">
+              <a:lnSpc>
+                <a:spcPts val="1620"/>
+              </a:lnSpc>
               <a:spcAft>
                 <a:spcPts val="300"/>
               </a:spcAft>
@@ -3018,53 +3577,7 @@
                 <a:ea typeface="Arial" pitchFamily="34" charset="-122"/>
                 <a:cs typeface="Arial" pitchFamily="34" charset="-120"/>
               </a:rPr>
-              <a:t>– The chemistry sketch (gingerol → shogaol) is the headline. If a student remembers nothing else from today, they should know that drying ginger changes its chemistry, and the change is well-defined. – The "ginger has real clinical evidence for nausea" point is important — students often don't realise that for </a:t>
-            </a:r>
-            <a:pPr algn="l" indent="0" marL="0">
-              <a:lnSpc>
-                <a:spcPts val="1680"/>
-              </a:lnSpc>
-              <a:spcBef>
-                <a:spcPts val="300"/>
-              </a:spcBef>
-              <a:spcAft>
-                <a:spcPts val="300"/>
-              </a:spcAft>
-              <a:buNone/>
-            </a:pPr>
-            <a:r>
-              <a:rPr lang="en-US" sz="1200" i="1" dirty="0">
-                <a:solidFill>
-                  <a:srgbClr val="1C2833"/>
-                </a:solidFill>
-                <a:latin typeface="Arial" pitchFamily="34" charset="0"/>
-                <a:ea typeface="Arial" pitchFamily="34" charset="-122"/>
-                <a:cs typeface="Arial" pitchFamily="34" charset="-120"/>
-              </a:rPr>
-              <a:t>some specific herbal uses</a:t>
-            </a:r>
-            <a:pPr algn="l" indent="0" marL="0">
-              <a:lnSpc>
-                <a:spcPts val="1680"/>
-              </a:lnSpc>
-              <a:spcBef>
-                <a:spcPts val="300"/>
-              </a:spcBef>
-              <a:spcAft>
-                <a:spcPts val="300"/>
-              </a:spcAft>
-              <a:buNone/>
-            </a:pPr>
-            <a:r>
-              <a:rPr lang="en-US" sz="1200" dirty="0">
-                <a:solidFill>
-                  <a:srgbClr val="1C2833"/>
-                </a:solidFill>
-                <a:latin typeface="Arial" pitchFamily="34" charset="0"/>
-                <a:ea typeface="Arial" pitchFamily="34" charset="-122"/>
-                <a:cs typeface="Arial" pitchFamily="34" charset="-120"/>
-              </a:rPr>
-              <a:t>, the clinical evidence is genuinely strong. It builds the right kind of nuance: not blanket scepticism, not blanket endorsement, but herb-by-herb, use-by-use evaluation. – If a student in your class is pregnant (older Middle band, occasionally) or has a pregnant family member raising questions, redirect gently: clinical dosing is for clinicians.</a:t>
+              <a:t> — culinary use after meals (a slice in tea, or ginger pickle) has a long tradition; mechanism includes stimulation of saliva and gastric secretions.</a:t>
             </a:r>
             <a:endParaRPr lang="en-US" sz="1200" dirty="0"/>
           </a:p>
@@ -3222,7 +3735,7 @@
                 <a:ea typeface="Georgia" pitchFamily="34" charset="-122"/>
                 <a:cs typeface="Georgia" pitchFamily="34" charset="-120"/>
               </a:rPr>
-              <a:t>Citation(s) used in this lesson</a:t>
+              <a:t>Core (20 min) (cont.)</a:t>
             </a:r>
             <a:endParaRPr lang="en-US" sz="1800" dirty="0"/>
           </a:p>
@@ -3236,8 +3749,8 @@
         </p:nvSpPr>
         <p:spPr>
           <a:xfrm>
-            <a:off x="406301" y="870942"/>
-            <a:ext cx="8498026" cy="853083"/>
+            <a:off x="634901" y="883593"/>
+            <a:ext cx="8102798" cy="281880"/>
           </a:xfrm>
           <a:prstGeom prst="rect">
             <a:avLst/>
@@ -3249,6 +3762,302 @@
           <a:bodyPr wrap="square" lIns="0" tIns="0" rIns="0" bIns="0" rtlCol="0" anchor="t"/>
           <a:lstStyle/>
           <a:p>
+            <a:pPr algn="l" marL="342900" indent="-342900">
+              <a:lnSpc>
+                <a:spcPts val="1620"/>
+              </a:lnSpc>
+              <a:spcAft>
+                <a:spcPts val="300"/>
+              </a:spcAft>
+              <a:buSzPct val="100000"/>
+              <a:buChar char="•"/>
+            </a:pPr>
+            <a:r>
+              <a:rPr lang="en-US" sz="1200" b="1" dirty="0">
+                <a:solidFill>
+                  <a:srgbClr val="1C2833"/>
+                </a:solidFill>
+                <a:latin typeface="Arial" pitchFamily="34" charset="0"/>
+                <a:ea typeface="Arial" pitchFamily="34" charset="-122"/>
+                <a:cs typeface="Arial" pitchFamily="34" charset="-120"/>
+              </a:rPr>
+              <a:t>Traditional Ayurvedic frame.</a:t>
+            </a:r>
+            <a:pPr algn="l" indent="0" marL="0">
+              <a:lnSpc>
+                <a:spcPts val="1620"/>
+              </a:lnSpc>
+              <a:spcAft>
+                <a:spcPts val="300"/>
+              </a:spcAft>
+              <a:buNone/>
+            </a:pPr>
+            <a:r>
+              <a:rPr lang="en-US" sz="1200" dirty="0">
+                <a:solidFill>
+                  <a:srgbClr val="1C2833"/>
+                </a:solidFill>
+                <a:latin typeface="Arial" pitchFamily="34" charset="0"/>
+                <a:ea typeface="Arial" pitchFamily="34" charset="-122"/>
+                <a:cs typeface="Arial" pitchFamily="34" charset="-120"/>
+              </a:rPr>
+              <a:t> </a:t>
+            </a:r>
+            <a:pPr algn="l" indent="0" marL="0">
+              <a:lnSpc>
+                <a:spcPts val="1620"/>
+              </a:lnSpc>
+              <a:spcAft>
+                <a:spcPts val="300"/>
+              </a:spcAft>
+              <a:buNone/>
+            </a:pPr>
+            <a:r>
+              <a:rPr lang="en-US" sz="1200" i="1" dirty="0">
+                <a:solidFill>
+                  <a:srgbClr val="1C2833"/>
+                </a:solidFill>
+                <a:latin typeface="Arial" pitchFamily="34" charset="0"/>
+                <a:ea typeface="Arial" pitchFamily="34" charset="-122"/>
+                <a:cs typeface="Arial" pitchFamily="34" charset="-120"/>
+              </a:rPr>
+              <a:t>Adraka</a:t>
+            </a:r>
+            <a:pPr algn="l" indent="0" marL="0">
+              <a:lnSpc>
+                <a:spcPts val="1620"/>
+              </a:lnSpc>
+              <a:spcAft>
+                <a:spcPts val="300"/>
+              </a:spcAft>
+              <a:buNone/>
+            </a:pPr>
+            <a:r>
+              <a:rPr lang="en-US" sz="1200" dirty="0">
+                <a:solidFill>
+                  <a:srgbClr val="1C2833"/>
+                </a:solidFill>
+                <a:latin typeface="Arial" pitchFamily="34" charset="0"/>
+                <a:ea typeface="Arial" pitchFamily="34" charset="-122"/>
+                <a:cs typeface="Arial" pitchFamily="34" charset="-120"/>
+              </a:rPr>
+              <a:t> is </a:t>
+            </a:r>
+            <a:pPr algn="l" indent="0" marL="0">
+              <a:lnSpc>
+                <a:spcPts val="1620"/>
+              </a:lnSpc>
+              <a:spcAft>
+                <a:spcPts val="300"/>
+              </a:spcAft>
+              <a:buNone/>
+            </a:pPr>
+            <a:r>
+              <a:rPr lang="en-US" sz="1200" i="1" dirty="0">
+                <a:solidFill>
+                  <a:srgbClr val="1C2833"/>
+                </a:solidFill>
+                <a:latin typeface="Arial" pitchFamily="34" charset="0"/>
+                <a:ea typeface="Arial" pitchFamily="34" charset="-122"/>
+                <a:cs typeface="Arial" pitchFamily="34" charset="-120"/>
+              </a:rPr>
+              <a:t>kaṭu</a:t>
+            </a:r>
+            <a:pPr algn="l" indent="0" marL="0">
+              <a:lnSpc>
+                <a:spcPts val="1620"/>
+              </a:lnSpc>
+              <a:spcAft>
+                <a:spcPts val="300"/>
+              </a:spcAft>
+              <a:buNone/>
+            </a:pPr>
+            <a:r>
+              <a:rPr lang="en-US" sz="1200" dirty="0">
+                <a:solidFill>
+                  <a:srgbClr val="1C2833"/>
+                </a:solidFill>
+                <a:latin typeface="Arial" pitchFamily="34" charset="0"/>
+                <a:ea typeface="Arial" pitchFamily="34" charset="-122"/>
+                <a:cs typeface="Arial" pitchFamily="34" charset="-120"/>
+              </a:rPr>
+              <a:t> (pungent) in taste, </a:t>
+            </a:r>
+            <a:pPr algn="l" indent="0" marL="0">
+              <a:lnSpc>
+                <a:spcPts val="1620"/>
+              </a:lnSpc>
+              <a:spcAft>
+                <a:spcPts val="300"/>
+              </a:spcAft>
+              <a:buNone/>
+            </a:pPr>
+            <a:r>
+              <a:rPr lang="en-US" sz="1200" i="1" dirty="0">
+                <a:solidFill>
+                  <a:srgbClr val="1C2833"/>
+                </a:solidFill>
+                <a:latin typeface="Arial" pitchFamily="34" charset="0"/>
+                <a:ea typeface="Arial" pitchFamily="34" charset="-122"/>
+                <a:cs typeface="Arial" pitchFamily="34" charset="-120"/>
+              </a:rPr>
+              <a:t>uṣṇa</a:t>
+            </a:r>
+            <a:pPr algn="l" indent="0" marL="0">
+              <a:lnSpc>
+                <a:spcPts val="1620"/>
+              </a:lnSpc>
+              <a:spcAft>
+                <a:spcPts val="300"/>
+              </a:spcAft>
+              <a:buNone/>
+            </a:pPr>
+            <a:r>
+              <a:rPr lang="en-US" sz="1200" dirty="0">
+                <a:solidFill>
+                  <a:srgbClr val="1C2833"/>
+                </a:solidFill>
+                <a:latin typeface="Arial" pitchFamily="34" charset="0"/>
+                <a:ea typeface="Arial" pitchFamily="34" charset="-122"/>
+                <a:cs typeface="Arial" pitchFamily="34" charset="-120"/>
+              </a:rPr>
+              <a:t> (heating) in </a:t>
+            </a:r>
+            <a:pPr algn="l" indent="0" marL="0">
+              <a:lnSpc>
+                <a:spcPts val="1620"/>
+              </a:lnSpc>
+              <a:spcAft>
+                <a:spcPts val="300"/>
+              </a:spcAft>
+              <a:buNone/>
+            </a:pPr>
+            <a:r>
+              <a:rPr lang="en-US" sz="1200" i="1" dirty="0">
+                <a:solidFill>
+                  <a:srgbClr val="1C2833"/>
+                </a:solidFill>
+                <a:latin typeface="Arial" pitchFamily="34" charset="0"/>
+                <a:ea typeface="Arial" pitchFamily="34" charset="-122"/>
+                <a:cs typeface="Arial" pitchFamily="34" charset="-120"/>
+              </a:rPr>
+              <a:t>vīrya</a:t>
+            </a:r>
+            <a:pPr algn="l" indent="0" marL="0">
+              <a:lnSpc>
+                <a:spcPts val="1620"/>
+              </a:lnSpc>
+              <a:spcAft>
+                <a:spcPts val="300"/>
+              </a:spcAft>
+              <a:buNone/>
+            </a:pPr>
+            <a:r>
+              <a:rPr lang="en-US" sz="1200" dirty="0">
+                <a:solidFill>
+                  <a:srgbClr val="1C2833"/>
+                </a:solidFill>
+                <a:latin typeface="Arial" pitchFamily="34" charset="0"/>
+                <a:ea typeface="Arial" pitchFamily="34" charset="-122"/>
+                <a:cs typeface="Arial" pitchFamily="34" charset="-120"/>
+              </a:rPr>
+              <a:t>. Used in:</a:t>
+            </a:r>
+            <a:endParaRPr lang="en-US" sz="1200" dirty="0"/>
+          </a:p>
+        </p:txBody>
+      </p:sp>
+      <p:sp>
+        <p:nvSpPr>
+          <p:cNvPr id="5" name="Text 3"/>
+          <p:cNvSpPr/>
+          <p:nvPr/>
+        </p:nvSpPr>
+        <p:spPr>
+          <a:xfrm>
+            <a:off x="634901" y="1266974"/>
+            <a:ext cx="8102798" cy="731341"/>
+          </a:xfrm>
+          <a:prstGeom prst="rect">
+            <a:avLst/>
+          </a:prstGeom>
+          <a:noFill/>
+          <a:ln/>
+        </p:spPr>
+        <p:txBody>
+          <a:bodyPr wrap="square" lIns="0" tIns="0" rIns="0" bIns="0" rtlCol="0" anchor="t"/>
+          <a:lstStyle/>
+          <a:p>
+            <a:pPr algn="l" marL="342900" indent="-342900">
+              <a:lnSpc>
+                <a:spcPts val="1620"/>
+              </a:lnSpc>
+              <a:spcAft>
+                <a:spcPts val="300"/>
+              </a:spcAft>
+              <a:buSzPct val="100000"/>
+              <a:buChar char="•"/>
+            </a:pPr>
+            <a:r>
+              <a:rPr lang="en-US" sz="1200" dirty="0">
+                <a:solidFill>
+                  <a:srgbClr val="1C2833"/>
+                </a:solidFill>
+                <a:latin typeface="Arial" pitchFamily="34" charset="0"/>
+                <a:ea typeface="Arial" pitchFamily="34" charset="-122"/>
+                <a:cs typeface="Arial" pitchFamily="34" charset="-120"/>
+              </a:rPr>
+              <a:t>Tea / decoction for cold, congestion, light fever (small culinary amounts).</a:t>
+            </a:r>
+            <a:endParaRPr lang="en-US" sz="1200" dirty="0"/>
+          </a:p>
+          <a:p>
+            <a:pPr algn="l" marL="342900" indent="-342900">
+              <a:lnSpc>
+                <a:spcPts val="1620"/>
+              </a:lnSpc>
+              <a:spcAft>
+                <a:spcPts val="300"/>
+              </a:spcAft>
+              <a:buSzPct val="100000"/>
+              <a:buChar char="•"/>
+            </a:pPr>
+            <a:r>
+              <a:rPr lang="en-US" sz="1200" dirty="0">
+                <a:solidFill>
+                  <a:srgbClr val="1C2833"/>
+                </a:solidFill>
+                <a:latin typeface="Arial" pitchFamily="34" charset="0"/>
+                <a:ea typeface="Arial" pitchFamily="34" charset="-122"/>
+                <a:cs typeface="Arial" pitchFamily="34" charset="-120"/>
+              </a:rPr>
+              <a:t>Combined with jaggery for a sore throat (folk remedy; some mechanistic justification through the soothing/warming pairing).</a:t>
+            </a:r>
+            <a:endParaRPr lang="en-US" sz="1200" dirty="0"/>
+          </a:p>
+        </p:txBody>
+      </p:sp>
+      <p:sp>
+        <p:nvSpPr>
+          <p:cNvPr id="6" name="Text 4"/>
+          <p:cNvSpPr/>
+          <p:nvPr/>
+        </p:nvSpPr>
+        <p:spPr>
+          <a:xfrm>
+            <a:off x="406301" y="4434929"/>
+            <a:ext cx="8498026" cy="213271"/>
+          </a:xfrm>
+          <a:prstGeom prst="rect">
+            <a:avLst/>
+          </a:prstGeom>
+          <a:noFill/>
+          <a:ln/>
+        </p:spPr>
+        <p:txBody>
+          <a:bodyPr wrap="square" lIns="0" tIns="0" rIns="0" bIns="0" rtlCol="0" anchor="t"/>
+          <a:lstStyle/>
+          <a:p>
             <a:pPr algn="l" indent="0" marL="0">
               <a:lnSpc>
                 <a:spcPts val="1680"/>
@@ -3270,8 +4079,283 @@
                 <a:ea typeface="Arial" pitchFamily="34" charset="-122"/>
                 <a:cs typeface="Arial" pitchFamily="34" charset="-120"/>
               </a:rPr>
-              <a:t>– Gingerol → shogaol dehydration on drying: standard pharmacognosy textbook content. – Ginger as </a:t>
-            </a:r>
+              <a:t>Middle ·  · IKS Curriculum</a:t>
+            </a:r>
+            <a:endParaRPr lang="en-US" sz="1200" dirty="0"/>
+          </a:p>
+        </p:txBody>
+      </p:sp>
+    </p:spTree>
+  </p:cSld>
+  <p:clrMapOvr>
+    <a:masterClrMapping/>
+  </p:clrMapOvr>
+</p:sld>
+</file>
+
+<file path=ppt/slides/slide13.xml><?xml version="1.0" encoding="utf-8"?>
+<p:sld xmlns:a="http://schemas.openxmlformats.org/drawingml/2006/main" xmlns:r="http://schemas.openxmlformats.org/officeDocument/2006/relationships" xmlns:p="http://schemas.openxmlformats.org/presentationml/2006/main">
+  <p:cSld name="Slide 13">
+    <p:bg>
+      <p:bgPr>
+        <a:solidFill>
+          <a:srgbClr val="FFFFFF"/>
+        </a:solidFill>
+      </p:bgPr>
+    </p:bg>
+    <p:spTree>
+      <p:nvGrpSpPr>
+        <p:cNvPr id="1" name=""/>
+        <p:cNvGrpSpPr/>
+        <p:nvPr/>
+      </p:nvGrpSpPr>
+      <p:grpSpPr>
+        <a:xfrm>
+          <a:off x="0" y="0"/>
+          <a:ext cx="0" cy="0"/>
+          <a:chOff x="0" y="0"/>
+          <a:chExt cx="0" cy="0"/>
+        </a:xfrm>
+      </p:grpSpPr>
+      <p:sp>
+        <p:nvSpPr>
+          <p:cNvPr id="2" name="Text 0"/>
+          <p:cNvSpPr/>
+          <p:nvPr/>
+        </p:nvSpPr>
+        <p:spPr>
+          <a:xfrm>
+            <a:off x="0" y="0"/>
+            <a:ext cx="9144000" cy="101501"/>
+          </a:xfrm>
+          <a:prstGeom prst="rect">
+            <a:avLst/>
+          </a:prstGeom>
+          <a:solidFill>
+            <a:srgbClr val="277884"/>
+          </a:solidFill>
+          <a:ln/>
+        </p:spPr>
+        <p:txBody>
+          <a:bodyPr wrap="square" rtlCol="0" anchor="ctr"/>
+          <a:lstStyle/>
+          <a:p>
+            <a:pPr indent="0" marL="0">
+              <a:buNone/>
+            </a:pPr>
+            <a:endParaRPr lang="en-US" dirty="0"/>
+          </a:p>
+        </p:txBody>
+      </p:sp>
+      <p:sp>
+        <p:nvSpPr>
+          <p:cNvPr id="3" name="Text 1"/>
+          <p:cNvSpPr/>
+          <p:nvPr/>
+        </p:nvSpPr>
+        <p:spPr>
+          <a:xfrm>
+            <a:off x="406301" y="457051"/>
+            <a:ext cx="8498026" cy="274290"/>
+          </a:xfrm>
+          <a:prstGeom prst="rect">
+            <a:avLst/>
+          </a:prstGeom>
+          <a:noFill/>
+          <a:ln/>
+        </p:spPr>
+        <p:txBody>
+          <a:bodyPr wrap="square" lIns="0" tIns="0" rIns="0" bIns="0" rtlCol="0" anchor="t"/>
+          <a:lstStyle/>
+          <a:p>
+            <a:pPr algn="l" indent="0" marL="0">
+              <a:lnSpc>
+                <a:spcPts val="2160"/>
+              </a:lnSpc>
+              <a:spcBef>
+                <a:spcPts val="600"/>
+              </a:spcBef>
+              <a:spcAft>
+                <a:spcPts val="800"/>
+              </a:spcAft>
+              <a:buNone/>
+            </a:pPr>
+            <a:r>
+              <a:rPr lang="en-US" sz="1800" b="1" dirty="0">
+                <a:solidFill>
+                  <a:srgbClr val="FE4447"/>
+                </a:solidFill>
+                <a:latin typeface="Georgia" pitchFamily="34" charset="0"/>
+                <a:ea typeface="Georgia" pitchFamily="34" charset="-122"/>
+                <a:cs typeface="Georgia" pitchFamily="34" charset="-120"/>
+              </a:rPr>
+              <a:t>Core (20 min) (cont.)</a:t>
+            </a:r>
+            <a:endParaRPr lang="en-US" sz="1800" dirty="0"/>
+          </a:p>
+        </p:txBody>
+      </p:sp>
+      <p:sp>
+        <p:nvSpPr>
+          <p:cNvPr id="4" name="Text 2"/>
+          <p:cNvSpPr/>
+          <p:nvPr/>
+        </p:nvSpPr>
+        <p:spPr>
+          <a:xfrm>
+            <a:off x="634901" y="883593"/>
+            <a:ext cx="8102798" cy="281880"/>
+          </a:xfrm>
+          <a:prstGeom prst="rect">
+            <a:avLst/>
+          </a:prstGeom>
+          <a:noFill/>
+          <a:ln/>
+        </p:spPr>
+        <p:txBody>
+          <a:bodyPr wrap="square" lIns="0" tIns="0" rIns="0" bIns="0" rtlCol="0" anchor="t"/>
+          <a:lstStyle/>
+          <a:p>
+            <a:pPr algn="l" marL="342900" indent="-342900">
+              <a:lnSpc>
+                <a:spcPts val="1620"/>
+              </a:lnSpc>
+              <a:spcAft>
+                <a:spcPts val="300"/>
+              </a:spcAft>
+              <a:buSzPct val="100000"/>
+              <a:buChar char="•"/>
+            </a:pPr>
+            <a:r>
+              <a:rPr lang="en-US" sz="1200" b="1" dirty="0">
+                <a:solidFill>
+                  <a:srgbClr val="1C2833"/>
+                </a:solidFill>
+                <a:latin typeface="Arial" pitchFamily="34" charset="0"/>
+                <a:ea typeface="Arial" pitchFamily="34" charset="-122"/>
+                <a:cs typeface="Arial" pitchFamily="34" charset="-120"/>
+              </a:rPr>
+              <a:t>Cautions:</a:t>
+            </a:r>
+            <a:endParaRPr lang="en-US" sz="1200" dirty="0"/>
+          </a:p>
+        </p:txBody>
+      </p:sp>
+      <p:sp>
+        <p:nvSpPr>
+          <p:cNvPr id="5" name="Text 3"/>
+          <p:cNvSpPr/>
+          <p:nvPr/>
+        </p:nvSpPr>
+        <p:spPr>
+          <a:xfrm>
+            <a:off x="634901" y="1266974"/>
+            <a:ext cx="8102798" cy="975122"/>
+          </a:xfrm>
+          <a:prstGeom prst="rect">
+            <a:avLst/>
+          </a:prstGeom>
+          <a:noFill/>
+          <a:ln/>
+        </p:spPr>
+        <p:txBody>
+          <a:bodyPr wrap="square" lIns="0" tIns="0" rIns="0" bIns="0" rtlCol="0" anchor="t"/>
+          <a:lstStyle/>
+          <a:p>
+            <a:pPr algn="l" marL="342900" indent="-342900">
+              <a:lnSpc>
+                <a:spcPts val="1620"/>
+              </a:lnSpc>
+              <a:spcAft>
+                <a:spcPts val="300"/>
+              </a:spcAft>
+              <a:buSzPct val="100000"/>
+              <a:buChar char="•"/>
+            </a:pPr>
+            <a:r>
+              <a:rPr lang="en-US" sz="1200" dirty="0">
+                <a:solidFill>
+                  <a:srgbClr val="1C2833"/>
+                </a:solidFill>
+                <a:latin typeface="Arial" pitchFamily="34" charset="0"/>
+                <a:ea typeface="Arial" pitchFamily="34" charset="-122"/>
+                <a:cs typeface="Arial" pitchFamily="34" charset="-120"/>
+              </a:rPr>
+              <a:t>Large doses can cause heartburn or stomach upset.</a:t>
+            </a:r>
+            <a:endParaRPr lang="en-US" sz="1200" dirty="0"/>
+          </a:p>
+          <a:p>
+            <a:pPr algn="l" marL="342900" indent="-342900">
+              <a:lnSpc>
+                <a:spcPts val="1620"/>
+              </a:lnSpc>
+              <a:spcAft>
+                <a:spcPts val="300"/>
+              </a:spcAft>
+              <a:buSzPct val="100000"/>
+              <a:buChar char="•"/>
+            </a:pPr>
+            <a:r>
+              <a:rPr lang="en-US" sz="1200" dirty="0">
+                <a:solidFill>
+                  <a:srgbClr val="1C2833"/>
+                </a:solidFill>
+                <a:latin typeface="Arial" pitchFamily="34" charset="0"/>
+                <a:ea typeface="Arial" pitchFamily="34" charset="-122"/>
+                <a:cs typeface="Arial" pitchFamily="34" charset="-120"/>
+              </a:rPr>
+              <a:t>Pregnancy — doses higher than culinary need supervision.</a:t>
+            </a:r>
+            <a:endParaRPr lang="en-US" sz="1200" dirty="0"/>
+          </a:p>
+          <a:p>
+            <a:pPr algn="l" marL="342900" indent="-342900">
+              <a:lnSpc>
+                <a:spcPts val="1620"/>
+              </a:lnSpc>
+              <a:spcAft>
+                <a:spcPts val="300"/>
+              </a:spcAft>
+              <a:buSzPct val="100000"/>
+              <a:buChar char="•"/>
+            </a:pPr>
+            <a:r>
+              <a:rPr lang="en-US" sz="1200" dirty="0">
+                <a:solidFill>
+                  <a:srgbClr val="1C2833"/>
+                </a:solidFill>
+                <a:latin typeface="Arial" pitchFamily="34" charset="0"/>
+                <a:ea typeface="Arial" pitchFamily="34" charset="-122"/>
+                <a:cs typeface="Arial" pitchFamily="34" charset="-120"/>
+              </a:rPr>
+              <a:t>Some blood-thinning medications (warfarin) interact with high ginger intake. Not a school-dose concern but worth knowing.</a:t>
+            </a:r>
+            <a:endParaRPr lang="en-US" sz="1200" dirty="0"/>
+          </a:p>
+        </p:txBody>
+      </p:sp>
+      <p:sp>
+        <p:nvSpPr>
+          <p:cNvPr id="6" name="Text 4"/>
+          <p:cNvSpPr/>
+          <p:nvPr/>
+        </p:nvSpPr>
+        <p:spPr>
+          <a:xfrm>
+            <a:off x="406301" y="4434929"/>
+            <a:ext cx="8498026" cy="213271"/>
+          </a:xfrm>
+          <a:prstGeom prst="rect">
+            <a:avLst/>
+          </a:prstGeom>
+          <a:noFill/>
+          <a:ln/>
+        </p:spPr>
+        <p:txBody>
+          <a:bodyPr wrap="square" lIns="0" tIns="0" rIns="0" bIns="0" rtlCol="0" anchor="t"/>
+          <a:lstStyle/>
+          <a:p>
             <a:pPr algn="l" indent="0" marL="0">
               <a:lnSpc>
                 <a:spcPts val="1680"/>
@@ -3285,6 +4369,781 @@
               <a:buNone/>
             </a:pPr>
             <a:r>
+              <a:rPr lang="en-US" sz="1200" dirty="0">
+                <a:solidFill>
+                  <a:srgbClr val="1C2833"/>
+                </a:solidFill>
+                <a:latin typeface="Arial" pitchFamily="34" charset="0"/>
+                <a:ea typeface="Arial" pitchFamily="34" charset="-122"/>
+                <a:cs typeface="Arial" pitchFamily="34" charset="-120"/>
+              </a:rPr>
+              <a:t>Middle ·  · IKS Curriculum</a:t>
+            </a:r>
+            <a:endParaRPr lang="en-US" sz="1200" dirty="0"/>
+          </a:p>
+        </p:txBody>
+      </p:sp>
+    </p:spTree>
+  </p:cSld>
+  <p:clrMapOvr>
+    <a:masterClrMapping/>
+  </p:clrMapOvr>
+</p:sld>
+</file>
+
+<file path=ppt/slides/slide14.xml><?xml version="1.0" encoding="utf-8"?>
+<p:sld xmlns:a="http://schemas.openxmlformats.org/drawingml/2006/main" xmlns:r="http://schemas.openxmlformats.org/officeDocument/2006/relationships" xmlns:p="http://schemas.openxmlformats.org/presentationml/2006/main">
+  <p:cSld name="Slide 14">
+    <p:bg>
+      <p:bgPr>
+        <a:solidFill>
+          <a:srgbClr val="FFFFFF"/>
+        </a:solidFill>
+      </p:bgPr>
+    </p:bg>
+    <p:spTree>
+      <p:nvGrpSpPr>
+        <p:cNvPr id="1" name=""/>
+        <p:cNvGrpSpPr/>
+        <p:nvPr/>
+      </p:nvGrpSpPr>
+      <p:grpSpPr>
+        <a:xfrm>
+          <a:off x="0" y="0"/>
+          <a:ext cx="0" cy="0"/>
+          <a:chOff x="0" y="0"/>
+          <a:chExt cx="0" cy="0"/>
+        </a:xfrm>
+      </p:grpSpPr>
+      <p:sp>
+        <p:nvSpPr>
+          <p:cNvPr id="2" name="Text 0"/>
+          <p:cNvSpPr/>
+          <p:nvPr/>
+        </p:nvSpPr>
+        <p:spPr>
+          <a:xfrm>
+            <a:off x="0" y="0"/>
+            <a:ext cx="9144000" cy="101501"/>
+          </a:xfrm>
+          <a:prstGeom prst="rect">
+            <a:avLst/>
+          </a:prstGeom>
+          <a:solidFill>
+            <a:srgbClr val="277884"/>
+          </a:solidFill>
+          <a:ln/>
+        </p:spPr>
+        <p:txBody>
+          <a:bodyPr wrap="square" rtlCol="0" anchor="ctr"/>
+          <a:lstStyle/>
+          <a:p>
+            <a:pPr indent="0" marL="0">
+              <a:buNone/>
+            </a:pPr>
+            <a:endParaRPr lang="en-US" dirty="0"/>
+          </a:p>
+        </p:txBody>
+      </p:sp>
+      <p:sp>
+        <p:nvSpPr>
+          <p:cNvPr id="3" name="Text 1"/>
+          <p:cNvSpPr/>
+          <p:nvPr/>
+        </p:nvSpPr>
+        <p:spPr>
+          <a:xfrm>
+            <a:off x="406301" y="457051"/>
+            <a:ext cx="8498026" cy="274290"/>
+          </a:xfrm>
+          <a:prstGeom prst="rect">
+            <a:avLst/>
+          </a:prstGeom>
+          <a:noFill/>
+          <a:ln/>
+        </p:spPr>
+        <p:txBody>
+          <a:bodyPr wrap="square" lIns="0" tIns="0" rIns="0" bIns="0" rtlCol="0" anchor="t"/>
+          <a:lstStyle/>
+          <a:p>
+            <a:pPr algn="l" indent="0" marL="0">
+              <a:lnSpc>
+                <a:spcPts val="2160"/>
+              </a:lnSpc>
+              <a:spcBef>
+                <a:spcPts val="600"/>
+              </a:spcBef>
+              <a:spcAft>
+                <a:spcPts val="800"/>
+              </a:spcAft>
+              <a:buNone/>
+            </a:pPr>
+            <a:r>
+              <a:rPr lang="en-US" sz="1800" b="1" dirty="0">
+                <a:solidFill>
+                  <a:srgbClr val="FE4447"/>
+                </a:solidFill>
+                <a:latin typeface="Georgia" pitchFamily="34" charset="0"/>
+                <a:ea typeface="Georgia" pitchFamily="34" charset="-122"/>
+                <a:cs typeface="Georgia" pitchFamily="34" charset="-120"/>
+              </a:rPr>
+              <a:t>Activity (15 min) — Ginger tea demo + Formative Quiz Part B</a:t>
+            </a:r>
+            <a:endParaRPr lang="en-US" sz="1800" dirty="0"/>
+          </a:p>
+        </p:txBody>
+      </p:sp>
+      <p:sp>
+        <p:nvSpPr>
+          <p:cNvPr id="4" name="Text 2"/>
+          <p:cNvSpPr/>
+          <p:nvPr/>
+        </p:nvSpPr>
+        <p:spPr>
+          <a:xfrm>
+            <a:off x="406301" y="870942"/>
+            <a:ext cx="8498026" cy="213271"/>
+          </a:xfrm>
+          <a:prstGeom prst="rect">
+            <a:avLst/>
+          </a:prstGeom>
+          <a:noFill/>
+          <a:ln/>
+        </p:spPr>
+        <p:txBody>
+          <a:bodyPr wrap="square" lIns="0" tIns="0" rIns="0" bIns="0" rtlCol="0" anchor="t"/>
+          <a:lstStyle/>
+          <a:p>
+            <a:pPr algn="l" indent="0" marL="0">
+              <a:lnSpc>
+                <a:spcPts val="1680"/>
+              </a:lnSpc>
+              <a:spcBef>
+                <a:spcPts val="300"/>
+              </a:spcBef>
+              <a:spcAft>
+                <a:spcPts val="300"/>
+              </a:spcAft>
+              <a:buNone/>
+            </a:pPr>
+            <a:r>
+              <a:rPr lang="en-US" sz="1200" b="1" dirty="0">
+                <a:solidFill>
+                  <a:srgbClr val="1C2833"/>
+                </a:solidFill>
+                <a:latin typeface="Arial" pitchFamily="34" charset="0"/>
+                <a:ea typeface="Arial" pitchFamily="34" charset="-122"/>
+                <a:cs typeface="Arial" pitchFamily="34" charset="-120"/>
+              </a:rPr>
+              <a:t>First 7 min — Tea demo:</a:t>
+            </a:r>
+            <a:endParaRPr lang="en-US" sz="1200" dirty="0"/>
+          </a:p>
+        </p:txBody>
+      </p:sp>
+      <p:sp>
+        <p:nvSpPr>
+          <p:cNvPr id="5" name="Text 3"/>
+          <p:cNvSpPr/>
+          <p:nvPr/>
+        </p:nvSpPr>
+        <p:spPr>
+          <a:xfrm>
+            <a:off x="634901" y="1173063"/>
+            <a:ext cx="8102798" cy="1424583"/>
+          </a:xfrm>
+          <a:prstGeom prst="rect">
+            <a:avLst/>
+          </a:prstGeom>
+          <a:noFill/>
+          <a:ln/>
+        </p:spPr>
+        <p:txBody>
+          <a:bodyPr wrap="square" lIns="0" tIns="0" rIns="0" bIns="0" rtlCol="0" anchor="t"/>
+          <a:lstStyle/>
+          <a:p>
+            <a:pPr algn="l" marL="342900" indent="-342900">
+              <a:lnSpc>
+                <a:spcPts val="1620"/>
+              </a:lnSpc>
+              <a:spcAft>
+                <a:spcPts val="300"/>
+              </a:spcAft>
+              <a:buSzPct val="100000"/>
+              <a:buChar char="•"/>
+            </a:pPr>
+            <a:r>
+              <a:rPr lang="en-US" sz="1200" dirty="0">
+                <a:solidFill>
+                  <a:srgbClr val="1C2833"/>
+                </a:solidFill>
+                <a:latin typeface="Arial" pitchFamily="34" charset="0"/>
+                <a:ea typeface="Arial" pitchFamily="34" charset="-122"/>
+                <a:cs typeface="Arial" pitchFamily="34" charset="-120"/>
+              </a:rPr>
+              <a:t>Teacher slices a 1 cm piece of fresh ginger, drops into 200 ml hot water, lets steep 3–4 minutes.</a:t>
+            </a:r>
+            <a:endParaRPr lang="en-US" sz="1200" dirty="0"/>
+          </a:p>
+          <a:p>
+            <a:pPr algn="l" marL="342900" indent="-342900">
+              <a:lnSpc>
+                <a:spcPts val="1620"/>
+              </a:lnSpc>
+              <a:spcAft>
+                <a:spcPts val="300"/>
+              </a:spcAft>
+              <a:buSzPct val="100000"/>
+              <a:buChar char="•"/>
+            </a:pPr>
+            <a:r>
+              <a:rPr lang="en-US" sz="1200" dirty="0">
+                <a:solidFill>
+                  <a:srgbClr val="1C2833"/>
+                </a:solidFill>
+                <a:latin typeface="Arial" pitchFamily="34" charset="0"/>
+                <a:ea typeface="Arial" pitchFamily="34" charset="-122"/>
+                <a:cs typeface="Arial" pitchFamily="34" charset="-120"/>
+              </a:rPr>
+              <a:t>Optional: add a tiny pinch of jaggery and a drop of lemon.</a:t>
+            </a:r>
+            <a:endParaRPr lang="en-US" sz="1200" dirty="0"/>
+          </a:p>
+          <a:p>
+            <a:pPr algn="l" marL="342900" indent="-342900">
+              <a:lnSpc>
+                <a:spcPts val="1620"/>
+              </a:lnSpc>
+              <a:spcAft>
+                <a:spcPts val="300"/>
+              </a:spcAft>
+              <a:buSzPct val="100000"/>
+              <a:buChar char="•"/>
+            </a:pPr>
+            <a:r>
+              <a:rPr lang="en-US" sz="1200" dirty="0">
+                <a:solidFill>
+                  <a:srgbClr val="1C2833"/>
+                </a:solidFill>
+                <a:latin typeface="Arial" pitchFamily="34" charset="0"/>
+                <a:ea typeface="Arial" pitchFamily="34" charset="-122"/>
+                <a:cs typeface="Arial" pitchFamily="34" charset="-120"/>
+              </a:rPr>
+              <a:t>Pour into a clear cup. Pass around so students can see the colour (very pale yellow) and smell the aroma (sharp, pungent, citrus-warm).</a:t>
+            </a:r>
+            <a:endParaRPr lang="en-US" sz="1200" dirty="0"/>
+          </a:p>
+          <a:p>
+            <a:pPr algn="l" marL="342900" indent="-342900">
+              <a:lnSpc>
+                <a:spcPts val="1620"/>
+              </a:lnSpc>
+              <a:spcAft>
+                <a:spcPts val="300"/>
+              </a:spcAft>
+              <a:buSzPct val="100000"/>
+              <a:buChar char="•"/>
+            </a:pPr>
+            <a:r>
+              <a:rPr lang="en-US" sz="1200" dirty="0">
+                <a:solidFill>
+                  <a:srgbClr val="1C2833"/>
+                </a:solidFill>
+                <a:latin typeface="Arial" pitchFamily="34" charset="0"/>
+                <a:ea typeface="Arial" pitchFamily="34" charset="-122"/>
+                <a:cs typeface="Arial" pitchFamily="34" charset="-120"/>
+              </a:rPr>
+              <a:t>Discussion: which compound dominates here — gingerol or shogaol? (Since the ginger is fresh and only briefly heated: mostly gingerol.) If the ginger had been dried first and then steeped: more shogaol.</a:t>
+            </a:r>
+            <a:endParaRPr lang="en-US" sz="1200" dirty="0"/>
+          </a:p>
+        </p:txBody>
+      </p:sp>
+      <p:sp>
+        <p:nvSpPr>
+          <p:cNvPr id="6" name="Text 4"/>
+          <p:cNvSpPr/>
+          <p:nvPr/>
+        </p:nvSpPr>
+        <p:spPr>
+          <a:xfrm>
+            <a:off x="406301" y="4434929"/>
+            <a:ext cx="8498026" cy="213271"/>
+          </a:xfrm>
+          <a:prstGeom prst="rect">
+            <a:avLst/>
+          </a:prstGeom>
+          <a:noFill/>
+          <a:ln/>
+        </p:spPr>
+        <p:txBody>
+          <a:bodyPr wrap="square" lIns="0" tIns="0" rIns="0" bIns="0" rtlCol="0" anchor="t"/>
+          <a:lstStyle/>
+          <a:p>
+            <a:pPr algn="l" indent="0" marL="0">
+              <a:lnSpc>
+                <a:spcPts val="1680"/>
+              </a:lnSpc>
+              <a:spcBef>
+                <a:spcPts val="300"/>
+              </a:spcBef>
+              <a:spcAft>
+                <a:spcPts val="300"/>
+              </a:spcAft>
+              <a:buNone/>
+            </a:pPr>
+            <a:r>
+              <a:rPr lang="en-US" sz="1200" dirty="0">
+                <a:solidFill>
+                  <a:srgbClr val="1C2833"/>
+                </a:solidFill>
+                <a:latin typeface="Arial" pitchFamily="34" charset="0"/>
+                <a:ea typeface="Arial" pitchFamily="34" charset="-122"/>
+                <a:cs typeface="Arial" pitchFamily="34" charset="-120"/>
+              </a:rPr>
+              <a:t>Middle ·  · IKS Curriculum</a:t>
+            </a:r>
+            <a:endParaRPr lang="en-US" sz="1200" dirty="0"/>
+          </a:p>
+        </p:txBody>
+      </p:sp>
+    </p:spTree>
+  </p:cSld>
+  <p:clrMapOvr>
+    <a:masterClrMapping/>
+  </p:clrMapOvr>
+</p:sld>
+</file>
+
+<file path=ppt/slides/slide15.xml><?xml version="1.0" encoding="utf-8"?>
+<p:sld xmlns:a="http://schemas.openxmlformats.org/drawingml/2006/main" xmlns:r="http://schemas.openxmlformats.org/officeDocument/2006/relationships" xmlns:p="http://schemas.openxmlformats.org/presentationml/2006/main">
+  <p:cSld name="Slide 15">
+    <p:bg>
+      <p:bgPr>
+        <a:solidFill>
+          <a:srgbClr val="FFFFFF"/>
+        </a:solidFill>
+      </p:bgPr>
+    </p:bg>
+    <p:spTree>
+      <p:nvGrpSpPr>
+        <p:cNvPr id="1" name=""/>
+        <p:cNvGrpSpPr/>
+        <p:nvPr/>
+      </p:nvGrpSpPr>
+      <p:grpSpPr>
+        <a:xfrm>
+          <a:off x="0" y="0"/>
+          <a:ext cx="0" cy="0"/>
+          <a:chOff x="0" y="0"/>
+          <a:chExt cx="0" cy="0"/>
+        </a:xfrm>
+      </p:grpSpPr>
+      <p:sp>
+        <p:nvSpPr>
+          <p:cNvPr id="2" name="Text 0"/>
+          <p:cNvSpPr/>
+          <p:nvPr/>
+        </p:nvSpPr>
+        <p:spPr>
+          <a:xfrm>
+            <a:off x="0" y="0"/>
+            <a:ext cx="9144000" cy="101501"/>
+          </a:xfrm>
+          <a:prstGeom prst="rect">
+            <a:avLst/>
+          </a:prstGeom>
+          <a:solidFill>
+            <a:srgbClr val="277884"/>
+          </a:solidFill>
+          <a:ln/>
+        </p:spPr>
+        <p:txBody>
+          <a:bodyPr wrap="square" rtlCol="0" anchor="ctr"/>
+          <a:lstStyle/>
+          <a:p>
+            <a:pPr indent="0" marL="0">
+              <a:buNone/>
+            </a:pPr>
+            <a:endParaRPr lang="en-US" dirty="0"/>
+          </a:p>
+        </p:txBody>
+      </p:sp>
+      <p:sp>
+        <p:nvSpPr>
+          <p:cNvPr id="3" name="Text 1"/>
+          <p:cNvSpPr/>
+          <p:nvPr/>
+        </p:nvSpPr>
+        <p:spPr>
+          <a:xfrm>
+            <a:off x="406301" y="457051"/>
+            <a:ext cx="8498026" cy="274290"/>
+          </a:xfrm>
+          <a:prstGeom prst="rect">
+            <a:avLst/>
+          </a:prstGeom>
+          <a:noFill/>
+          <a:ln/>
+        </p:spPr>
+        <p:txBody>
+          <a:bodyPr wrap="square" lIns="0" tIns="0" rIns="0" bIns="0" rtlCol="0" anchor="t"/>
+          <a:lstStyle/>
+          <a:p>
+            <a:pPr algn="l" indent="0" marL="0">
+              <a:lnSpc>
+                <a:spcPts val="2160"/>
+              </a:lnSpc>
+              <a:spcBef>
+                <a:spcPts val="600"/>
+              </a:spcBef>
+              <a:spcAft>
+                <a:spcPts val="800"/>
+              </a:spcAft>
+              <a:buNone/>
+            </a:pPr>
+            <a:r>
+              <a:rPr lang="en-US" sz="1800" b="1" dirty="0">
+                <a:solidFill>
+                  <a:srgbClr val="FE4447"/>
+                </a:solidFill>
+                <a:latin typeface="Georgia" pitchFamily="34" charset="0"/>
+                <a:ea typeface="Georgia" pitchFamily="34" charset="-122"/>
+                <a:cs typeface="Georgia" pitchFamily="34" charset="-120"/>
+              </a:rPr>
+              <a:t>Activity (15 min) — Ginger tea demo + Formative Quiz Part B (cont.)</a:t>
+            </a:r>
+            <a:endParaRPr lang="en-US" sz="1800" dirty="0"/>
+          </a:p>
+        </p:txBody>
+      </p:sp>
+      <p:sp>
+        <p:nvSpPr>
+          <p:cNvPr id="4" name="Text 2"/>
+          <p:cNvSpPr/>
+          <p:nvPr/>
+        </p:nvSpPr>
+        <p:spPr>
+          <a:xfrm>
+            <a:off x="406301" y="870942"/>
+            <a:ext cx="8498026" cy="436066"/>
+          </a:xfrm>
+          <a:prstGeom prst="rect">
+            <a:avLst/>
+          </a:prstGeom>
+          <a:noFill/>
+          <a:ln/>
+        </p:spPr>
+        <p:txBody>
+          <a:bodyPr wrap="square" lIns="0" tIns="0" rIns="0" bIns="0" rtlCol="0" anchor="t"/>
+          <a:lstStyle/>
+          <a:p>
+            <a:pPr algn="l" indent="0" marL="0">
+              <a:lnSpc>
+                <a:spcPts val="1680"/>
+              </a:lnSpc>
+              <a:spcBef>
+                <a:spcPts val="300"/>
+              </a:spcBef>
+              <a:spcAft>
+                <a:spcPts val="300"/>
+              </a:spcAft>
+              <a:buNone/>
+            </a:pPr>
+            <a:r>
+              <a:rPr lang="en-US" sz="1200" b="1" dirty="0">
+                <a:solidFill>
+                  <a:srgbClr val="1C2833"/>
+                </a:solidFill>
+                <a:latin typeface="Arial" pitchFamily="34" charset="0"/>
+                <a:ea typeface="Arial" pitchFamily="34" charset="-122"/>
+                <a:cs typeface="Arial" pitchFamily="34" charset="-120"/>
+              </a:rPr>
+              <a:t>Next 8 min — Formative Quiz Part B</a:t>
+            </a:r>
+            <a:pPr algn="l" indent="0" marL="0">
+              <a:lnSpc>
+                <a:spcPts val="1680"/>
+              </a:lnSpc>
+              <a:spcBef>
+                <a:spcPts val="300"/>
+              </a:spcBef>
+              <a:spcAft>
+                <a:spcPts val="300"/>
+              </a:spcAft>
+              <a:buNone/>
+            </a:pPr>
+            <a:r>
+              <a:rPr lang="en-US" sz="1200" dirty="0">
+                <a:solidFill>
+                  <a:srgbClr val="1C2833"/>
+                </a:solidFill>
+                <a:latin typeface="Arial" pitchFamily="34" charset="0"/>
+                <a:ea typeface="Arial" pitchFamily="34" charset="-122"/>
+                <a:cs typeface="Arial" pitchFamily="34" charset="-120"/>
+              </a:rPr>
+              <a:t> (from </a:t>
+            </a:r>
+            <a:pPr algn="l" indent="0" marL="0">
+              <a:lnSpc>
+                <a:spcPts val="1680"/>
+              </a:lnSpc>
+              <a:spcBef>
+                <a:spcPts val="300"/>
+              </a:spcBef>
+              <a:spcAft>
+                <a:spcPts val="300"/>
+              </a:spcAft>
+              <a:buNone/>
+            </a:pPr>
+            <a:r>
+              <a:rPr lang="en-US" sz="1200" dirty="0">
+                <a:solidFill>
+                  <a:srgbClr val="1C2833"/>
+                </a:solidFill>
+                <a:latin typeface="Arial" pitchFamily="34" charset="0"/>
+                <a:ea typeface="Arial" pitchFamily="34" charset="-122"/>
+                <a:cs typeface="Arial" pitchFamily="34" charset="-120"/>
+              </a:rPr>
+              <a:t>quizzes/formative.md</a:t>
+            </a:r>
+            <a:pPr algn="l" indent="0" marL="0">
+              <a:lnSpc>
+                <a:spcPts val="1680"/>
+              </a:lnSpc>
+              <a:spcBef>
+                <a:spcPts val="300"/>
+              </a:spcBef>
+              <a:spcAft>
+                <a:spcPts val="300"/>
+              </a:spcAft>
+              <a:buNone/>
+            </a:pPr>
+            <a:r>
+              <a:rPr lang="en-US" sz="1200" dirty="0">
+                <a:solidFill>
+                  <a:srgbClr val="1C2833"/>
+                </a:solidFill>
+                <a:latin typeface="Arial" pitchFamily="34" charset="0"/>
+                <a:ea typeface="Arial" pitchFamily="34" charset="-122"/>
+                <a:cs typeface="Arial" pitchFamily="34" charset="-120"/>
+              </a:rPr>
+              <a:t>). Hand out the 10-question slip. Pencils only. Collect at end of class.</a:t>
+            </a:r>
+            <a:endParaRPr lang="en-US" sz="1200" dirty="0"/>
+          </a:p>
+        </p:txBody>
+      </p:sp>
+      <p:sp>
+        <p:nvSpPr>
+          <p:cNvPr id="5" name="Text 3"/>
+          <p:cNvSpPr/>
+          <p:nvPr/>
+        </p:nvSpPr>
+        <p:spPr>
+          <a:xfrm>
+            <a:off x="406301" y="4434929"/>
+            <a:ext cx="8498026" cy="213271"/>
+          </a:xfrm>
+          <a:prstGeom prst="rect">
+            <a:avLst/>
+          </a:prstGeom>
+          <a:noFill/>
+          <a:ln/>
+        </p:spPr>
+        <p:txBody>
+          <a:bodyPr wrap="square" lIns="0" tIns="0" rIns="0" bIns="0" rtlCol="0" anchor="t"/>
+          <a:lstStyle/>
+          <a:p>
+            <a:pPr algn="l" indent="0" marL="0">
+              <a:lnSpc>
+                <a:spcPts val="1680"/>
+              </a:lnSpc>
+              <a:spcBef>
+                <a:spcPts val="300"/>
+              </a:spcBef>
+              <a:spcAft>
+                <a:spcPts val="300"/>
+              </a:spcAft>
+              <a:buNone/>
+            </a:pPr>
+            <a:r>
+              <a:rPr lang="en-US" sz="1200" dirty="0">
+                <a:solidFill>
+                  <a:srgbClr val="1C2833"/>
+                </a:solidFill>
+                <a:latin typeface="Arial" pitchFamily="34" charset="0"/>
+                <a:ea typeface="Arial" pitchFamily="34" charset="-122"/>
+                <a:cs typeface="Arial" pitchFamily="34" charset="-120"/>
+              </a:rPr>
+              <a:t>Middle ·  · IKS Curriculum</a:t>
+            </a:r>
+            <a:endParaRPr lang="en-US" sz="1200" dirty="0"/>
+          </a:p>
+        </p:txBody>
+      </p:sp>
+    </p:spTree>
+  </p:cSld>
+  <p:clrMapOvr>
+    <a:masterClrMapping/>
+  </p:clrMapOvr>
+</p:sld>
+</file>
+
+<file path=ppt/slides/slide16.xml><?xml version="1.0" encoding="utf-8"?>
+<p:sld xmlns:a="http://schemas.openxmlformats.org/drawingml/2006/main" xmlns:r="http://schemas.openxmlformats.org/officeDocument/2006/relationships" xmlns:p="http://schemas.openxmlformats.org/presentationml/2006/main">
+  <p:cSld name="Slide 16">
+    <p:bg>
+      <p:bgPr>
+        <a:solidFill>
+          <a:srgbClr val="FFFFFF"/>
+        </a:solidFill>
+      </p:bgPr>
+    </p:bg>
+    <p:spTree>
+      <p:nvGrpSpPr>
+        <p:cNvPr id="1" name=""/>
+        <p:cNvGrpSpPr/>
+        <p:nvPr/>
+      </p:nvGrpSpPr>
+      <p:grpSpPr>
+        <a:xfrm>
+          <a:off x="0" y="0"/>
+          <a:ext cx="0" cy="0"/>
+          <a:chOff x="0" y="0"/>
+          <a:chExt cx="0" cy="0"/>
+        </a:xfrm>
+      </p:grpSpPr>
+      <p:sp>
+        <p:nvSpPr>
+          <p:cNvPr id="2" name="Text 0"/>
+          <p:cNvSpPr/>
+          <p:nvPr/>
+        </p:nvSpPr>
+        <p:spPr>
+          <a:xfrm>
+            <a:off x="0" y="0"/>
+            <a:ext cx="9144000" cy="101501"/>
+          </a:xfrm>
+          <a:prstGeom prst="rect">
+            <a:avLst/>
+          </a:prstGeom>
+          <a:solidFill>
+            <a:srgbClr val="277884"/>
+          </a:solidFill>
+          <a:ln/>
+        </p:spPr>
+        <p:txBody>
+          <a:bodyPr wrap="square" rtlCol="0" anchor="ctr"/>
+          <a:lstStyle/>
+          <a:p>
+            <a:pPr indent="0" marL="0">
+              <a:buNone/>
+            </a:pPr>
+            <a:endParaRPr lang="en-US" dirty="0"/>
+          </a:p>
+        </p:txBody>
+      </p:sp>
+      <p:sp>
+        <p:nvSpPr>
+          <p:cNvPr id="3" name="Text 1"/>
+          <p:cNvSpPr/>
+          <p:nvPr/>
+        </p:nvSpPr>
+        <p:spPr>
+          <a:xfrm>
+            <a:off x="406301" y="457051"/>
+            <a:ext cx="8498026" cy="274290"/>
+          </a:xfrm>
+          <a:prstGeom prst="rect">
+            <a:avLst/>
+          </a:prstGeom>
+          <a:noFill/>
+          <a:ln/>
+        </p:spPr>
+        <p:txBody>
+          <a:bodyPr wrap="square" lIns="0" tIns="0" rIns="0" bIns="0" rtlCol="0" anchor="t"/>
+          <a:lstStyle/>
+          <a:p>
+            <a:pPr algn="l" indent="0" marL="0">
+              <a:lnSpc>
+                <a:spcPts val="2160"/>
+              </a:lnSpc>
+              <a:spcBef>
+                <a:spcPts val="600"/>
+              </a:spcBef>
+              <a:spcAft>
+                <a:spcPts val="800"/>
+              </a:spcAft>
+              <a:buNone/>
+            </a:pPr>
+            <a:r>
+              <a:rPr lang="en-US" sz="1800" b="1" dirty="0">
+                <a:solidFill>
+                  <a:srgbClr val="FE4447"/>
+                </a:solidFill>
+                <a:latin typeface="Georgia" pitchFamily="34" charset="0"/>
+                <a:ea typeface="Georgia" pitchFamily="34" charset="-122"/>
+                <a:cs typeface="Georgia" pitchFamily="34" charset="-120"/>
+              </a:rPr>
+              <a:t>Wrap-up (5 min)</a:t>
+            </a:r>
+            <a:endParaRPr lang="en-US" sz="1800" dirty="0"/>
+          </a:p>
+        </p:txBody>
+      </p:sp>
+      <p:sp>
+        <p:nvSpPr>
+          <p:cNvPr id="4" name="Text 2"/>
+          <p:cNvSpPr/>
+          <p:nvPr/>
+        </p:nvSpPr>
+        <p:spPr>
+          <a:xfrm>
+            <a:off x="634901" y="883593"/>
+            <a:ext cx="8102798" cy="525661"/>
+          </a:xfrm>
+          <a:prstGeom prst="rect">
+            <a:avLst/>
+          </a:prstGeom>
+          <a:noFill/>
+          <a:ln/>
+        </p:spPr>
+        <p:txBody>
+          <a:bodyPr wrap="square" lIns="0" tIns="0" rIns="0" bIns="0" rtlCol="0" anchor="t"/>
+          <a:lstStyle/>
+          <a:p>
+            <a:pPr algn="l" marL="342900" indent="-342900">
+              <a:lnSpc>
+                <a:spcPts val="1620"/>
+              </a:lnSpc>
+              <a:spcAft>
+                <a:spcPts val="300"/>
+              </a:spcAft>
+              <a:buSzPct val="100000"/>
+              <a:buChar char="•"/>
+            </a:pPr>
+            <a:r>
+              <a:rPr lang="en-US" sz="1200" dirty="0">
+                <a:solidFill>
+                  <a:srgbClr val="1C2833"/>
+                </a:solidFill>
+                <a:latin typeface="Arial" pitchFamily="34" charset="0"/>
+                <a:ea typeface="Arial" pitchFamily="34" charset="-122"/>
+                <a:cs typeface="Arial" pitchFamily="34" charset="-120"/>
+              </a:rPr>
+              <a:t>Restate safety rule + the anti-nausea note ("ginger has more clinical evidence than most herbs, but for </a:t>
+            </a:r>
+            <a:pPr algn="l" indent="0" marL="0">
+              <a:lnSpc>
+                <a:spcPts val="1620"/>
+              </a:lnSpc>
+              <a:spcAft>
+                <a:spcPts val="300"/>
+              </a:spcAft>
+              <a:buNone/>
+            </a:pPr>
+            <a:r>
               <a:rPr lang="en-US" sz="1200" i="1" dirty="0">
                 <a:solidFill>
                   <a:srgbClr val="1C2833"/>
@@ -3293,10 +5152,1344 @@
                 <a:ea typeface="Arial" pitchFamily="34" charset="-122"/>
                 <a:cs typeface="Arial" pitchFamily="34" charset="-120"/>
               </a:rPr>
+              <a:t>specific</a:t>
+            </a:r>
+            <a:pPr algn="l" indent="0" marL="0">
+              <a:lnSpc>
+                <a:spcPts val="1620"/>
+              </a:lnSpc>
+              <a:spcAft>
+                <a:spcPts val="300"/>
+              </a:spcAft>
+              <a:buNone/>
+            </a:pPr>
+            <a:r>
+              <a:rPr lang="en-US" sz="1200" dirty="0">
+                <a:solidFill>
+                  <a:srgbClr val="1C2833"/>
+                </a:solidFill>
+                <a:latin typeface="Arial" pitchFamily="34" charset="0"/>
+                <a:ea typeface="Arial" pitchFamily="34" charset="-122"/>
+                <a:cs typeface="Arial" pitchFamily="34" charset="-120"/>
+              </a:rPr>
+              <a:t> uses").</a:t>
+            </a:r>
+            <a:endParaRPr lang="en-US" sz="1200" dirty="0"/>
+          </a:p>
+          <a:p>
+            <a:pPr algn="l" marL="342900" indent="-342900">
+              <a:lnSpc>
+                <a:spcPts val="1620"/>
+              </a:lnSpc>
+              <a:spcAft>
+                <a:spcPts val="300"/>
+              </a:spcAft>
+              <a:buSzPct val="100000"/>
+              <a:buChar char="•"/>
+            </a:pPr>
+            <a:r>
+              <a:rPr lang="en-US" sz="1200" dirty="0">
+                <a:solidFill>
+                  <a:srgbClr val="1C2833"/>
+                </a:solidFill>
+                <a:latin typeface="Arial" pitchFamily="34" charset="0"/>
+                <a:ea typeface="Arial" pitchFamily="34" charset="-122"/>
+                <a:cs typeface="Arial" pitchFamily="34" charset="-120"/>
+              </a:rPr>
+              <a:t>Preview Day 6: </a:t>
+            </a:r>
+            <a:pPr algn="l" indent="0" marL="0">
+              <a:lnSpc>
+                <a:spcPts val="1620"/>
+              </a:lnSpc>
+              <a:spcAft>
+                <a:spcPts val="300"/>
+              </a:spcAft>
+              <a:buNone/>
+            </a:pPr>
+            <a:r>
+              <a:rPr lang="en-US" sz="1200" i="1" dirty="0">
+                <a:solidFill>
+                  <a:srgbClr val="1C2833"/>
+                </a:solidFill>
+                <a:latin typeface="Arial" pitchFamily="34" charset="0"/>
+                <a:ea typeface="Arial" pitchFamily="34" charset="-122"/>
+                <a:cs typeface="Arial" pitchFamily="34" charset="-120"/>
+              </a:rPr>
+              <a:t>"Tomorrow we meet a seed that takes the digestive role even further — ajwain."</a:t>
+            </a:r>
+            <a:endParaRPr lang="en-US" sz="1200" dirty="0"/>
+          </a:p>
+        </p:txBody>
+      </p:sp>
+      <p:sp>
+        <p:nvSpPr>
+          <p:cNvPr id="5" name="Text 3"/>
+          <p:cNvSpPr/>
+          <p:nvPr/>
+        </p:nvSpPr>
+        <p:spPr>
+          <a:xfrm>
+            <a:off x="406301" y="4434929"/>
+            <a:ext cx="8498026" cy="213271"/>
+          </a:xfrm>
+          <a:prstGeom prst="rect">
+            <a:avLst/>
+          </a:prstGeom>
+          <a:noFill/>
+          <a:ln/>
+        </p:spPr>
+        <p:txBody>
+          <a:bodyPr wrap="square" lIns="0" tIns="0" rIns="0" bIns="0" rtlCol="0" anchor="t"/>
+          <a:lstStyle/>
+          <a:p>
+            <a:pPr algn="l" indent="0" marL="0">
+              <a:lnSpc>
+                <a:spcPts val="1680"/>
+              </a:lnSpc>
+              <a:spcBef>
+                <a:spcPts val="300"/>
+              </a:spcBef>
+              <a:spcAft>
+                <a:spcPts val="300"/>
+              </a:spcAft>
+              <a:buNone/>
+            </a:pPr>
+            <a:r>
+              <a:rPr lang="en-US" sz="1200" dirty="0">
+                <a:solidFill>
+                  <a:srgbClr val="1C2833"/>
+                </a:solidFill>
+                <a:latin typeface="Arial" pitchFamily="34" charset="0"/>
+                <a:ea typeface="Arial" pitchFamily="34" charset="-122"/>
+                <a:cs typeface="Arial" pitchFamily="34" charset="-120"/>
+              </a:rPr>
+              <a:t>Middle ·  · IKS Curriculum</a:t>
+            </a:r>
+            <a:endParaRPr lang="en-US" sz="1200" dirty="0"/>
+          </a:p>
+        </p:txBody>
+      </p:sp>
+    </p:spTree>
+  </p:cSld>
+  <p:clrMapOvr>
+    <a:masterClrMapping/>
+  </p:clrMapOvr>
+</p:sld>
+</file>
+
+<file path=ppt/slides/slide17.xml><?xml version="1.0" encoding="utf-8"?>
+<p:sld xmlns:a="http://schemas.openxmlformats.org/drawingml/2006/main" xmlns:r="http://schemas.openxmlformats.org/officeDocument/2006/relationships" xmlns:p="http://schemas.openxmlformats.org/presentationml/2006/main">
+  <p:cSld name="Slide 17">
+    <p:bg>
+      <p:bgPr>
+        <a:solidFill>
+          <a:srgbClr val="FFFFFF"/>
+        </a:solidFill>
+      </p:bgPr>
+    </p:bg>
+    <p:spTree>
+      <p:nvGrpSpPr>
+        <p:cNvPr id="1" name=""/>
+        <p:cNvGrpSpPr/>
+        <p:nvPr/>
+      </p:nvGrpSpPr>
+      <p:grpSpPr>
+        <a:xfrm>
+          <a:off x="0" y="0"/>
+          <a:ext cx="0" cy="0"/>
+          <a:chOff x="0" y="0"/>
+          <a:chExt cx="0" cy="0"/>
+        </a:xfrm>
+      </p:grpSpPr>
+      <p:sp>
+        <p:nvSpPr>
+          <p:cNvPr id="2" name="Text 0"/>
+          <p:cNvSpPr/>
+          <p:nvPr/>
+        </p:nvSpPr>
+        <p:spPr>
+          <a:xfrm>
+            <a:off x="0" y="0"/>
+            <a:ext cx="9144000" cy="101501"/>
+          </a:xfrm>
+          <a:prstGeom prst="rect">
+            <a:avLst/>
+          </a:prstGeom>
+          <a:solidFill>
+            <a:srgbClr val="277884"/>
+          </a:solidFill>
+          <a:ln/>
+        </p:spPr>
+        <p:txBody>
+          <a:bodyPr wrap="square" rtlCol="0" anchor="ctr"/>
+          <a:lstStyle/>
+          <a:p>
+            <a:pPr indent="0" marL="0">
+              <a:buNone/>
+            </a:pPr>
+            <a:endParaRPr lang="en-US" dirty="0"/>
+          </a:p>
+        </p:txBody>
+      </p:sp>
+      <p:sp>
+        <p:nvSpPr>
+          <p:cNvPr id="3" name="Text 1"/>
+          <p:cNvSpPr/>
+          <p:nvPr/>
+        </p:nvSpPr>
+        <p:spPr>
+          <a:xfrm>
+            <a:off x="406301" y="457051"/>
+            <a:ext cx="8498026" cy="274290"/>
+          </a:xfrm>
+          <a:prstGeom prst="rect">
+            <a:avLst/>
+          </a:prstGeom>
+          <a:noFill/>
+          <a:ln/>
+        </p:spPr>
+        <p:txBody>
+          <a:bodyPr wrap="square" lIns="0" tIns="0" rIns="0" bIns="0" rtlCol="0" anchor="t"/>
+          <a:lstStyle/>
+          <a:p>
+            <a:pPr algn="l" indent="0" marL="0">
+              <a:lnSpc>
+                <a:spcPts val="2160"/>
+              </a:lnSpc>
+              <a:spcBef>
+                <a:spcPts val="600"/>
+              </a:spcBef>
+              <a:spcAft>
+                <a:spcPts val="800"/>
+              </a:spcAft>
+              <a:buNone/>
+            </a:pPr>
+            <a:r>
+              <a:rPr lang="en-US" sz="1800" b="1" dirty="0">
+                <a:solidFill>
+                  <a:srgbClr val="FE4447"/>
+                </a:solidFill>
+                <a:latin typeface="Georgia" pitchFamily="34" charset="0"/>
+                <a:ea typeface="Georgia" pitchFamily="34" charset="-122"/>
+                <a:cs typeface="Georgia" pitchFamily="34" charset="-120"/>
+              </a:rPr>
+              <a:t>Student-facing content</a:t>
+            </a:r>
+            <a:endParaRPr lang="en-US" sz="1800" dirty="0"/>
+          </a:p>
+        </p:txBody>
+      </p:sp>
+      <p:sp>
+        <p:nvSpPr>
+          <p:cNvPr id="4" name="Text 2"/>
+          <p:cNvSpPr/>
+          <p:nvPr/>
+        </p:nvSpPr>
+        <p:spPr>
+          <a:xfrm>
+            <a:off x="406301" y="883593"/>
+            <a:ext cx="8331398" cy="3764756"/>
+          </a:xfrm>
+          <a:prstGeom prst="rect">
+            <a:avLst/>
+          </a:prstGeom>
+          <a:solidFill>
+            <a:srgbClr val="F4F8F9"/>
+          </a:solidFill>
+          <a:ln/>
+        </p:spPr>
+        <p:txBody>
+          <a:bodyPr wrap="square" rtlCol="0" anchor="ctr"/>
+          <a:lstStyle/>
+          <a:p>
+            <a:pPr indent="0" marL="0">
+              <a:buNone/>
+            </a:pPr>
+            <a:endParaRPr lang="en-US" dirty="0"/>
+          </a:p>
+        </p:txBody>
+      </p:sp>
+      <p:sp>
+        <p:nvSpPr>
+          <p:cNvPr id="5" name="Shape 3"/>
+          <p:cNvSpPr/>
+          <p:nvPr/>
+        </p:nvSpPr>
+        <p:spPr>
+          <a:xfrm>
+            <a:off x="434876" y="883593"/>
+            <a:ext cx="0" cy="3764756"/>
+          </a:xfrm>
+          <a:prstGeom prst="line">
+            <a:avLst/>
+          </a:prstGeom>
+          <a:noFill/>
+          <a:ln w="57150">
+            <a:solidFill>
+              <a:srgbClr val="FE4447"/>
+            </a:solidFill>
+            <a:prstDash val="solid"/>
+          </a:ln>
+        </p:spPr>
+      </p:sp>
+      <p:sp>
+        <p:nvSpPr>
+          <p:cNvPr id="6" name="Text 4"/>
+          <p:cNvSpPr/>
+          <p:nvPr/>
+        </p:nvSpPr>
+        <p:spPr>
+          <a:xfrm>
+            <a:off x="692051" y="1074093"/>
+            <a:ext cx="7973389" cy="230981"/>
+          </a:xfrm>
+          <a:prstGeom prst="rect">
+            <a:avLst/>
+          </a:prstGeom>
+          <a:noFill/>
+          <a:ln/>
+        </p:spPr>
+        <p:txBody>
+          <a:bodyPr wrap="square" lIns="0" tIns="0" rIns="0" bIns="0" rtlCol="0" anchor="t"/>
+          <a:lstStyle/>
+          <a:p>
+            <a:pPr algn="l" indent="0" marL="0">
+              <a:lnSpc>
+                <a:spcPts val="1820"/>
+              </a:lnSpc>
+              <a:spcBef>
+                <a:spcPts val="300"/>
+              </a:spcBef>
+              <a:spcAft>
+                <a:spcPts val="300"/>
+              </a:spcAft>
+              <a:buNone/>
+            </a:pPr>
+            <a:r>
+              <a:rPr lang="en-US" sz="1300" b="1" i="1" dirty="0">
+                <a:solidFill>
+                  <a:srgbClr val="1C2833"/>
+                </a:solidFill>
+                <a:latin typeface="Georgia" pitchFamily="34" charset="0"/>
+                <a:ea typeface="Georgia" pitchFamily="34" charset="-122"/>
+                <a:cs typeface="Georgia" pitchFamily="34" charset="-120"/>
+              </a:rPr>
+              <a:t>Adraka</a:t>
+            </a:r>
+            <a:pPr algn="l" indent="0" marL="0">
+              <a:lnSpc>
+                <a:spcPts val="1820"/>
+              </a:lnSpc>
+              <a:spcBef>
+                <a:spcPts val="300"/>
+              </a:spcBef>
+              <a:spcAft>
+                <a:spcPts val="300"/>
+              </a:spcAft>
+              <a:buNone/>
+            </a:pPr>
+            <a:r>
+              <a:rPr lang="en-US" sz="1300" dirty="0">
+                <a:solidFill>
+                  <a:srgbClr val="1C2833"/>
+                </a:solidFill>
+                <a:latin typeface="Georgia" pitchFamily="34" charset="0"/>
+                <a:ea typeface="Georgia" pitchFamily="34" charset="-122"/>
+                <a:cs typeface="Georgia" pitchFamily="34" charset="-120"/>
+              </a:rPr>
+              <a:t> (</a:t>
+            </a:r>
+            <a:pPr algn="l" indent="0" marL="0">
+              <a:lnSpc>
+                <a:spcPts val="1820"/>
+              </a:lnSpc>
+              <a:spcBef>
+                <a:spcPts val="300"/>
+              </a:spcBef>
+              <a:spcAft>
+                <a:spcPts val="300"/>
+              </a:spcAft>
+              <a:buNone/>
+            </a:pPr>
+            <a:r>
+              <a:rPr lang="en-US" sz="1300" i="1" dirty="0">
+                <a:solidFill>
+                  <a:srgbClr val="1C2833"/>
+                </a:solidFill>
+                <a:latin typeface="Georgia" pitchFamily="34" charset="0"/>
+                <a:ea typeface="Georgia" pitchFamily="34" charset="-122"/>
+                <a:cs typeface="Georgia" pitchFamily="34" charset="-120"/>
+              </a:rPr>
+              <a:t>Zingiber officinale</a:t>
+            </a:r>
+            <a:pPr algn="l" indent="0" marL="0">
+              <a:lnSpc>
+                <a:spcPts val="1820"/>
+              </a:lnSpc>
+              <a:spcBef>
+                <a:spcPts val="300"/>
+              </a:spcBef>
+              <a:spcAft>
+                <a:spcPts val="300"/>
+              </a:spcAft>
+              <a:buNone/>
+            </a:pPr>
+            <a:r>
+              <a:rPr lang="en-US" sz="1300" dirty="0">
+                <a:solidFill>
+                  <a:srgbClr val="1C2833"/>
+                </a:solidFill>
+                <a:latin typeface="Georgia" pitchFamily="34" charset="0"/>
+                <a:ea typeface="Georgia" pitchFamily="34" charset="-122"/>
+                <a:cs typeface="Georgia" pitchFamily="34" charset="-120"/>
+              </a:rPr>
+              <a:t>) — known in English as ginger.</a:t>
+            </a:r>
+            <a:endParaRPr lang="en-US" sz="1300" dirty="0"/>
+          </a:p>
+        </p:txBody>
+      </p:sp>
+      <p:sp>
+        <p:nvSpPr>
+          <p:cNvPr id="7" name="Text 5"/>
+          <p:cNvSpPr/>
+          <p:nvPr/>
+        </p:nvSpPr>
+        <p:spPr>
+          <a:xfrm>
+            <a:off x="692051" y="1343174"/>
+            <a:ext cx="7973389" cy="230981"/>
+          </a:xfrm>
+          <a:prstGeom prst="rect">
+            <a:avLst/>
+          </a:prstGeom>
+          <a:noFill/>
+          <a:ln/>
+        </p:spPr>
+        <p:txBody>
+          <a:bodyPr wrap="square" lIns="0" tIns="0" rIns="0" bIns="0" rtlCol="0" anchor="t"/>
+          <a:lstStyle/>
+          <a:p>
+            <a:pPr algn="l" indent="0" marL="0">
+              <a:lnSpc>
+                <a:spcPts val="1820"/>
+              </a:lnSpc>
+              <a:spcBef>
+                <a:spcPts val="300"/>
+              </a:spcBef>
+              <a:spcAft>
+                <a:spcPts val="300"/>
+              </a:spcAft>
+              <a:buNone/>
+            </a:pPr>
+            <a:r>
+              <a:rPr lang="en-US" sz="1300" b="1" i="1" dirty="0">
+                <a:solidFill>
+                  <a:srgbClr val="1C2833"/>
+                </a:solidFill>
+                <a:latin typeface="Georgia" pitchFamily="34" charset="0"/>
+                <a:ea typeface="Georgia" pitchFamily="34" charset="-122"/>
+                <a:cs typeface="Georgia" pitchFamily="34" charset="-120"/>
+              </a:rPr>
+              <a:t>What it is:</a:t>
+            </a:r>
+            <a:pPr algn="l" indent="0" marL="0">
+              <a:lnSpc>
+                <a:spcPts val="1820"/>
+              </a:lnSpc>
+              <a:spcBef>
+                <a:spcPts val="300"/>
+              </a:spcBef>
+              <a:spcAft>
+                <a:spcPts val="300"/>
+              </a:spcAft>
+              <a:buNone/>
+            </a:pPr>
+            <a:r>
+              <a:rPr lang="en-US" sz="1300" dirty="0">
+                <a:solidFill>
+                  <a:srgbClr val="1C2833"/>
+                </a:solidFill>
+                <a:latin typeface="Georgia" pitchFamily="34" charset="0"/>
+                <a:ea typeface="Georgia" pitchFamily="34" charset="-122"/>
+                <a:cs typeface="Georgia" pitchFamily="34" charset="-120"/>
+              </a:rPr>
+              <a:t> A </a:t>
+            </a:r>
+            <a:pPr algn="l" indent="0" marL="0">
+              <a:lnSpc>
+                <a:spcPts val="1820"/>
+              </a:lnSpc>
+              <a:spcBef>
+                <a:spcPts val="300"/>
+              </a:spcBef>
+              <a:spcAft>
+                <a:spcPts val="300"/>
+              </a:spcAft>
+              <a:buNone/>
+            </a:pPr>
+            <a:r>
+              <a:rPr lang="en-US" sz="1300" b="1" i="1" dirty="0">
+                <a:solidFill>
+                  <a:srgbClr val="1C2833"/>
+                </a:solidFill>
+                <a:latin typeface="Georgia" pitchFamily="34" charset="0"/>
+                <a:ea typeface="Georgia" pitchFamily="34" charset="-122"/>
+                <a:cs typeface="Georgia" pitchFamily="34" charset="-120"/>
+              </a:rPr>
+              <a:t>rhizome</a:t>
+            </a:r>
+            <a:pPr algn="l" indent="0" marL="0">
+              <a:lnSpc>
+                <a:spcPts val="1820"/>
+              </a:lnSpc>
+              <a:spcBef>
+                <a:spcPts val="300"/>
+              </a:spcBef>
+              <a:spcAft>
+                <a:spcPts val="300"/>
+              </a:spcAft>
+              <a:buNone/>
+            </a:pPr>
+            <a:r>
+              <a:rPr lang="en-US" sz="1300" dirty="0">
+                <a:solidFill>
+                  <a:srgbClr val="1C2833"/>
+                </a:solidFill>
+                <a:latin typeface="Georgia" pitchFamily="34" charset="0"/>
+                <a:ea typeface="Georgia" pitchFamily="34" charset="-122"/>
+                <a:cs typeface="Georgia" pitchFamily="34" charset="-120"/>
+              </a:rPr>
+              <a:t> (underground stem), related to turmeric. Pale tan outside, pale yellow inside.</a:t>
+            </a:r>
+            <a:endParaRPr lang="en-US" sz="1300" dirty="0"/>
+          </a:p>
+        </p:txBody>
+      </p:sp>
+      <p:sp>
+        <p:nvSpPr>
+          <p:cNvPr id="8" name="Text 6"/>
+          <p:cNvSpPr/>
+          <p:nvPr/>
+        </p:nvSpPr>
+        <p:spPr>
+          <a:xfrm>
+            <a:off x="692051" y="1612255"/>
+            <a:ext cx="7973389" cy="230981"/>
+          </a:xfrm>
+          <a:prstGeom prst="rect">
+            <a:avLst/>
+          </a:prstGeom>
+          <a:noFill/>
+          <a:ln/>
+        </p:spPr>
+        <p:txBody>
+          <a:bodyPr wrap="square" lIns="0" tIns="0" rIns="0" bIns="0" rtlCol="0" anchor="t"/>
+          <a:lstStyle/>
+          <a:p>
+            <a:pPr algn="l" indent="0" marL="0">
+              <a:lnSpc>
+                <a:spcPts val="1820"/>
+              </a:lnSpc>
+              <a:spcBef>
+                <a:spcPts val="300"/>
+              </a:spcBef>
+              <a:spcAft>
+                <a:spcPts val="300"/>
+              </a:spcAft>
+              <a:buNone/>
+            </a:pPr>
+            <a:r>
+              <a:rPr lang="en-US" sz="1300" b="1" i="1" dirty="0">
+                <a:solidFill>
+                  <a:srgbClr val="1C2833"/>
+                </a:solidFill>
+                <a:latin typeface="Georgia" pitchFamily="34" charset="0"/>
+                <a:ea typeface="Georgia" pitchFamily="34" charset="-122"/>
+                <a:cs typeface="Georgia" pitchFamily="34" charset="-120"/>
+              </a:rPr>
+              <a:t>Fresh vs dried — same plant, different chemistry:</a:t>
+            </a:r>
+            <a:endParaRPr lang="en-US" sz="1300" dirty="0"/>
+          </a:p>
+        </p:txBody>
+      </p:sp>
+      <p:sp>
+        <p:nvSpPr>
+          <p:cNvPr id="9" name="Text 7"/>
+          <p:cNvSpPr/>
+          <p:nvPr/>
+        </p:nvSpPr>
+        <p:spPr>
+          <a:xfrm>
+            <a:off x="692051" y="1881336"/>
+            <a:ext cx="7973389" cy="461963"/>
+          </a:xfrm>
+          <a:prstGeom prst="rect">
+            <a:avLst/>
+          </a:prstGeom>
+          <a:noFill/>
+          <a:ln/>
+        </p:spPr>
+        <p:txBody>
+          <a:bodyPr wrap="square" lIns="0" tIns="0" rIns="0" bIns="0" rtlCol="0" anchor="t"/>
+          <a:lstStyle/>
+          <a:p>
+            <a:pPr algn="l" indent="0" marL="0">
+              <a:lnSpc>
+                <a:spcPts val="1820"/>
+              </a:lnSpc>
+              <a:spcBef>
+                <a:spcPts val="300"/>
+              </a:spcBef>
+              <a:spcAft>
+                <a:spcPts val="300"/>
+              </a:spcAft>
+              <a:buNone/>
+            </a:pPr>
+            <a:r>
+              <a:rPr lang="en-US" sz="1300" dirty="0">
+                <a:solidFill>
+                  <a:srgbClr val="1C2833"/>
+                </a:solidFill>
+                <a:latin typeface="Georgia" pitchFamily="34" charset="0"/>
+                <a:ea typeface="Georgia" pitchFamily="34" charset="-122"/>
+                <a:cs typeface="Georgia" pitchFamily="34" charset="-120"/>
+              </a:rPr>
+              <a:t>| Form | Sanskrit name | Dominant compound | |------|----------------|--------------------| | Fresh rhizome | </a:t>
+            </a:r>
+            <a:pPr algn="l" indent="0" marL="0">
+              <a:lnSpc>
+                <a:spcPts val="1820"/>
+              </a:lnSpc>
+              <a:spcBef>
+                <a:spcPts val="300"/>
+              </a:spcBef>
+              <a:spcAft>
+                <a:spcPts val="300"/>
+              </a:spcAft>
+              <a:buNone/>
+            </a:pPr>
+            <a:r>
+              <a:rPr lang="en-US" sz="1300" i="1" dirty="0">
+                <a:solidFill>
+                  <a:srgbClr val="1C2833"/>
+                </a:solidFill>
+                <a:latin typeface="Georgia" pitchFamily="34" charset="0"/>
+                <a:ea typeface="Georgia" pitchFamily="34" charset="-122"/>
+                <a:cs typeface="Georgia" pitchFamily="34" charset="-120"/>
+              </a:rPr>
               <a:t>adraka</a:t>
             </a:r>
             <a:pPr algn="l" indent="0" marL="0">
               <a:lnSpc>
+                <a:spcPts val="1820"/>
+              </a:lnSpc>
+              <a:spcBef>
+                <a:spcPts val="300"/>
+              </a:spcBef>
+              <a:spcAft>
+                <a:spcPts val="300"/>
+              </a:spcAft>
+              <a:buNone/>
+            </a:pPr>
+            <a:r>
+              <a:rPr lang="en-US" sz="1300" dirty="0">
+                <a:solidFill>
+                  <a:srgbClr val="1C2833"/>
+                </a:solidFill>
+                <a:latin typeface="Georgia" pitchFamily="34" charset="0"/>
+                <a:ea typeface="Georgia" pitchFamily="34" charset="-122"/>
+                <a:cs typeface="Georgia" pitchFamily="34" charset="-120"/>
+              </a:rPr>
+              <a:t> | </a:t>
+            </a:r>
+            <a:pPr algn="l" indent="0" marL="0">
+              <a:lnSpc>
+                <a:spcPts val="1820"/>
+              </a:lnSpc>
+              <a:spcBef>
+                <a:spcPts val="300"/>
+              </a:spcBef>
+              <a:spcAft>
+                <a:spcPts val="300"/>
+              </a:spcAft>
+              <a:buNone/>
+            </a:pPr>
+            <a:r>
+              <a:rPr lang="en-US" sz="1300" b="1" i="1" dirty="0">
+                <a:solidFill>
+                  <a:srgbClr val="1C2833"/>
+                </a:solidFill>
+                <a:latin typeface="Georgia" pitchFamily="34" charset="0"/>
+                <a:ea typeface="Georgia" pitchFamily="34" charset="-122"/>
+                <a:cs typeface="Georgia" pitchFamily="34" charset="-120"/>
+              </a:rPr>
+              <a:t>gingerol</a:t>
+            </a:r>
+            <a:pPr algn="l" indent="0" marL="0">
+              <a:lnSpc>
+                <a:spcPts val="1820"/>
+              </a:lnSpc>
+              <a:spcBef>
+                <a:spcPts val="300"/>
+              </a:spcBef>
+              <a:spcAft>
+                <a:spcPts val="300"/>
+              </a:spcAft>
+              <a:buNone/>
+            </a:pPr>
+            <a:r>
+              <a:rPr lang="en-US" sz="1300" dirty="0">
+                <a:solidFill>
+                  <a:srgbClr val="1C2833"/>
+                </a:solidFill>
+                <a:latin typeface="Georgia" pitchFamily="34" charset="0"/>
+                <a:ea typeface="Georgia" pitchFamily="34" charset="-122"/>
+                <a:cs typeface="Georgia" pitchFamily="34" charset="-120"/>
+              </a:rPr>
+              <a:t> | | Dried rhizome | </a:t>
+            </a:r>
+            <a:pPr algn="l" indent="0" marL="0">
+              <a:lnSpc>
+                <a:spcPts val="1820"/>
+              </a:lnSpc>
+              <a:spcBef>
+                <a:spcPts val="300"/>
+              </a:spcBef>
+              <a:spcAft>
+                <a:spcPts val="300"/>
+              </a:spcAft>
+              <a:buNone/>
+            </a:pPr>
+            <a:r>
+              <a:rPr lang="en-US" sz="1300" i="1" dirty="0">
+                <a:solidFill>
+                  <a:srgbClr val="1C2833"/>
+                </a:solidFill>
+                <a:latin typeface="Georgia" pitchFamily="34" charset="0"/>
+                <a:ea typeface="Georgia" pitchFamily="34" charset="-122"/>
+                <a:cs typeface="Georgia" pitchFamily="34" charset="-120"/>
+              </a:rPr>
+              <a:t>sūnṭhī</a:t>
+            </a:r>
+            <a:pPr algn="l" indent="0" marL="0">
+              <a:lnSpc>
+                <a:spcPts val="1820"/>
+              </a:lnSpc>
+              <a:spcBef>
+                <a:spcPts val="300"/>
+              </a:spcBef>
+              <a:spcAft>
+                <a:spcPts val="300"/>
+              </a:spcAft>
+              <a:buNone/>
+            </a:pPr>
+            <a:r>
+              <a:rPr lang="en-US" sz="1300" dirty="0">
+                <a:solidFill>
+                  <a:srgbClr val="1C2833"/>
+                </a:solidFill>
+                <a:latin typeface="Georgia" pitchFamily="34" charset="0"/>
+                <a:ea typeface="Georgia" pitchFamily="34" charset="-122"/>
+                <a:cs typeface="Georgia" pitchFamily="34" charset="-120"/>
+              </a:rPr>
+              <a:t> | </a:t>
+            </a:r>
+            <a:pPr algn="l" indent="0" marL="0">
+              <a:lnSpc>
+                <a:spcPts val="1820"/>
+              </a:lnSpc>
+              <a:spcBef>
+                <a:spcPts val="300"/>
+              </a:spcBef>
+              <a:spcAft>
+                <a:spcPts val="300"/>
+              </a:spcAft>
+              <a:buNone/>
+            </a:pPr>
+            <a:r>
+              <a:rPr lang="en-US" sz="1300" b="1" i="1" dirty="0">
+                <a:solidFill>
+                  <a:srgbClr val="1C2833"/>
+                </a:solidFill>
+                <a:latin typeface="Georgia" pitchFamily="34" charset="0"/>
+                <a:ea typeface="Georgia" pitchFamily="34" charset="-122"/>
+                <a:cs typeface="Georgia" pitchFamily="34" charset="-120"/>
+              </a:rPr>
+              <a:t>shogaol</a:t>
+            </a:r>
+            <a:pPr algn="l" indent="0" marL="0">
+              <a:lnSpc>
+                <a:spcPts val="1820"/>
+              </a:lnSpc>
+              <a:spcBef>
+                <a:spcPts val="300"/>
+              </a:spcBef>
+              <a:spcAft>
+                <a:spcPts val="300"/>
+              </a:spcAft>
+              <a:buNone/>
+            </a:pPr>
+            <a:r>
+              <a:rPr lang="en-US" sz="1300" dirty="0">
+                <a:solidFill>
+                  <a:srgbClr val="1C2833"/>
+                </a:solidFill>
+                <a:latin typeface="Georgia" pitchFamily="34" charset="0"/>
+                <a:ea typeface="Georgia" pitchFamily="34" charset="-122"/>
+                <a:cs typeface="Georgia" pitchFamily="34" charset="-120"/>
+              </a:rPr>
+              <a:t> (more pungent) |</a:t>
+            </a:r>
+            <a:endParaRPr lang="en-US" sz="1300" dirty="0"/>
+          </a:p>
+        </p:txBody>
+      </p:sp>
+      <p:sp>
+        <p:nvSpPr>
+          <p:cNvPr id="10" name="Text 8"/>
+          <p:cNvSpPr/>
+          <p:nvPr/>
+        </p:nvSpPr>
+        <p:spPr>
+          <a:xfrm>
+            <a:off x="692051" y="2381399"/>
+            <a:ext cx="7973389" cy="230981"/>
+          </a:xfrm>
+          <a:prstGeom prst="rect">
+            <a:avLst/>
+          </a:prstGeom>
+          <a:noFill/>
+          <a:ln/>
+        </p:spPr>
+        <p:txBody>
+          <a:bodyPr wrap="square" lIns="0" tIns="0" rIns="0" bIns="0" rtlCol="0" anchor="t"/>
+          <a:lstStyle/>
+          <a:p>
+            <a:pPr algn="l" indent="0" marL="0">
+              <a:lnSpc>
+                <a:spcPts val="1820"/>
+              </a:lnSpc>
+              <a:spcBef>
+                <a:spcPts val="300"/>
+              </a:spcBef>
+              <a:spcAft>
+                <a:spcPts val="300"/>
+              </a:spcAft>
+              <a:buNone/>
+            </a:pPr>
+            <a:r>
+              <a:rPr lang="en-US" sz="1300" i="1" dirty="0">
+                <a:solidFill>
+                  <a:srgbClr val="1C2833"/>
+                </a:solidFill>
+                <a:latin typeface="Georgia" pitchFamily="34" charset="0"/>
+                <a:ea typeface="Georgia" pitchFamily="34" charset="-122"/>
+                <a:cs typeface="Georgia" pitchFamily="34" charset="-120"/>
+              </a:rPr>
+              <a:t>When ginger dries or heats, gingerol loses a water molecule and becomes shogaol.</a:t>
+            </a:r>
+            <a:endParaRPr lang="en-US" sz="1300" dirty="0"/>
+          </a:p>
+        </p:txBody>
+      </p:sp>
+      <p:sp>
+        <p:nvSpPr>
+          <p:cNvPr id="11" name="Text 9"/>
+          <p:cNvSpPr/>
+          <p:nvPr/>
+        </p:nvSpPr>
+        <p:spPr>
+          <a:xfrm>
+            <a:off x="692051" y="2650480"/>
+            <a:ext cx="7973389" cy="230981"/>
+          </a:xfrm>
+          <a:prstGeom prst="rect">
+            <a:avLst/>
+          </a:prstGeom>
+          <a:noFill/>
+          <a:ln/>
+        </p:spPr>
+        <p:txBody>
+          <a:bodyPr wrap="square" lIns="0" tIns="0" rIns="0" bIns="0" rtlCol="0" anchor="t"/>
+          <a:lstStyle/>
+          <a:p>
+            <a:pPr algn="l" indent="0" marL="0">
+              <a:lnSpc>
+                <a:spcPts val="1820"/>
+              </a:lnSpc>
+              <a:spcBef>
+                <a:spcPts val="300"/>
+              </a:spcBef>
+              <a:spcAft>
+                <a:spcPts val="300"/>
+              </a:spcAft>
+              <a:buNone/>
+            </a:pPr>
+            <a:r>
+              <a:rPr lang="en-US" sz="1300" b="1" i="1" dirty="0">
+                <a:solidFill>
+                  <a:srgbClr val="1C2833"/>
+                </a:solidFill>
+                <a:latin typeface="Georgia" pitchFamily="34" charset="0"/>
+                <a:ea typeface="Georgia" pitchFamily="34" charset="-122"/>
+                <a:cs typeface="Georgia" pitchFamily="34" charset="-120"/>
+              </a:rPr>
+              <a:t>Well-supported modern uses:</a:t>
+            </a:r>
+            <a:endParaRPr lang="en-US" sz="1300" dirty="0"/>
+          </a:p>
+        </p:txBody>
+      </p:sp>
+      <p:sp>
+        <p:nvSpPr>
+          <p:cNvPr id="12" name="Text 10"/>
+          <p:cNvSpPr/>
+          <p:nvPr/>
+        </p:nvSpPr>
+        <p:spPr>
+          <a:xfrm>
+            <a:off x="692051" y="2919561"/>
+            <a:ext cx="7973389" cy="230981"/>
+          </a:xfrm>
+          <a:prstGeom prst="rect">
+            <a:avLst/>
+          </a:prstGeom>
+          <a:noFill/>
+          <a:ln/>
+        </p:spPr>
+        <p:txBody>
+          <a:bodyPr wrap="square" lIns="0" tIns="0" rIns="0" bIns="0" rtlCol="0" anchor="t"/>
+          <a:lstStyle/>
+          <a:p>
+            <a:pPr algn="l" indent="0" marL="0">
+              <a:lnSpc>
+                <a:spcPts val="1820"/>
+              </a:lnSpc>
+              <a:spcBef>
+                <a:spcPts val="300"/>
+              </a:spcBef>
+              <a:spcAft>
+                <a:spcPts val="300"/>
+              </a:spcAft>
+              <a:buNone/>
+            </a:pPr>
+            <a:r>
+              <a:rPr lang="en-US" sz="1300" i="1" dirty="0">
+                <a:solidFill>
+                  <a:srgbClr val="1C2833"/>
+                </a:solidFill>
+                <a:latin typeface="Georgia" pitchFamily="34" charset="0"/>
+                <a:ea typeface="Georgia" pitchFamily="34" charset="-122"/>
+                <a:cs typeface="Georgia" pitchFamily="34" charset="-120"/>
+              </a:rPr>
+              <a:t>Anti-nausea, especially motion sickness and pregnancy-related (under medical supervision).</a:t>
+            </a:r>
+            <a:endParaRPr lang="en-US" sz="1300" dirty="0"/>
+          </a:p>
+        </p:txBody>
+      </p:sp>
+      <p:sp>
+        <p:nvSpPr>
+          <p:cNvPr id="13" name="Text 11"/>
+          <p:cNvSpPr/>
+          <p:nvPr/>
+        </p:nvSpPr>
+        <p:spPr>
+          <a:xfrm>
+            <a:off x="692051" y="3188643"/>
+            <a:ext cx="7973389" cy="230981"/>
+          </a:xfrm>
+          <a:prstGeom prst="rect">
+            <a:avLst/>
+          </a:prstGeom>
+          <a:noFill/>
+          <a:ln/>
+        </p:spPr>
+        <p:txBody>
+          <a:bodyPr wrap="square" lIns="0" tIns="0" rIns="0" bIns="0" rtlCol="0" anchor="t"/>
+          <a:lstStyle/>
+          <a:p>
+            <a:pPr algn="l" indent="0" marL="0">
+              <a:lnSpc>
+                <a:spcPts val="1820"/>
+              </a:lnSpc>
+              <a:spcBef>
+                <a:spcPts val="300"/>
+              </a:spcBef>
+              <a:spcAft>
+                <a:spcPts val="300"/>
+              </a:spcAft>
+              <a:buNone/>
+            </a:pPr>
+            <a:r>
+              <a:rPr lang="en-US" sz="1300" i="1" dirty="0">
+                <a:solidFill>
+                  <a:srgbClr val="1C2833"/>
+                </a:solidFill>
+                <a:latin typeface="Georgia" pitchFamily="34" charset="0"/>
+                <a:ea typeface="Georgia" pitchFamily="34" charset="-122"/>
+                <a:cs typeface="Georgia" pitchFamily="34" charset="-120"/>
+              </a:rPr>
+              <a:t>Mild warming effect (activates TRPV1 receptors — same as chilli's capsaicin).</a:t>
+            </a:r>
+            <a:endParaRPr lang="en-US" sz="1300" dirty="0"/>
+          </a:p>
+        </p:txBody>
+      </p:sp>
+      <p:sp>
+        <p:nvSpPr>
+          <p:cNvPr id="14" name="Text 12"/>
+          <p:cNvSpPr/>
+          <p:nvPr/>
+        </p:nvSpPr>
+        <p:spPr>
+          <a:xfrm>
+            <a:off x="692051" y="3457724"/>
+            <a:ext cx="7973389" cy="230981"/>
+          </a:xfrm>
+          <a:prstGeom prst="rect">
+            <a:avLst/>
+          </a:prstGeom>
+          <a:noFill/>
+          <a:ln/>
+        </p:spPr>
+        <p:txBody>
+          <a:bodyPr wrap="square" lIns="0" tIns="0" rIns="0" bIns="0" rtlCol="0" anchor="t"/>
+          <a:lstStyle/>
+          <a:p>
+            <a:pPr algn="l" indent="0" marL="0">
+              <a:lnSpc>
+                <a:spcPts val="1820"/>
+              </a:lnSpc>
+              <a:spcBef>
+                <a:spcPts val="300"/>
+              </a:spcBef>
+              <a:spcAft>
+                <a:spcPts val="300"/>
+              </a:spcAft>
+              <a:buNone/>
+            </a:pPr>
+            <a:r>
+              <a:rPr lang="en-US" sz="1300" i="1" dirty="0">
+                <a:solidFill>
+                  <a:srgbClr val="1C2833"/>
+                </a:solidFill>
+                <a:latin typeface="Georgia" pitchFamily="34" charset="0"/>
+                <a:ea typeface="Georgia" pitchFamily="34" charset="-122"/>
+                <a:cs typeface="Georgia" pitchFamily="34" charset="-120"/>
+              </a:rPr>
+              <a:t>Digestive support in culinary amounts.</a:t>
+            </a:r>
+            <a:endParaRPr lang="en-US" sz="1300" dirty="0"/>
+          </a:p>
+        </p:txBody>
+      </p:sp>
+      <p:sp>
+        <p:nvSpPr>
+          <p:cNvPr id="15" name="Text 13"/>
+          <p:cNvSpPr/>
+          <p:nvPr/>
+        </p:nvSpPr>
+        <p:spPr>
+          <a:xfrm>
+            <a:off x="692051" y="3726805"/>
+            <a:ext cx="7973389" cy="230981"/>
+          </a:xfrm>
+          <a:prstGeom prst="rect">
+            <a:avLst/>
+          </a:prstGeom>
+          <a:noFill/>
+          <a:ln/>
+        </p:spPr>
+        <p:txBody>
+          <a:bodyPr wrap="square" lIns="0" tIns="0" rIns="0" bIns="0" rtlCol="0" anchor="t"/>
+          <a:lstStyle/>
+          <a:p>
+            <a:pPr algn="l" indent="0" marL="0">
+              <a:lnSpc>
+                <a:spcPts val="1820"/>
+              </a:lnSpc>
+              <a:spcBef>
+                <a:spcPts val="300"/>
+              </a:spcBef>
+              <a:spcAft>
+                <a:spcPts val="300"/>
+              </a:spcAft>
+              <a:buNone/>
+            </a:pPr>
+            <a:r>
+              <a:rPr lang="en-US" sz="1300" b="1" i="1" dirty="0">
+                <a:solidFill>
+                  <a:srgbClr val="1C2833"/>
+                </a:solidFill>
+                <a:latin typeface="Georgia" pitchFamily="34" charset="0"/>
+                <a:ea typeface="Georgia" pitchFamily="34" charset="-122"/>
+                <a:cs typeface="Georgia" pitchFamily="34" charset="-120"/>
+              </a:rPr>
+              <a:t>Ayurvedic classification:</a:t>
+            </a:r>
+            <a:pPr algn="l" indent="0" marL="0">
+              <a:lnSpc>
+                <a:spcPts val="1820"/>
+              </a:lnSpc>
+              <a:spcBef>
+                <a:spcPts val="300"/>
+              </a:spcBef>
+              <a:spcAft>
+                <a:spcPts val="300"/>
+              </a:spcAft>
+              <a:buNone/>
+            </a:pPr>
+            <a:r>
+              <a:rPr lang="en-US" sz="1300" dirty="0">
+                <a:solidFill>
+                  <a:srgbClr val="1C2833"/>
+                </a:solidFill>
+                <a:latin typeface="Georgia" pitchFamily="34" charset="0"/>
+                <a:ea typeface="Georgia" pitchFamily="34" charset="-122"/>
+                <a:cs typeface="Georgia" pitchFamily="34" charset="-120"/>
+              </a:rPr>
+              <a:t> </a:t>
+            </a:r>
+            <a:pPr algn="l" indent="0" marL="0">
+              <a:lnSpc>
+                <a:spcPts val="1820"/>
+              </a:lnSpc>
+              <a:spcBef>
+                <a:spcPts val="300"/>
+              </a:spcBef>
+              <a:spcAft>
+                <a:spcPts val="300"/>
+              </a:spcAft>
+              <a:buNone/>
+            </a:pPr>
+            <a:r>
+              <a:rPr lang="en-US" sz="1300" i="1" dirty="0">
+                <a:solidFill>
+                  <a:srgbClr val="1C2833"/>
+                </a:solidFill>
+                <a:latin typeface="Georgia" pitchFamily="34" charset="0"/>
+                <a:ea typeface="Georgia" pitchFamily="34" charset="-122"/>
+                <a:cs typeface="Georgia" pitchFamily="34" charset="-120"/>
+              </a:rPr>
+              <a:t>kaṭu</a:t>
+            </a:r>
+            <a:pPr algn="l" indent="0" marL="0">
+              <a:lnSpc>
+                <a:spcPts val="1820"/>
+              </a:lnSpc>
+              <a:spcBef>
+                <a:spcPts val="300"/>
+              </a:spcBef>
+              <a:spcAft>
+                <a:spcPts val="300"/>
+              </a:spcAft>
+              <a:buNone/>
+            </a:pPr>
+            <a:r>
+              <a:rPr lang="en-US" sz="1300" dirty="0">
+                <a:solidFill>
+                  <a:srgbClr val="1C2833"/>
+                </a:solidFill>
+                <a:latin typeface="Georgia" pitchFamily="34" charset="0"/>
+                <a:ea typeface="Georgia" pitchFamily="34" charset="-122"/>
+                <a:cs typeface="Georgia" pitchFamily="34" charset="-120"/>
+              </a:rPr>
+              <a:t> (pungent) in taste, </a:t>
+            </a:r>
+            <a:pPr algn="l" indent="0" marL="0">
+              <a:lnSpc>
+                <a:spcPts val="1820"/>
+              </a:lnSpc>
+              <a:spcBef>
+                <a:spcPts val="300"/>
+              </a:spcBef>
+              <a:spcAft>
+                <a:spcPts val="300"/>
+              </a:spcAft>
+              <a:buNone/>
+            </a:pPr>
+            <a:r>
+              <a:rPr lang="en-US" sz="1300" i="1" dirty="0">
+                <a:solidFill>
+                  <a:srgbClr val="1C2833"/>
+                </a:solidFill>
+                <a:latin typeface="Georgia" pitchFamily="34" charset="0"/>
+                <a:ea typeface="Georgia" pitchFamily="34" charset="-122"/>
+                <a:cs typeface="Georgia" pitchFamily="34" charset="-120"/>
+              </a:rPr>
+              <a:t>uṣṇa</a:t>
+            </a:r>
+            <a:pPr algn="l" indent="0" marL="0">
+              <a:lnSpc>
+                <a:spcPts val="1820"/>
+              </a:lnSpc>
+              <a:spcBef>
+                <a:spcPts val="300"/>
+              </a:spcBef>
+              <a:spcAft>
+                <a:spcPts val="300"/>
+              </a:spcAft>
+              <a:buNone/>
+            </a:pPr>
+            <a:r>
+              <a:rPr lang="en-US" sz="1300" dirty="0">
+                <a:solidFill>
+                  <a:srgbClr val="1C2833"/>
+                </a:solidFill>
+                <a:latin typeface="Georgia" pitchFamily="34" charset="0"/>
+                <a:ea typeface="Georgia" pitchFamily="34" charset="-122"/>
+                <a:cs typeface="Georgia" pitchFamily="34" charset="-120"/>
+              </a:rPr>
+              <a:t> (heating) in </a:t>
+            </a:r>
+            <a:pPr algn="l" indent="0" marL="0">
+              <a:lnSpc>
+                <a:spcPts val="1820"/>
+              </a:lnSpc>
+              <a:spcBef>
+                <a:spcPts val="300"/>
+              </a:spcBef>
+              <a:spcAft>
+                <a:spcPts val="300"/>
+              </a:spcAft>
+              <a:buNone/>
+            </a:pPr>
+            <a:r>
+              <a:rPr lang="en-US" sz="1300" i="1" dirty="0">
+                <a:solidFill>
+                  <a:srgbClr val="1C2833"/>
+                </a:solidFill>
+                <a:latin typeface="Georgia" pitchFamily="34" charset="0"/>
+                <a:ea typeface="Georgia" pitchFamily="34" charset="-122"/>
+                <a:cs typeface="Georgia" pitchFamily="34" charset="-120"/>
+              </a:rPr>
+              <a:t>vīrya</a:t>
+            </a:r>
+            <a:pPr algn="l" indent="0" marL="0">
+              <a:lnSpc>
+                <a:spcPts val="1820"/>
+              </a:lnSpc>
+              <a:spcBef>
+                <a:spcPts val="300"/>
+              </a:spcBef>
+              <a:spcAft>
+                <a:spcPts val="300"/>
+              </a:spcAft>
+              <a:buNone/>
+            </a:pPr>
+            <a:r>
+              <a:rPr lang="en-US" sz="1300" dirty="0">
+                <a:solidFill>
+                  <a:srgbClr val="1C2833"/>
+                </a:solidFill>
+                <a:latin typeface="Georgia" pitchFamily="34" charset="0"/>
+                <a:ea typeface="Georgia" pitchFamily="34" charset="-122"/>
+                <a:cs typeface="Georgia" pitchFamily="34" charset="-120"/>
+              </a:rPr>
+              <a:t>.</a:t>
+            </a:r>
+            <a:endParaRPr lang="en-US" sz="1300" dirty="0"/>
+          </a:p>
+        </p:txBody>
+      </p:sp>
+      <p:sp>
+        <p:nvSpPr>
+          <p:cNvPr id="16" name="Text 14"/>
+          <p:cNvSpPr/>
+          <p:nvPr/>
+        </p:nvSpPr>
+        <p:spPr>
+          <a:xfrm>
+            <a:off x="692051" y="3995886"/>
+            <a:ext cx="7973389" cy="461963"/>
+          </a:xfrm>
+          <a:prstGeom prst="rect">
+            <a:avLst/>
+          </a:prstGeom>
+          <a:noFill/>
+          <a:ln/>
+        </p:spPr>
+        <p:txBody>
+          <a:bodyPr wrap="square" lIns="0" tIns="0" rIns="0" bIns="0" rtlCol="0" anchor="t"/>
+          <a:lstStyle/>
+          <a:p>
+            <a:pPr algn="l" indent="0" marL="0">
+              <a:lnSpc>
+                <a:spcPts val="1820"/>
+              </a:lnSpc>
+              <a:spcBef>
+                <a:spcPts val="300"/>
+              </a:spcBef>
+              <a:spcAft>
+                <a:spcPts val="300"/>
+              </a:spcAft>
+              <a:buNone/>
+            </a:pPr>
+            <a:r>
+              <a:rPr lang="en-US" sz="1300" b="1" i="1" dirty="0">
+                <a:solidFill>
+                  <a:srgbClr val="1C2833"/>
+                </a:solidFill>
+                <a:latin typeface="Georgia" pitchFamily="34" charset="0"/>
+                <a:ea typeface="Georgia" pitchFamily="34" charset="-122"/>
+                <a:cs typeface="Georgia" pitchFamily="34" charset="-120"/>
+              </a:rPr>
+              <a:t>Cautions:</a:t>
+            </a:r>
+            <a:pPr algn="l" indent="0" marL="0">
+              <a:lnSpc>
+                <a:spcPts val="1820"/>
+              </a:lnSpc>
+              <a:spcBef>
+                <a:spcPts val="300"/>
+              </a:spcBef>
+              <a:spcAft>
+                <a:spcPts val="300"/>
+              </a:spcAft>
+              <a:buNone/>
+            </a:pPr>
+            <a:r>
+              <a:rPr lang="en-US" sz="1300" dirty="0">
+                <a:solidFill>
+                  <a:srgbClr val="1C2833"/>
+                </a:solidFill>
+                <a:latin typeface="Georgia" pitchFamily="34" charset="0"/>
+                <a:ea typeface="Georgia" pitchFamily="34" charset="-122"/>
+                <a:cs typeface="Georgia" pitchFamily="34" charset="-120"/>
+              </a:rPr>
+              <a:t> Large doses → heartburn or stomach upset; pregnancy doses need a doctor; interactions with blood-thinning medications.</a:t>
+            </a:r>
+            <a:endParaRPr lang="en-US" sz="1300" dirty="0"/>
+          </a:p>
+        </p:txBody>
+      </p:sp>
+      <p:sp>
+        <p:nvSpPr>
+          <p:cNvPr id="17" name="Text 15"/>
+          <p:cNvSpPr/>
+          <p:nvPr/>
+        </p:nvSpPr>
+        <p:spPr>
+          <a:xfrm>
+            <a:off x="406301" y="4813399"/>
+            <a:ext cx="8498026" cy="213271"/>
+          </a:xfrm>
+          <a:prstGeom prst="rect">
+            <a:avLst/>
+          </a:prstGeom>
+          <a:noFill/>
+          <a:ln/>
+        </p:spPr>
+        <p:txBody>
+          <a:bodyPr wrap="square" lIns="0" tIns="0" rIns="0" bIns="0" rtlCol="0" anchor="t"/>
+          <a:lstStyle/>
+          <a:p>
+            <a:pPr algn="l" indent="0" marL="0">
+              <a:lnSpc>
                 <a:spcPts val="1680"/>
               </a:lnSpc>
               <a:spcBef>
@@ -3316,8 +6509,189 @@
                 <a:ea typeface="Arial" pitchFamily="34" charset="-122"/>
                 <a:cs typeface="Arial" pitchFamily="34" charset="-120"/>
               </a:rPr>
-              <a:t> (fresh) and </a:t>
-            </a:r>
+              <a:t>Middle ·  · IKS Curriculum</a:t>
+            </a:r>
+            <a:endParaRPr lang="en-US" sz="1200" dirty="0"/>
+          </a:p>
+        </p:txBody>
+      </p:sp>
+    </p:spTree>
+  </p:cSld>
+  <p:clrMapOvr>
+    <a:masterClrMapping/>
+  </p:clrMapOvr>
+</p:sld>
+</file>
+
+<file path=ppt/slides/slide18.xml><?xml version="1.0" encoding="utf-8"?>
+<p:sld xmlns:a="http://schemas.openxmlformats.org/drawingml/2006/main" xmlns:r="http://schemas.openxmlformats.org/officeDocument/2006/relationships" xmlns:p="http://schemas.openxmlformats.org/presentationml/2006/main">
+  <p:cSld name="Slide 18">
+    <p:bg>
+      <p:bgPr>
+        <a:solidFill>
+          <a:srgbClr val="FFFFFF"/>
+        </a:solidFill>
+      </p:bgPr>
+    </p:bg>
+    <p:spTree>
+      <p:nvGrpSpPr>
+        <p:cNvPr id="1" name=""/>
+        <p:cNvGrpSpPr/>
+        <p:nvPr/>
+      </p:nvGrpSpPr>
+      <p:grpSpPr>
+        <a:xfrm>
+          <a:off x="0" y="0"/>
+          <a:ext cx="0" cy="0"/>
+          <a:chOff x="0" y="0"/>
+          <a:chExt cx="0" cy="0"/>
+        </a:xfrm>
+      </p:grpSpPr>
+      <p:sp>
+        <p:nvSpPr>
+          <p:cNvPr id="2" name="Text 0"/>
+          <p:cNvSpPr/>
+          <p:nvPr/>
+        </p:nvSpPr>
+        <p:spPr>
+          <a:xfrm>
+            <a:off x="0" y="0"/>
+            <a:ext cx="9144000" cy="101501"/>
+          </a:xfrm>
+          <a:prstGeom prst="rect">
+            <a:avLst/>
+          </a:prstGeom>
+          <a:solidFill>
+            <a:srgbClr val="277884"/>
+          </a:solidFill>
+          <a:ln/>
+        </p:spPr>
+        <p:txBody>
+          <a:bodyPr wrap="square" rtlCol="0" anchor="ctr"/>
+          <a:lstStyle/>
+          <a:p>
+            <a:pPr indent="0" marL="0">
+              <a:buNone/>
+            </a:pPr>
+            <a:endParaRPr lang="en-US" dirty="0"/>
+          </a:p>
+        </p:txBody>
+      </p:sp>
+      <p:sp>
+        <p:nvSpPr>
+          <p:cNvPr id="3" name="Text 1"/>
+          <p:cNvSpPr/>
+          <p:nvPr/>
+        </p:nvSpPr>
+        <p:spPr>
+          <a:xfrm>
+            <a:off x="406301" y="457051"/>
+            <a:ext cx="8498026" cy="274290"/>
+          </a:xfrm>
+          <a:prstGeom prst="rect">
+            <a:avLst/>
+          </a:prstGeom>
+          <a:noFill/>
+          <a:ln/>
+        </p:spPr>
+        <p:txBody>
+          <a:bodyPr wrap="square" lIns="0" tIns="0" rIns="0" bIns="0" rtlCol="0" anchor="t"/>
+          <a:lstStyle/>
+          <a:p>
+            <a:pPr algn="l" indent="0" marL="0">
+              <a:lnSpc>
+                <a:spcPts val="2160"/>
+              </a:lnSpc>
+              <a:spcBef>
+                <a:spcPts val="600"/>
+              </a:spcBef>
+              <a:spcAft>
+                <a:spcPts val="800"/>
+              </a:spcAft>
+              <a:buNone/>
+            </a:pPr>
+            <a:r>
+              <a:rPr lang="en-US" sz="1800" b="1" dirty="0">
+                <a:solidFill>
+                  <a:srgbClr val="FE4447"/>
+                </a:solidFill>
+                <a:latin typeface="Georgia" pitchFamily="34" charset="0"/>
+                <a:ea typeface="Georgia" pitchFamily="34" charset="-122"/>
+                <a:cs typeface="Georgia" pitchFamily="34" charset="-120"/>
+              </a:rPr>
+              <a:t>Homework</a:t>
+            </a:r>
+            <a:endParaRPr lang="en-US" sz="1800" dirty="0"/>
+          </a:p>
+        </p:txBody>
+      </p:sp>
+      <p:sp>
+        <p:nvSpPr>
+          <p:cNvPr id="4" name="Text 2"/>
+          <p:cNvSpPr/>
+          <p:nvPr/>
+        </p:nvSpPr>
+        <p:spPr>
+          <a:xfrm>
+            <a:off x="634901" y="883593"/>
+            <a:ext cx="8102798" cy="487561"/>
+          </a:xfrm>
+          <a:prstGeom prst="rect">
+            <a:avLst/>
+          </a:prstGeom>
+          <a:noFill/>
+          <a:ln/>
+        </p:spPr>
+        <p:txBody>
+          <a:bodyPr wrap="square" lIns="0" tIns="0" rIns="0" bIns="0" rtlCol="0" anchor="t"/>
+          <a:lstStyle/>
+          <a:p>
+            <a:pPr algn="l" marL="342900" indent="-342900">
+              <a:lnSpc>
+                <a:spcPts val="1620"/>
+              </a:lnSpc>
+              <a:spcAft>
+                <a:spcPts val="300"/>
+              </a:spcAft>
+              <a:buSzPct val="100000"/>
+              <a:buChar char="•"/>
+            </a:pPr>
+            <a:r>
+              <a:rPr lang="en-US" sz="1200" dirty="0">
+                <a:solidFill>
+                  <a:srgbClr val="1C2833"/>
+                </a:solidFill>
+                <a:latin typeface="Arial" pitchFamily="34" charset="0"/>
+                <a:ea typeface="Arial" pitchFamily="34" charset="-122"/>
+                <a:cs typeface="Arial" pitchFamily="34" charset="-120"/>
+              </a:rPr>
+              <a:t>Watch what ginger is used in your home over the next two days. List 3 dishes / drinks that contain it. For each, guess: fresh or dried? Heating or just flavour?</a:t>
+            </a:r>
+            <a:endParaRPr lang="en-US" sz="1200" dirty="0"/>
+          </a:p>
+        </p:txBody>
+      </p:sp>
+      <p:sp>
+        <p:nvSpPr>
+          <p:cNvPr id="5" name="Text 3"/>
+          <p:cNvSpPr/>
+          <p:nvPr/>
+        </p:nvSpPr>
+        <p:spPr>
+          <a:xfrm>
+            <a:off x="406301" y="4434929"/>
+            <a:ext cx="8498026" cy="213271"/>
+          </a:xfrm>
+          <a:prstGeom prst="rect">
+            <a:avLst/>
+          </a:prstGeom>
+          <a:noFill/>
+          <a:ln/>
+        </p:spPr>
+        <p:txBody>
+          <a:bodyPr wrap="square" lIns="0" tIns="0" rIns="0" bIns="0" rtlCol="0" anchor="t"/>
+          <a:lstStyle/>
+          <a:p>
             <a:pPr algn="l" indent="0" marL="0">
               <a:lnSpc>
                 <a:spcPts val="1680"/>
@@ -3331,24 +6705,177 @@
               <a:buNone/>
             </a:pPr>
             <a:r>
-              <a:rPr lang="en-US" sz="1200" i="1" dirty="0">
-                <a:solidFill>
-                  <a:srgbClr val="1C2833"/>
-                </a:solidFill>
-                <a:latin typeface="Arial" pitchFamily="34" charset="0"/>
-                <a:ea typeface="Arial" pitchFamily="34" charset="-122"/>
-                <a:cs typeface="Arial" pitchFamily="34" charset="-120"/>
-              </a:rPr>
-              <a:t>sūnṭhī</a:t>
-            </a:r>
-            <a:pPr algn="l" indent="0" marL="0">
-              <a:lnSpc>
-                <a:spcPts val="1680"/>
+              <a:rPr lang="en-US" sz="1200" dirty="0">
+                <a:solidFill>
+                  <a:srgbClr val="1C2833"/>
+                </a:solidFill>
+                <a:latin typeface="Arial" pitchFamily="34" charset="0"/>
+                <a:ea typeface="Arial" pitchFamily="34" charset="-122"/>
+                <a:cs typeface="Arial" pitchFamily="34" charset="-120"/>
+              </a:rPr>
+              <a:t>Middle ·  · IKS Curriculum</a:t>
+            </a:r>
+            <a:endParaRPr lang="en-US" sz="1200" dirty="0"/>
+          </a:p>
+        </p:txBody>
+      </p:sp>
+    </p:spTree>
+  </p:cSld>
+  <p:clrMapOvr>
+    <a:masterClrMapping/>
+  </p:clrMapOvr>
+</p:sld>
+</file>
+
+<file path=ppt/slides/slide19.xml><?xml version="1.0" encoding="utf-8"?>
+<p:sld xmlns:a="http://schemas.openxmlformats.org/drawingml/2006/main" xmlns:r="http://schemas.openxmlformats.org/officeDocument/2006/relationships" xmlns:p="http://schemas.openxmlformats.org/presentationml/2006/main">
+  <p:cSld name="Slide 19">
+    <p:bg>
+      <p:bgPr>
+        <a:solidFill>
+          <a:srgbClr val="FFFFFF"/>
+        </a:solidFill>
+      </p:bgPr>
+    </p:bg>
+    <p:spTree>
+      <p:nvGrpSpPr>
+        <p:cNvPr id="1" name=""/>
+        <p:cNvGrpSpPr/>
+        <p:nvPr/>
+      </p:nvGrpSpPr>
+      <p:grpSpPr>
+        <a:xfrm>
+          <a:off x="0" y="0"/>
+          <a:ext cx="0" cy="0"/>
+          <a:chOff x="0" y="0"/>
+          <a:chExt cx="0" cy="0"/>
+        </a:xfrm>
+      </p:grpSpPr>
+      <p:sp>
+        <p:nvSpPr>
+          <p:cNvPr id="2" name="Text 0"/>
+          <p:cNvSpPr/>
+          <p:nvPr/>
+        </p:nvSpPr>
+        <p:spPr>
+          <a:xfrm>
+            <a:off x="0" y="0"/>
+            <a:ext cx="9144000" cy="101501"/>
+          </a:xfrm>
+          <a:prstGeom prst="rect">
+            <a:avLst/>
+          </a:prstGeom>
+          <a:solidFill>
+            <a:srgbClr val="277884"/>
+          </a:solidFill>
+          <a:ln/>
+        </p:spPr>
+        <p:txBody>
+          <a:bodyPr wrap="square" rtlCol="0" anchor="ctr"/>
+          <a:lstStyle/>
+          <a:p>
+            <a:pPr indent="0" marL="0">
+              <a:buNone/>
+            </a:pPr>
+            <a:endParaRPr lang="en-US" dirty="0"/>
+          </a:p>
+        </p:txBody>
+      </p:sp>
+      <p:sp>
+        <p:nvSpPr>
+          <p:cNvPr id="3" name="Text 1"/>
+          <p:cNvSpPr/>
+          <p:nvPr/>
+        </p:nvSpPr>
+        <p:spPr>
+          <a:xfrm>
+            <a:off x="406301" y="457051"/>
+            <a:ext cx="8498026" cy="274290"/>
+          </a:xfrm>
+          <a:prstGeom prst="rect">
+            <a:avLst/>
+          </a:prstGeom>
+          <a:noFill/>
+          <a:ln/>
+        </p:spPr>
+        <p:txBody>
+          <a:bodyPr wrap="square" lIns="0" tIns="0" rIns="0" bIns="0" rtlCol="0" anchor="t"/>
+          <a:lstStyle/>
+          <a:p>
+            <a:pPr algn="l" indent="0" marL="0">
+              <a:lnSpc>
+                <a:spcPts val="2160"/>
               </a:lnSpc>
               <a:spcBef>
-                <a:spcPts val="300"/>
+                <a:spcPts val="600"/>
               </a:spcBef>
               <a:spcAft>
+                <a:spcPts val="800"/>
+              </a:spcAft>
+              <a:buNone/>
+            </a:pPr>
+            <a:r>
+              <a:rPr lang="en-US" sz="1800" b="1" dirty="0">
+                <a:solidFill>
+                  <a:srgbClr val="FE4447"/>
+                </a:solidFill>
+                <a:latin typeface="Georgia" pitchFamily="34" charset="0"/>
+                <a:ea typeface="Georgia" pitchFamily="34" charset="-122"/>
+                <a:cs typeface="Georgia" pitchFamily="34" charset="-120"/>
+              </a:rPr>
+              <a:t>Differentiation</a:t>
+            </a:r>
+            <a:endParaRPr lang="en-US" sz="1800" dirty="0"/>
+          </a:p>
+        </p:txBody>
+      </p:sp>
+      <p:sp>
+        <p:nvSpPr>
+          <p:cNvPr id="4" name="Text 2"/>
+          <p:cNvSpPr/>
+          <p:nvPr/>
+        </p:nvSpPr>
+        <p:spPr>
+          <a:xfrm>
+            <a:off x="634901" y="883593"/>
+            <a:ext cx="8102798" cy="731341"/>
+          </a:xfrm>
+          <a:prstGeom prst="rect">
+            <a:avLst/>
+          </a:prstGeom>
+          <a:noFill/>
+          <a:ln/>
+        </p:spPr>
+        <p:txBody>
+          <a:bodyPr wrap="square" lIns="0" tIns="0" rIns="0" bIns="0" rtlCol="0" anchor="t"/>
+          <a:lstStyle/>
+          <a:p>
+            <a:pPr algn="l" marL="342900" indent="-342900">
+              <a:lnSpc>
+                <a:spcPts val="1620"/>
+              </a:lnSpc>
+              <a:spcAft>
+                <a:spcPts val="300"/>
+              </a:spcAft>
+              <a:buSzPct val="100000"/>
+              <a:buChar char="•"/>
+            </a:pPr>
+            <a:r>
+              <a:rPr lang="en-US" sz="1200" b="1" dirty="0">
+                <a:solidFill>
+                  <a:srgbClr val="1C2833"/>
+                </a:solidFill>
+                <a:latin typeface="Arial" pitchFamily="34" charset="0"/>
+                <a:ea typeface="Arial" pitchFamily="34" charset="-122"/>
+                <a:cs typeface="Arial" pitchFamily="34" charset="-120"/>
+              </a:rPr>
+              <a:t>One tier up:</a:t>
+            </a:r>
+            <a:pPr algn="l" indent="0" marL="0">
+              <a:lnSpc>
+                <a:spcPts val="1620"/>
+              </a:lnSpc>
+              <a:spcAft>
                 <a:spcPts val="300"/>
               </a:spcAft>
               <a:buNone/>
@@ -3362,38 +6889,36 @@
                 <a:ea typeface="Arial" pitchFamily="34" charset="-122"/>
                 <a:cs typeface="Arial" pitchFamily="34" charset="-120"/>
               </a:rPr>
-              <a:t> (dried) — distinguished in </a:t>
-            </a:r>
-            <a:pPr algn="l" indent="0" marL="0">
-              <a:lnSpc>
-                <a:spcPts val="1680"/>
-              </a:lnSpc>
-              <a:spcBef>
-                <a:spcPts val="300"/>
-              </a:spcBef>
-              <a:spcAft>
-                <a:spcPts val="300"/>
-              </a:spcAft>
-              <a:buNone/>
-            </a:pPr>
-            <a:r>
-              <a:rPr lang="en-US" sz="1200" i="1" dirty="0">
-                <a:solidFill>
-                  <a:srgbClr val="1C2833"/>
-                </a:solidFill>
-                <a:latin typeface="Arial" pitchFamily="34" charset="0"/>
-                <a:ea typeface="Arial" pitchFamily="34" charset="-122"/>
-                <a:cs typeface="Arial" pitchFamily="34" charset="-120"/>
-              </a:rPr>
-              <a:t>Caraka Saṁhitā</a:t>
-            </a:r>
-            <a:pPr algn="l" indent="0" marL="0">
-              <a:lnSpc>
-                <a:spcPts val="1680"/>
-              </a:lnSpc>
-              <a:spcBef>
-                <a:spcPts val="300"/>
-              </a:spcBef>
+              <a:t> Look up the chemical structure of gingerol and shogaol. Identify the difference (one OH group + one double bond gain). Sketch both in your notebook.</a:t>
+            </a:r>
+            <a:endParaRPr lang="en-US" sz="1200" dirty="0"/>
+          </a:p>
+          <a:p>
+            <a:pPr algn="l" marL="342900" indent="-342900">
+              <a:lnSpc>
+                <a:spcPts val="1620"/>
+              </a:lnSpc>
+              <a:spcAft>
+                <a:spcPts val="300"/>
+              </a:spcAft>
+              <a:buSzPct val="100000"/>
+              <a:buChar char="•"/>
+            </a:pPr>
+            <a:r>
+              <a:rPr lang="en-US" sz="1200" b="1" dirty="0">
+                <a:solidFill>
+                  <a:srgbClr val="1C2833"/>
+                </a:solidFill>
+                <a:latin typeface="Arial" pitchFamily="34" charset="0"/>
+                <a:ea typeface="Arial" pitchFamily="34" charset="-122"/>
+                <a:cs typeface="Arial" pitchFamily="34" charset="-120"/>
+              </a:rPr>
+              <a:t>One tier down:</a:t>
+            </a:r>
+            <a:pPr algn="l" indent="0" marL="0">
+              <a:lnSpc>
+                <a:spcPts val="1620"/>
+              </a:lnSpc>
               <a:spcAft>
                 <a:spcPts val="300"/>
               </a:spcAft>
@@ -3408,7 +6933,7 @@
                 <a:ea typeface="Arial" pitchFamily="34" charset="-122"/>
                 <a:cs typeface="Arial" pitchFamily="34" charset="-120"/>
               </a:rPr>
-              <a:t> and standard Ayurvedic nighantus (lexicons). Chapter-level reference only. – Anti-nausea clinical evidence: multiple systematic reviews exist; teachers can search "ginger nausea systematic review" in PubMed.</a:t>
+              <a:t> Focus on identifying ginger by sight and smell, and remembering "fresh = gingerol, dried = shogaol."</a:t>
             </a:r>
             <a:endParaRPr lang="en-US" sz="1200" dirty="0"/>
           </a:p>
@@ -3566,7 +7091,7 @@
                 <a:ea typeface="Georgia" pitchFamily="34" charset="-122"/>
                 <a:cs typeface="Georgia" pitchFamily="34" charset="-120"/>
               </a:rPr>
-              <a:t>Materials</a:t>
+              <a:t>Learning objective</a:t>
             </a:r>
             <a:endParaRPr lang="en-US" sz="1800" dirty="0"/>
           </a:p>
@@ -3581,7 +7106,7 @@
         <p:spPr>
           <a:xfrm>
             <a:off x="406301" y="870942"/>
-            <a:ext cx="8498026" cy="426541"/>
+            <a:ext cx="8498026" cy="639812"/>
           </a:xfrm>
           <a:prstGeom prst="rect">
             <a:avLst/>
@@ -3614,7 +7139,7 @@
                 <a:ea typeface="Arial" pitchFamily="34" charset="-122"/>
                 <a:cs typeface="Arial" pitchFamily="34" charset="-120"/>
               </a:rPr>
-              <a:t>– Fresh ginger rhizome – Small jar of dried ground ginger powder (</a:t>
+              <a:t>By the end of this lesson, students can identify </a:t>
             </a:r>
             <a:pPr algn="l" indent="0" marL="0">
               <a:lnSpc>
@@ -3637,6 +7162,144 @@
                 <a:ea typeface="Arial" pitchFamily="34" charset="-122"/>
                 <a:cs typeface="Arial" pitchFamily="34" charset="-120"/>
               </a:rPr>
+              <a:t>adraka</a:t>
+            </a:r>
+            <a:pPr algn="l" indent="0" marL="0">
+              <a:lnSpc>
+                <a:spcPts val="1680"/>
+              </a:lnSpc>
+              <a:spcBef>
+                <a:spcPts val="300"/>
+              </a:spcBef>
+              <a:spcAft>
+                <a:spcPts val="300"/>
+              </a:spcAft>
+              <a:buNone/>
+            </a:pPr>
+            <a:r>
+              <a:rPr lang="en-US" sz="1200" dirty="0">
+                <a:solidFill>
+                  <a:srgbClr val="1C2833"/>
+                </a:solidFill>
+                <a:latin typeface="Arial" pitchFamily="34" charset="0"/>
+                <a:ea typeface="Arial" pitchFamily="34" charset="-122"/>
+                <a:cs typeface="Arial" pitchFamily="34" charset="-120"/>
+              </a:rPr>
+              <a:t> (</a:t>
+            </a:r>
+            <a:pPr algn="l" indent="0" marL="0">
+              <a:lnSpc>
+                <a:spcPts val="1680"/>
+              </a:lnSpc>
+              <a:spcBef>
+                <a:spcPts val="300"/>
+              </a:spcBef>
+              <a:spcAft>
+                <a:spcPts val="300"/>
+              </a:spcAft>
+              <a:buNone/>
+            </a:pPr>
+            <a:r>
+              <a:rPr lang="en-US" sz="1200" i="1" dirty="0">
+                <a:solidFill>
+                  <a:srgbClr val="1C2833"/>
+                </a:solidFill>
+                <a:latin typeface="Arial" pitchFamily="34" charset="0"/>
+                <a:ea typeface="Arial" pitchFamily="34" charset="-122"/>
+                <a:cs typeface="Arial" pitchFamily="34" charset="-120"/>
+              </a:rPr>
+              <a:t>Zingiber officinale</a:t>
+            </a:r>
+            <a:pPr algn="l" indent="0" marL="0">
+              <a:lnSpc>
+                <a:spcPts val="1680"/>
+              </a:lnSpc>
+              <a:spcBef>
+                <a:spcPts val="300"/>
+              </a:spcBef>
+              <a:spcAft>
+                <a:spcPts val="300"/>
+              </a:spcAft>
+              <a:buNone/>
+            </a:pPr>
+            <a:r>
+              <a:rPr lang="en-US" sz="1200" dirty="0">
+                <a:solidFill>
+                  <a:srgbClr val="1C2833"/>
+                </a:solidFill>
+                <a:latin typeface="Arial" pitchFamily="34" charset="0"/>
+                <a:ea typeface="Arial" pitchFamily="34" charset="-122"/>
+                <a:cs typeface="Arial" pitchFamily="34" charset="-120"/>
+              </a:rPr>
+              <a:t>) as a rhizome, distinguish </a:t>
+            </a:r>
+            <a:pPr algn="l" indent="0" marL="0">
+              <a:lnSpc>
+                <a:spcPts val="1680"/>
+              </a:lnSpc>
+              <a:spcBef>
+                <a:spcPts val="300"/>
+              </a:spcBef>
+              <a:spcAft>
+                <a:spcPts val="300"/>
+              </a:spcAft>
+              <a:buNone/>
+            </a:pPr>
+            <a:r>
+              <a:rPr lang="en-US" sz="1200" i="1" dirty="0">
+                <a:solidFill>
+                  <a:srgbClr val="1C2833"/>
+                </a:solidFill>
+                <a:latin typeface="Arial" pitchFamily="34" charset="0"/>
+                <a:ea typeface="Arial" pitchFamily="34" charset="-122"/>
+                <a:cs typeface="Arial" pitchFamily="34" charset="-120"/>
+              </a:rPr>
+              <a:t>adraka</a:t>
+            </a:r>
+            <a:pPr algn="l" indent="0" marL="0">
+              <a:lnSpc>
+                <a:spcPts val="1680"/>
+              </a:lnSpc>
+              <a:spcBef>
+                <a:spcPts val="300"/>
+              </a:spcBef>
+              <a:spcAft>
+                <a:spcPts val="300"/>
+              </a:spcAft>
+              <a:buNone/>
+            </a:pPr>
+            <a:r>
+              <a:rPr lang="en-US" sz="1200" dirty="0">
+                <a:solidFill>
+                  <a:srgbClr val="1C2833"/>
+                </a:solidFill>
+                <a:latin typeface="Arial" pitchFamily="34" charset="0"/>
+                <a:ea typeface="Arial" pitchFamily="34" charset="-122"/>
+                <a:cs typeface="Arial" pitchFamily="34" charset="-120"/>
+              </a:rPr>
+              <a:t> (fresh) from </a:t>
+            </a:r>
+            <a:pPr algn="l" indent="0" marL="0">
+              <a:lnSpc>
+                <a:spcPts val="1680"/>
+              </a:lnSpc>
+              <a:spcBef>
+                <a:spcPts val="300"/>
+              </a:spcBef>
+              <a:spcAft>
+                <a:spcPts val="300"/>
+              </a:spcAft>
+              <a:buNone/>
+            </a:pPr>
+            <a:r>
+              <a:rPr lang="en-US" sz="1200" i="1" dirty="0">
+                <a:solidFill>
+                  <a:srgbClr val="1C2833"/>
+                </a:solidFill>
+                <a:latin typeface="Arial" pitchFamily="34" charset="0"/>
+                <a:ea typeface="Arial" pitchFamily="34" charset="-122"/>
+                <a:cs typeface="Arial" pitchFamily="34" charset="-120"/>
+              </a:rPr>
               <a:t>sūnṭhī</a:t>
             </a:r>
             <a:pPr algn="l" indent="0" marL="0">
@@ -3660,7 +7323,809 @@
                 <a:ea typeface="Arial" pitchFamily="34" charset="-122"/>
                 <a:cs typeface="Arial" pitchFamily="34" charset="-120"/>
               </a:rPr>
-              <a:t>) – Optional: a thumb-size lump of jaggery for the heating-demo – Optional, for demo: a small kettle, ginger slices, water, lemon, jaggery — ginger tea – Whiteboard</a:t>
+              <a:t> (dried) and explain that the active compound shifts from </a:t>
+            </a:r>
+            <a:pPr algn="l" indent="0" marL="0">
+              <a:lnSpc>
+                <a:spcPts val="1680"/>
+              </a:lnSpc>
+              <a:spcBef>
+                <a:spcPts val="300"/>
+              </a:spcBef>
+              <a:spcAft>
+                <a:spcPts val="300"/>
+              </a:spcAft>
+              <a:buNone/>
+            </a:pPr>
+            <a:r>
+              <a:rPr lang="en-US" sz="1200" b="1" dirty="0">
+                <a:solidFill>
+                  <a:srgbClr val="1C2833"/>
+                </a:solidFill>
+                <a:latin typeface="Arial" pitchFamily="34" charset="0"/>
+                <a:ea typeface="Arial" pitchFamily="34" charset="-122"/>
+                <a:cs typeface="Arial" pitchFamily="34" charset="-120"/>
+              </a:rPr>
+              <a:t>gingerol</a:t>
+            </a:r>
+            <a:pPr algn="l" indent="0" marL="0">
+              <a:lnSpc>
+                <a:spcPts val="1680"/>
+              </a:lnSpc>
+              <a:spcBef>
+                <a:spcPts val="300"/>
+              </a:spcBef>
+              <a:spcAft>
+                <a:spcPts val="300"/>
+              </a:spcAft>
+              <a:buNone/>
+            </a:pPr>
+            <a:r>
+              <a:rPr lang="en-US" sz="1200" dirty="0">
+                <a:solidFill>
+                  <a:srgbClr val="1C2833"/>
+                </a:solidFill>
+                <a:latin typeface="Arial" pitchFamily="34" charset="0"/>
+                <a:ea typeface="Arial" pitchFamily="34" charset="-122"/>
+                <a:cs typeface="Arial" pitchFamily="34" charset="-120"/>
+              </a:rPr>
+              <a:t> to </a:t>
+            </a:r>
+            <a:pPr algn="l" indent="0" marL="0">
+              <a:lnSpc>
+                <a:spcPts val="1680"/>
+              </a:lnSpc>
+              <a:spcBef>
+                <a:spcPts val="300"/>
+              </a:spcBef>
+              <a:spcAft>
+                <a:spcPts val="300"/>
+              </a:spcAft>
+              <a:buNone/>
+            </a:pPr>
+            <a:r>
+              <a:rPr lang="en-US" sz="1200" b="1" dirty="0">
+                <a:solidFill>
+                  <a:srgbClr val="1C2833"/>
+                </a:solidFill>
+                <a:latin typeface="Arial" pitchFamily="34" charset="0"/>
+                <a:ea typeface="Arial" pitchFamily="34" charset="-122"/>
+                <a:cs typeface="Arial" pitchFamily="34" charset="-120"/>
+              </a:rPr>
+              <a:t>shogaol</a:t>
+            </a:r>
+            <a:pPr algn="l" indent="0" marL="0">
+              <a:lnSpc>
+                <a:spcPts val="1680"/>
+              </a:lnSpc>
+              <a:spcBef>
+                <a:spcPts val="300"/>
+              </a:spcBef>
+              <a:spcAft>
+                <a:spcPts val="300"/>
+              </a:spcAft>
+              <a:buNone/>
+            </a:pPr>
+            <a:r>
+              <a:rPr lang="en-US" sz="1200" dirty="0">
+                <a:solidFill>
+                  <a:srgbClr val="1C2833"/>
+                </a:solidFill>
+                <a:latin typeface="Arial" pitchFamily="34" charset="0"/>
+                <a:ea typeface="Arial" pitchFamily="34" charset="-122"/>
+                <a:cs typeface="Arial" pitchFamily="34" charset="-120"/>
+              </a:rPr>
+              <a:t> on drying, and describe ginger's traditional classification as </a:t>
+            </a:r>
+            <a:pPr algn="l" indent="0" marL="0">
+              <a:lnSpc>
+                <a:spcPts val="1680"/>
+              </a:lnSpc>
+              <a:spcBef>
+                <a:spcPts val="300"/>
+              </a:spcBef>
+              <a:spcAft>
+                <a:spcPts val="300"/>
+              </a:spcAft>
+              <a:buNone/>
+            </a:pPr>
+            <a:r>
+              <a:rPr lang="en-US" sz="1200" i="1" dirty="0">
+                <a:solidFill>
+                  <a:srgbClr val="1C2833"/>
+                </a:solidFill>
+                <a:latin typeface="Arial" pitchFamily="34" charset="0"/>
+                <a:ea typeface="Arial" pitchFamily="34" charset="-122"/>
+                <a:cs typeface="Arial" pitchFamily="34" charset="-120"/>
+              </a:rPr>
+              <a:t>uṣṇa</a:t>
+            </a:r>
+            <a:pPr algn="l" indent="0" marL="0">
+              <a:lnSpc>
+                <a:spcPts val="1680"/>
+              </a:lnSpc>
+              <a:spcBef>
+                <a:spcPts val="300"/>
+              </a:spcBef>
+              <a:spcAft>
+                <a:spcPts val="300"/>
+              </a:spcAft>
+              <a:buNone/>
+            </a:pPr>
+            <a:r>
+              <a:rPr lang="en-US" sz="1200" dirty="0">
+                <a:solidFill>
+                  <a:srgbClr val="1C2833"/>
+                </a:solidFill>
+                <a:latin typeface="Arial" pitchFamily="34" charset="0"/>
+                <a:ea typeface="Arial" pitchFamily="34" charset="-122"/>
+                <a:cs typeface="Arial" pitchFamily="34" charset="-120"/>
+              </a:rPr>
+              <a:t> (heating) with one well-supported modern use.</a:t>
+            </a:r>
+            <a:endParaRPr lang="en-US" sz="1200" dirty="0"/>
+          </a:p>
+        </p:txBody>
+      </p:sp>
+      <p:sp>
+        <p:nvSpPr>
+          <p:cNvPr id="5" name="Text 3"/>
+          <p:cNvSpPr/>
+          <p:nvPr/>
+        </p:nvSpPr>
+        <p:spPr>
+          <a:xfrm>
+            <a:off x="406301" y="4434929"/>
+            <a:ext cx="8498026" cy="213271"/>
+          </a:xfrm>
+          <a:prstGeom prst="rect">
+            <a:avLst/>
+          </a:prstGeom>
+          <a:noFill/>
+          <a:ln/>
+        </p:spPr>
+        <p:txBody>
+          <a:bodyPr wrap="square" lIns="0" tIns="0" rIns="0" bIns="0" rtlCol="0" anchor="t"/>
+          <a:lstStyle/>
+          <a:p>
+            <a:pPr algn="l" indent="0" marL="0">
+              <a:lnSpc>
+                <a:spcPts val="1680"/>
+              </a:lnSpc>
+              <a:spcBef>
+                <a:spcPts val="300"/>
+              </a:spcBef>
+              <a:spcAft>
+                <a:spcPts val="300"/>
+              </a:spcAft>
+              <a:buNone/>
+            </a:pPr>
+            <a:r>
+              <a:rPr lang="en-US" sz="1200" dirty="0">
+                <a:solidFill>
+                  <a:srgbClr val="1C2833"/>
+                </a:solidFill>
+                <a:latin typeface="Arial" pitchFamily="34" charset="0"/>
+                <a:ea typeface="Arial" pitchFamily="34" charset="-122"/>
+                <a:cs typeface="Arial" pitchFamily="34" charset="-120"/>
+              </a:rPr>
+              <a:t>Middle ·  · IKS Curriculum</a:t>
+            </a:r>
+            <a:endParaRPr lang="en-US" sz="1200" dirty="0"/>
+          </a:p>
+        </p:txBody>
+      </p:sp>
+    </p:spTree>
+  </p:cSld>
+  <p:clrMapOvr>
+    <a:masterClrMapping/>
+  </p:clrMapOvr>
+</p:sld>
+</file>
+
+<file path=ppt/slides/slide20.xml><?xml version="1.0" encoding="utf-8"?>
+<p:sld xmlns:a="http://schemas.openxmlformats.org/drawingml/2006/main" xmlns:r="http://schemas.openxmlformats.org/officeDocument/2006/relationships" xmlns:p="http://schemas.openxmlformats.org/presentationml/2006/main">
+  <p:cSld name="Slide 20">
+    <p:bg>
+      <p:bgPr>
+        <a:solidFill>
+          <a:srgbClr val="FFFFFF"/>
+        </a:solidFill>
+      </p:bgPr>
+    </p:bg>
+    <p:spTree>
+      <p:nvGrpSpPr>
+        <p:cNvPr id="1" name=""/>
+        <p:cNvGrpSpPr/>
+        <p:nvPr/>
+      </p:nvGrpSpPr>
+      <p:grpSpPr>
+        <a:xfrm>
+          <a:off x="0" y="0"/>
+          <a:ext cx="0" cy="0"/>
+          <a:chOff x="0" y="0"/>
+          <a:chExt cx="0" cy="0"/>
+        </a:xfrm>
+      </p:grpSpPr>
+      <p:sp>
+        <p:nvSpPr>
+          <p:cNvPr id="2" name="Text 0"/>
+          <p:cNvSpPr/>
+          <p:nvPr/>
+        </p:nvSpPr>
+        <p:spPr>
+          <a:xfrm>
+            <a:off x="0" y="0"/>
+            <a:ext cx="9144000" cy="101501"/>
+          </a:xfrm>
+          <a:prstGeom prst="rect">
+            <a:avLst/>
+          </a:prstGeom>
+          <a:solidFill>
+            <a:srgbClr val="277884"/>
+          </a:solidFill>
+          <a:ln/>
+        </p:spPr>
+        <p:txBody>
+          <a:bodyPr wrap="square" rtlCol="0" anchor="ctr"/>
+          <a:lstStyle/>
+          <a:p>
+            <a:pPr indent="0" marL="0">
+              <a:buNone/>
+            </a:pPr>
+            <a:endParaRPr lang="en-US" dirty="0"/>
+          </a:p>
+        </p:txBody>
+      </p:sp>
+      <p:sp>
+        <p:nvSpPr>
+          <p:cNvPr id="3" name="Text 1"/>
+          <p:cNvSpPr/>
+          <p:nvPr/>
+        </p:nvSpPr>
+        <p:spPr>
+          <a:xfrm>
+            <a:off x="406301" y="457051"/>
+            <a:ext cx="8498026" cy="274290"/>
+          </a:xfrm>
+          <a:prstGeom prst="rect">
+            <a:avLst/>
+          </a:prstGeom>
+          <a:noFill/>
+          <a:ln/>
+        </p:spPr>
+        <p:txBody>
+          <a:bodyPr wrap="square" lIns="0" tIns="0" rIns="0" bIns="0" rtlCol="0" anchor="t"/>
+          <a:lstStyle/>
+          <a:p>
+            <a:pPr algn="l" indent="0" marL="0">
+              <a:lnSpc>
+                <a:spcPts val="2160"/>
+              </a:lnSpc>
+              <a:spcBef>
+                <a:spcPts val="600"/>
+              </a:spcBef>
+              <a:spcAft>
+                <a:spcPts val="800"/>
+              </a:spcAft>
+              <a:buNone/>
+            </a:pPr>
+            <a:r>
+              <a:rPr lang="en-US" sz="1800" b="1" dirty="0">
+                <a:solidFill>
+                  <a:srgbClr val="FE4447"/>
+                </a:solidFill>
+                <a:latin typeface="Georgia" pitchFamily="34" charset="0"/>
+                <a:ea typeface="Georgia" pitchFamily="34" charset="-122"/>
+                <a:cs typeface="Georgia" pitchFamily="34" charset="-120"/>
+              </a:rPr>
+              <a:t>Teacher notes</a:t>
+            </a:r>
+            <a:endParaRPr lang="en-US" sz="1800" dirty="0"/>
+          </a:p>
+        </p:txBody>
+      </p:sp>
+      <p:sp>
+        <p:nvSpPr>
+          <p:cNvPr id="4" name="Text 2"/>
+          <p:cNvSpPr/>
+          <p:nvPr/>
+        </p:nvSpPr>
+        <p:spPr>
+          <a:xfrm>
+            <a:off x="634901" y="883593"/>
+            <a:ext cx="8102798" cy="1592163"/>
+          </a:xfrm>
+          <a:prstGeom prst="rect">
+            <a:avLst/>
+          </a:prstGeom>
+          <a:noFill/>
+          <a:ln/>
+        </p:spPr>
+        <p:txBody>
+          <a:bodyPr wrap="square" lIns="0" tIns="0" rIns="0" bIns="0" rtlCol="0" anchor="t"/>
+          <a:lstStyle/>
+          <a:p>
+            <a:pPr algn="l" marL="342900" indent="-342900">
+              <a:lnSpc>
+                <a:spcPts val="1620"/>
+              </a:lnSpc>
+              <a:spcAft>
+                <a:spcPts val="300"/>
+              </a:spcAft>
+              <a:buSzPct val="100000"/>
+              <a:buChar char="•"/>
+            </a:pPr>
+            <a:r>
+              <a:rPr lang="en-US" sz="1200" dirty="0">
+                <a:solidFill>
+                  <a:srgbClr val="1C2833"/>
+                </a:solidFill>
+                <a:latin typeface="Arial" pitchFamily="34" charset="0"/>
+                <a:ea typeface="Arial" pitchFamily="34" charset="-122"/>
+                <a:cs typeface="Arial" pitchFamily="34" charset="-120"/>
+              </a:rPr>
+              <a:t>The chemistry sketch (gingerol → shogaol) is the headline. If a student remembers nothing else from today, they should know that drying ginger changes its chemistry, and the change is well-defined.</a:t>
+            </a:r>
+            <a:endParaRPr lang="en-US" sz="1200" dirty="0"/>
+          </a:p>
+          <a:p>
+            <a:pPr algn="l" marL="342900" indent="-342900">
+              <a:lnSpc>
+                <a:spcPts val="1620"/>
+              </a:lnSpc>
+              <a:spcAft>
+                <a:spcPts val="300"/>
+              </a:spcAft>
+              <a:buSzPct val="100000"/>
+              <a:buChar char="•"/>
+            </a:pPr>
+            <a:r>
+              <a:rPr lang="en-US" sz="1200" dirty="0">
+                <a:solidFill>
+                  <a:srgbClr val="1C2833"/>
+                </a:solidFill>
+                <a:latin typeface="Arial" pitchFamily="34" charset="0"/>
+                <a:ea typeface="Arial" pitchFamily="34" charset="-122"/>
+                <a:cs typeface="Arial" pitchFamily="34" charset="-120"/>
+              </a:rPr>
+              <a:t>The "ginger has real clinical evidence for nausea" point is important — students often don't realise that for </a:t>
+            </a:r>
+            <a:pPr algn="l" indent="0" marL="0">
+              <a:lnSpc>
+                <a:spcPts val="1620"/>
+              </a:lnSpc>
+              <a:spcAft>
+                <a:spcPts val="300"/>
+              </a:spcAft>
+              <a:buNone/>
+            </a:pPr>
+            <a:r>
+              <a:rPr lang="en-US" sz="1200" i="1" dirty="0">
+                <a:solidFill>
+                  <a:srgbClr val="1C2833"/>
+                </a:solidFill>
+                <a:latin typeface="Arial" pitchFamily="34" charset="0"/>
+                <a:ea typeface="Arial" pitchFamily="34" charset="-122"/>
+                <a:cs typeface="Arial" pitchFamily="34" charset="-120"/>
+              </a:rPr>
+              <a:t>some specific herbal uses</a:t>
+            </a:r>
+            <a:pPr algn="l" indent="0" marL="0">
+              <a:lnSpc>
+                <a:spcPts val="1620"/>
+              </a:lnSpc>
+              <a:spcAft>
+                <a:spcPts val="300"/>
+              </a:spcAft>
+              <a:buNone/>
+            </a:pPr>
+            <a:r>
+              <a:rPr lang="en-US" sz="1200" dirty="0">
+                <a:solidFill>
+                  <a:srgbClr val="1C2833"/>
+                </a:solidFill>
+                <a:latin typeface="Arial" pitchFamily="34" charset="0"/>
+                <a:ea typeface="Arial" pitchFamily="34" charset="-122"/>
+                <a:cs typeface="Arial" pitchFamily="34" charset="-120"/>
+              </a:rPr>
+              <a:t>, the clinical evidence is genuinely strong. It builds the right kind of nuance: not blanket scepticism, not blanket endorsement, but herb-by-herb, use-by-use evaluation.</a:t>
+            </a:r>
+            <a:endParaRPr lang="en-US" sz="1200" dirty="0"/>
+          </a:p>
+          <a:p>
+            <a:pPr algn="l" marL="342900" indent="-342900">
+              <a:lnSpc>
+                <a:spcPts val="1620"/>
+              </a:lnSpc>
+              <a:spcAft>
+                <a:spcPts val="300"/>
+              </a:spcAft>
+              <a:buSzPct val="100000"/>
+              <a:buChar char="•"/>
+            </a:pPr>
+            <a:r>
+              <a:rPr lang="en-US" sz="1200" dirty="0">
+                <a:solidFill>
+                  <a:srgbClr val="1C2833"/>
+                </a:solidFill>
+                <a:latin typeface="Arial" pitchFamily="34" charset="0"/>
+                <a:ea typeface="Arial" pitchFamily="34" charset="-122"/>
+                <a:cs typeface="Arial" pitchFamily="34" charset="-120"/>
+              </a:rPr>
+              <a:t>If a student in your class is pregnant (older Middle band, occasionally) or has a pregnant family member raising questions, redirect gently: clinical dosing is for clinicians.</a:t>
+            </a:r>
+            <a:endParaRPr lang="en-US" sz="1200" dirty="0"/>
+          </a:p>
+        </p:txBody>
+      </p:sp>
+      <p:sp>
+        <p:nvSpPr>
+          <p:cNvPr id="5" name="Text 3"/>
+          <p:cNvSpPr/>
+          <p:nvPr/>
+        </p:nvSpPr>
+        <p:spPr>
+          <a:xfrm>
+            <a:off x="406301" y="4434929"/>
+            <a:ext cx="8498026" cy="213271"/>
+          </a:xfrm>
+          <a:prstGeom prst="rect">
+            <a:avLst/>
+          </a:prstGeom>
+          <a:noFill/>
+          <a:ln/>
+        </p:spPr>
+        <p:txBody>
+          <a:bodyPr wrap="square" lIns="0" tIns="0" rIns="0" bIns="0" rtlCol="0" anchor="t"/>
+          <a:lstStyle/>
+          <a:p>
+            <a:pPr algn="l" indent="0" marL="0">
+              <a:lnSpc>
+                <a:spcPts val="1680"/>
+              </a:lnSpc>
+              <a:spcBef>
+                <a:spcPts val="300"/>
+              </a:spcBef>
+              <a:spcAft>
+                <a:spcPts val="300"/>
+              </a:spcAft>
+              <a:buNone/>
+            </a:pPr>
+            <a:r>
+              <a:rPr lang="en-US" sz="1200" dirty="0">
+                <a:solidFill>
+                  <a:srgbClr val="1C2833"/>
+                </a:solidFill>
+                <a:latin typeface="Arial" pitchFamily="34" charset="0"/>
+                <a:ea typeface="Arial" pitchFamily="34" charset="-122"/>
+                <a:cs typeface="Arial" pitchFamily="34" charset="-120"/>
+              </a:rPr>
+              <a:t>Middle ·  · IKS Curriculum</a:t>
+            </a:r>
+            <a:endParaRPr lang="en-US" sz="1200" dirty="0"/>
+          </a:p>
+        </p:txBody>
+      </p:sp>
+    </p:spTree>
+  </p:cSld>
+  <p:clrMapOvr>
+    <a:masterClrMapping/>
+  </p:clrMapOvr>
+</p:sld>
+</file>
+
+<file path=ppt/slides/slide21.xml><?xml version="1.0" encoding="utf-8"?>
+<p:sld xmlns:a="http://schemas.openxmlformats.org/drawingml/2006/main" xmlns:r="http://schemas.openxmlformats.org/officeDocument/2006/relationships" xmlns:p="http://schemas.openxmlformats.org/presentationml/2006/main">
+  <p:cSld name="Slide 21">
+    <p:bg>
+      <p:bgPr>
+        <a:solidFill>
+          <a:srgbClr val="FFFFFF"/>
+        </a:solidFill>
+      </p:bgPr>
+    </p:bg>
+    <p:spTree>
+      <p:nvGrpSpPr>
+        <p:cNvPr id="1" name=""/>
+        <p:cNvGrpSpPr/>
+        <p:nvPr/>
+      </p:nvGrpSpPr>
+      <p:grpSpPr>
+        <a:xfrm>
+          <a:off x="0" y="0"/>
+          <a:ext cx="0" cy="0"/>
+          <a:chOff x="0" y="0"/>
+          <a:chExt cx="0" cy="0"/>
+        </a:xfrm>
+      </p:grpSpPr>
+      <p:sp>
+        <p:nvSpPr>
+          <p:cNvPr id="2" name="Text 0"/>
+          <p:cNvSpPr/>
+          <p:nvPr/>
+        </p:nvSpPr>
+        <p:spPr>
+          <a:xfrm>
+            <a:off x="0" y="0"/>
+            <a:ext cx="9144000" cy="101501"/>
+          </a:xfrm>
+          <a:prstGeom prst="rect">
+            <a:avLst/>
+          </a:prstGeom>
+          <a:solidFill>
+            <a:srgbClr val="277884"/>
+          </a:solidFill>
+          <a:ln/>
+        </p:spPr>
+        <p:txBody>
+          <a:bodyPr wrap="square" rtlCol="0" anchor="ctr"/>
+          <a:lstStyle/>
+          <a:p>
+            <a:pPr indent="0" marL="0">
+              <a:buNone/>
+            </a:pPr>
+            <a:endParaRPr lang="en-US" dirty="0"/>
+          </a:p>
+        </p:txBody>
+      </p:sp>
+      <p:sp>
+        <p:nvSpPr>
+          <p:cNvPr id="3" name="Text 1"/>
+          <p:cNvSpPr/>
+          <p:nvPr/>
+        </p:nvSpPr>
+        <p:spPr>
+          <a:xfrm>
+            <a:off x="406301" y="457051"/>
+            <a:ext cx="8498026" cy="274290"/>
+          </a:xfrm>
+          <a:prstGeom prst="rect">
+            <a:avLst/>
+          </a:prstGeom>
+          <a:noFill/>
+          <a:ln/>
+        </p:spPr>
+        <p:txBody>
+          <a:bodyPr wrap="square" lIns="0" tIns="0" rIns="0" bIns="0" rtlCol="0" anchor="t"/>
+          <a:lstStyle/>
+          <a:p>
+            <a:pPr algn="l" indent="0" marL="0">
+              <a:lnSpc>
+                <a:spcPts val="2160"/>
+              </a:lnSpc>
+              <a:spcBef>
+                <a:spcPts val="600"/>
+              </a:spcBef>
+              <a:spcAft>
+                <a:spcPts val="800"/>
+              </a:spcAft>
+              <a:buNone/>
+            </a:pPr>
+            <a:r>
+              <a:rPr lang="en-US" sz="1800" b="1" dirty="0">
+                <a:solidFill>
+                  <a:srgbClr val="FE4447"/>
+                </a:solidFill>
+                <a:latin typeface="Georgia" pitchFamily="34" charset="0"/>
+                <a:ea typeface="Georgia" pitchFamily="34" charset="-122"/>
+                <a:cs typeface="Georgia" pitchFamily="34" charset="-120"/>
+              </a:rPr>
+              <a:t>Citation(s) used in this lesson</a:t>
+            </a:r>
+            <a:endParaRPr lang="en-US" sz="1800" dirty="0"/>
+          </a:p>
+        </p:txBody>
+      </p:sp>
+      <p:sp>
+        <p:nvSpPr>
+          <p:cNvPr id="4" name="Text 2"/>
+          <p:cNvSpPr/>
+          <p:nvPr/>
+        </p:nvSpPr>
+        <p:spPr>
+          <a:xfrm>
+            <a:off x="634901" y="883593"/>
+            <a:ext cx="8102798" cy="1180802"/>
+          </a:xfrm>
+          <a:prstGeom prst="rect">
+            <a:avLst/>
+          </a:prstGeom>
+          <a:noFill/>
+          <a:ln/>
+        </p:spPr>
+        <p:txBody>
+          <a:bodyPr wrap="square" lIns="0" tIns="0" rIns="0" bIns="0" rtlCol="0" anchor="t"/>
+          <a:lstStyle/>
+          <a:p>
+            <a:pPr algn="l" marL="342900" indent="-342900">
+              <a:lnSpc>
+                <a:spcPts val="1620"/>
+              </a:lnSpc>
+              <a:spcAft>
+                <a:spcPts val="300"/>
+              </a:spcAft>
+              <a:buSzPct val="100000"/>
+              <a:buChar char="•"/>
+            </a:pPr>
+            <a:r>
+              <a:rPr lang="en-US" sz="1200" dirty="0">
+                <a:solidFill>
+                  <a:srgbClr val="1C2833"/>
+                </a:solidFill>
+                <a:latin typeface="Arial" pitchFamily="34" charset="0"/>
+                <a:ea typeface="Arial" pitchFamily="34" charset="-122"/>
+                <a:cs typeface="Arial" pitchFamily="34" charset="-120"/>
+              </a:rPr>
+              <a:t>Gingerol → shogaol dehydration on drying: standard pharmacognosy textbook content.</a:t>
+            </a:r>
+            <a:endParaRPr lang="en-US" sz="1200" dirty="0"/>
+          </a:p>
+          <a:p>
+            <a:pPr algn="l" marL="342900" indent="-342900">
+              <a:lnSpc>
+                <a:spcPts val="1620"/>
+              </a:lnSpc>
+              <a:spcAft>
+                <a:spcPts val="300"/>
+              </a:spcAft>
+              <a:buSzPct val="100000"/>
+              <a:buChar char="•"/>
+            </a:pPr>
+            <a:r>
+              <a:rPr lang="en-US" sz="1200" dirty="0">
+                <a:solidFill>
+                  <a:srgbClr val="1C2833"/>
+                </a:solidFill>
+                <a:latin typeface="Arial" pitchFamily="34" charset="0"/>
+                <a:ea typeface="Arial" pitchFamily="34" charset="-122"/>
+                <a:cs typeface="Arial" pitchFamily="34" charset="-120"/>
+              </a:rPr>
+              <a:t>Ginger as </a:t>
+            </a:r>
+            <a:pPr algn="l" indent="0" marL="0">
+              <a:lnSpc>
+                <a:spcPts val="1620"/>
+              </a:lnSpc>
+              <a:spcAft>
+                <a:spcPts val="300"/>
+              </a:spcAft>
+              <a:buNone/>
+            </a:pPr>
+            <a:r>
+              <a:rPr lang="en-US" sz="1200" i="1" dirty="0">
+                <a:solidFill>
+                  <a:srgbClr val="1C2833"/>
+                </a:solidFill>
+                <a:latin typeface="Arial" pitchFamily="34" charset="0"/>
+                <a:ea typeface="Arial" pitchFamily="34" charset="-122"/>
+                <a:cs typeface="Arial" pitchFamily="34" charset="-120"/>
+              </a:rPr>
+              <a:t>adraka</a:t>
+            </a:r>
+            <a:pPr algn="l" indent="0" marL="0">
+              <a:lnSpc>
+                <a:spcPts val="1620"/>
+              </a:lnSpc>
+              <a:spcAft>
+                <a:spcPts val="300"/>
+              </a:spcAft>
+              <a:buNone/>
+            </a:pPr>
+            <a:r>
+              <a:rPr lang="en-US" sz="1200" dirty="0">
+                <a:solidFill>
+                  <a:srgbClr val="1C2833"/>
+                </a:solidFill>
+                <a:latin typeface="Arial" pitchFamily="34" charset="0"/>
+                <a:ea typeface="Arial" pitchFamily="34" charset="-122"/>
+                <a:cs typeface="Arial" pitchFamily="34" charset="-120"/>
+              </a:rPr>
+              <a:t> (fresh) and </a:t>
+            </a:r>
+            <a:pPr algn="l" indent="0" marL="0">
+              <a:lnSpc>
+                <a:spcPts val="1620"/>
+              </a:lnSpc>
+              <a:spcAft>
+                <a:spcPts val="300"/>
+              </a:spcAft>
+              <a:buNone/>
+            </a:pPr>
+            <a:r>
+              <a:rPr lang="en-US" sz="1200" i="1" dirty="0">
+                <a:solidFill>
+                  <a:srgbClr val="1C2833"/>
+                </a:solidFill>
+                <a:latin typeface="Arial" pitchFamily="34" charset="0"/>
+                <a:ea typeface="Arial" pitchFamily="34" charset="-122"/>
+                <a:cs typeface="Arial" pitchFamily="34" charset="-120"/>
+              </a:rPr>
+              <a:t>sūnṭhī</a:t>
+            </a:r>
+            <a:pPr algn="l" indent="0" marL="0">
+              <a:lnSpc>
+                <a:spcPts val="1620"/>
+              </a:lnSpc>
+              <a:spcAft>
+                <a:spcPts val="300"/>
+              </a:spcAft>
+              <a:buNone/>
+            </a:pPr>
+            <a:r>
+              <a:rPr lang="en-US" sz="1200" dirty="0">
+                <a:solidFill>
+                  <a:srgbClr val="1C2833"/>
+                </a:solidFill>
+                <a:latin typeface="Arial" pitchFamily="34" charset="0"/>
+                <a:ea typeface="Arial" pitchFamily="34" charset="-122"/>
+                <a:cs typeface="Arial" pitchFamily="34" charset="-120"/>
+              </a:rPr>
+              <a:t> (dried) — distinguished in </a:t>
+            </a:r>
+            <a:pPr algn="l" indent="0" marL="0">
+              <a:lnSpc>
+                <a:spcPts val="1620"/>
+              </a:lnSpc>
+              <a:spcAft>
+                <a:spcPts val="300"/>
+              </a:spcAft>
+              <a:buNone/>
+            </a:pPr>
+            <a:r>
+              <a:rPr lang="en-US" sz="1200" i="1" dirty="0">
+                <a:solidFill>
+                  <a:srgbClr val="1C2833"/>
+                </a:solidFill>
+                <a:latin typeface="Arial" pitchFamily="34" charset="0"/>
+                <a:ea typeface="Arial" pitchFamily="34" charset="-122"/>
+                <a:cs typeface="Arial" pitchFamily="34" charset="-120"/>
+              </a:rPr>
+              <a:t>Caraka Saṁhitā</a:t>
+            </a:r>
+            <a:pPr algn="l" indent="0" marL="0">
+              <a:lnSpc>
+                <a:spcPts val="1620"/>
+              </a:lnSpc>
+              <a:spcAft>
+                <a:spcPts val="300"/>
+              </a:spcAft>
+              <a:buNone/>
+            </a:pPr>
+            <a:r>
+              <a:rPr lang="en-US" sz="1200" dirty="0">
+                <a:solidFill>
+                  <a:srgbClr val="1C2833"/>
+                </a:solidFill>
+                <a:latin typeface="Arial" pitchFamily="34" charset="0"/>
+                <a:ea typeface="Arial" pitchFamily="34" charset="-122"/>
+                <a:cs typeface="Arial" pitchFamily="34" charset="-120"/>
+              </a:rPr>
+              <a:t> and standard Ayurvedic nighantus (lexicons). Chapter-level reference only.</a:t>
+            </a:r>
+            <a:endParaRPr lang="en-US" sz="1200" dirty="0"/>
+          </a:p>
+          <a:p>
+            <a:pPr algn="l" marL="342900" indent="-342900">
+              <a:lnSpc>
+                <a:spcPts val="1620"/>
+              </a:lnSpc>
+              <a:spcAft>
+                <a:spcPts val="300"/>
+              </a:spcAft>
+              <a:buSzPct val="100000"/>
+              <a:buChar char="•"/>
+            </a:pPr>
+            <a:r>
+              <a:rPr lang="en-US" sz="1200" dirty="0">
+                <a:solidFill>
+                  <a:srgbClr val="1C2833"/>
+                </a:solidFill>
+                <a:latin typeface="Arial" pitchFamily="34" charset="0"/>
+                <a:ea typeface="Arial" pitchFamily="34" charset="-122"/>
+                <a:cs typeface="Arial" pitchFamily="34" charset="-120"/>
+              </a:rPr>
+              <a:t>Anti-nausea clinical evidence: multiple systematic reviews exist; teachers can search "ginger nausea systematic review" in PubMed.</a:t>
             </a:r>
             <a:endParaRPr lang="en-US" sz="1200" dirty="0"/>
           </a:p>
@@ -3818,7 +8283,7 @@
                 <a:ea typeface="Georgia" pitchFamily="34" charset="-122"/>
                 <a:cs typeface="Georgia" pitchFamily="34" charset="-120"/>
               </a:rPr>
-              <a:t>Vocabulary introduced today</a:t>
+              <a:t>Materials</a:t>
             </a:r>
             <a:endParaRPr lang="en-US" sz="1800" dirty="0"/>
           </a:p>
@@ -3833,7 +8298,7 @@
         <p:spPr>
           <a:xfrm>
             <a:off x="634901" y="883593"/>
-            <a:ext cx="8102798" cy="1218902"/>
+            <a:ext cx="8102798" cy="1257002"/>
           </a:xfrm>
           <a:prstGeom prst="rect">
             <a:avLst/>
@@ -3856,26 +8321,6 @@
               <a:buChar char="•"/>
             </a:pPr>
             <a:r>
-              <a:rPr lang="en-US" sz="1200" i="1" dirty="0">
-                <a:solidFill>
-                  <a:srgbClr val="1C2833"/>
-                </a:solidFill>
-                <a:latin typeface="Arial" pitchFamily="34" charset="0"/>
-                <a:ea typeface="Arial" pitchFamily="34" charset="-122"/>
-                <a:cs typeface="Arial" pitchFamily="34" charset="-120"/>
-              </a:rPr>
-              <a:t>adraka</a:t>
-            </a:r>
-            <a:pPr algn="l" indent="0" marL="0">
-              <a:lnSpc>
-                <a:spcPts val="1620"/>
-              </a:lnSpc>
-              <a:spcAft>
-                <a:spcPts val="300"/>
-              </a:spcAft>
-              <a:buNone/>
-            </a:pPr>
-            <a:r>
               <a:rPr lang="en-US" sz="1200" dirty="0">
                 <a:solidFill>
                   <a:srgbClr val="1C2833"/>
@@ -3884,7 +8329,7 @@
                 <a:ea typeface="Arial" pitchFamily="34" charset="-122"/>
                 <a:cs typeface="Arial" pitchFamily="34" charset="-120"/>
               </a:rPr>
-              <a:t> (IAST: adraka; lit. "ginger") — fresh ginger rhizome.</a:t>
+              <a:t>Fresh ginger rhizome</a:t>
             </a:r>
             <a:endParaRPr lang="en-US" sz="1200" dirty="0"/>
           </a:p>
@@ -3900,6 +8345,26 @@
               <a:buChar char="•"/>
             </a:pPr>
             <a:r>
+              <a:rPr lang="en-US" sz="1200" dirty="0">
+                <a:solidFill>
+                  <a:srgbClr val="1C2833"/>
+                </a:solidFill>
+                <a:latin typeface="Arial" pitchFamily="34" charset="0"/>
+                <a:ea typeface="Arial" pitchFamily="34" charset="-122"/>
+                <a:cs typeface="Arial" pitchFamily="34" charset="-120"/>
+              </a:rPr>
+              <a:t>Small jar of dried ground ginger powder (</a:t>
+            </a:r>
+            <a:pPr algn="l" indent="0" marL="0">
+              <a:lnSpc>
+                <a:spcPts val="1620"/>
+              </a:lnSpc>
+              <a:spcAft>
+                <a:spcPts val="300"/>
+              </a:spcAft>
+              <a:buNone/>
+            </a:pPr>
+            <a:r>
               <a:rPr lang="en-US" sz="1200" i="1" dirty="0">
                 <a:solidFill>
                   <a:srgbClr val="1C2833"/>
@@ -3928,7 +8393,7 @@
                 <a:ea typeface="Arial" pitchFamily="34" charset="-122"/>
                 <a:cs typeface="Arial" pitchFamily="34" charset="-120"/>
               </a:rPr>
-              <a:t> (IAST: sūnṭhī; lit. "dried ginger") — same plant, dried rhizome.</a:t>
+              <a:t>)</a:t>
             </a:r>
             <a:endParaRPr lang="en-US" sz="1200" dirty="0"/>
           </a:p>
@@ -3944,26 +8409,6 @@
               <a:buChar char="•"/>
             </a:pPr>
             <a:r>
-              <a:rPr lang="en-US" sz="1200" b="1" dirty="0">
-                <a:solidFill>
-                  <a:srgbClr val="1C2833"/>
-                </a:solidFill>
-                <a:latin typeface="Arial" pitchFamily="34" charset="0"/>
-                <a:ea typeface="Arial" pitchFamily="34" charset="-122"/>
-                <a:cs typeface="Arial" pitchFamily="34" charset="-120"/>
-              </a:rPr>
-              <a:t>Gingerol</a:t>
-            </a:r>
-            <a:pPr algn="l" indent="0" marL="0">
-              <a:lnSpc>
-                <a:spcPts val="1620"/>
-              </a:lnSpc>
-              <a:spcAft>
-                <a:spcPts val="300"/>
-              </a:spcAft>
-              <a:buNone/>
-            </a:pPr>
-            <a:r>
               <a:rPr lang="en-US" sz="1200" dirty="0">
                 <a:solidFill>
                   <a:srgbClr val="1C2833"/>
@@ -3972,7 +8417,7 @@
                 <a:ea typeface="Arial" pitchFamily="34" charset="-122"/>
                 <a:cs typeface="Arial" pitchFamily="34" charset="-120"/>
               </a:rPr>
-              <a:t> — the principal pungent compound in fresh ginger ([6]-gingerol).</a:t>
+              <a:t>Optional: a thumb-size lump of jaggery for the heating-demo</a:t>
             </a:r>
             <a:endParaRPr lang="en-US" sz="1200" dirty="0"/>
           </a:p>
@@ -3988,24 +8433,28 @@
               <a:buChar char="•"/>
             </a:pPr>
             <a:r>
-              <a:rPr lang="en-US" sz="1200" b="1" dirty="0">
-                <a:solidFill>
-                  <a:srgbClr val="1C2833"/>
-                </a:solidFill>
-                <a:latin typeface="Arial" pitchFamily="34" charset="0"/>
-                <a:ea typeface="Arial" pitchFamily="34" charset="-122"/>
-                <a:cs typeface="Arial" pitchFamily="34" charset="-120"/>
-              </a:rPr>
-              <a:t>Shogaol</a:t>
-            </a:r>
-            <a:pPr algn="l" indent="0" marL="0">
+              <a:rPr lang="en-US" sz="1200" dirty="0">
+                <a:solidFill>
+                  <a:srgbClr val="1C2833"/>
+                </a:solidFill>
+                <a:latin typeface="Arial" pitchFamily="34" charset="0"/>
+                <a:ea typeface="Arial" pitchFamily="34" charset="-122"/>
+                <a:cs typeface="Arial" pitchFamily="34" charset="-120"/>
+              </a:rPr>
+              <a:t>Optional, for demo: a small kettle, ginger slices, water, lemon, jaggery — ginger tea</a:t>
+            </a:r>
+            <a:endParaRPr lang="en-US" sz="1200" dirty="0"/>
+          </a:p>
+          <a:p>
+            <a:pPr algn="l" marL="342900" indent="-342900">
               <a:lnSpc>
                 <a:spcPts val="1620"/>
               </a:lnSpc>
               <a:spcAft>
                 <a:spcPts val="300"/>
               </a:spcAft>
-              <a:buNone/>
+              <a:buSzPct val="100000"/>
+              <a:buChar char="•"/>
             </a:pPr>
             <a:r>
               <a:rPr lang="en-US" sz="1200" dirty="0">
@@ -4016,7 +8465,7 @@
                 <a:ea typeface="Arial" pitchFamily="34" charset="-122"/>
                 <a:cs typeface="Arial" pitchFamily="34" charset="-120"/>
               </a:rPr>
-              <a:t> — formed when gingerol loses a water molecule during drying or heating. More pungent. The dominant pungent compound in dried ginger.</a:t>
+              <a:t>Whiteboard</a:t>
             </a:r>
             <a:endParaRPr lang="en-US" sz="1200" dirty="0"/>
           </a:p>
@@ -4174,7 +8623,7 @@
                 <a:ea typeface="Georgia" pitchFamily="34" charset="-122"/>
                 <a:cs typeface="Georgia" pitchFamily="34" charset="-120"/>
               </a:rPr>
-              <a:t>Lesson flow</a:t>
+              <a:t>Vocabulary introduced today</a:t>
             </a:r>
             <a:endParaRPr lang="en-US" sz="1800" dirty="0"/>
           </a:p>
@@ -4183,6 +8632,204 @@
       <p:sp>
         <p:nvSpPr>
           <p:cNvPr id="4" name="Text 2"/>
+          <p:cNvSpPr/>
+          <p:nvPr/>
+        </p:nvSpPr>
+        <p:spPr>
+          <a:xfrm>
+            <a:off x="634901" y="883593"/>
+            <a:ext cx="8102798" cy="1218902"/>
+          </a:xfrm>
+          <a:prstGeom prst="rect">
+            <a:avLst/>
+          </a:prstGeom>
+          <a:noFill/>
+          <a:ln/>
+        </p:spPr>
+        <p:txBody>
+          <a:bodyPr wrap="square" lIns="0" tIns="0" rIns="0" bIns="0" rtlCol="0" anchor="t"/>
+          <a:lstStyle/>
+          <a:p>
+            <a:pPr algn="l" marL="342900" indent="-342900">
+              <a:lnSpc>
+                <a:spcPts val="1620"/>
+              </a:lnSpc>
+              <a:spcAft>
+                <a:spcPts val="300"/>
+              </a:spcAft>
+              <a:buSzPct val="100000"/>
+              <a:buChar char="•"/>
+            </a:pPr>
+            <a:r>
+              <a:rPr lang="en-US" sz="1200" i="1" dirty="0">
+                <a:solidFill>
+                  <a:srgbClr val="1C2833"/>
+                </a:solidFill>
+                <a:latin typeface="Arial" pitchFamily="34" charset="0"/>
+                <a:ea typeface="Arial" pitchFamily="34" charset="-122"/>
+                <a:cs typeface="Arial" pitchFamily="34" charset="-120"/>
+              </a:rPr>
+              <a:t>adraka</a:t>
+            </a:r>
+            <a:pPr algn="l" indent="0" marL="0">
+              <a:lnSpc>
+                <a:spcPts val="1620"/>
+              </a:lnSpc>
+              <a:spcAft>
+                <a:spcPts val="300"/>
+              </a:spcAft>
+              <a:buNone/>
+            </a:pPr>
+            <a:r>
+              <a:rPr lang="en-US" sz="1200" dirty="0">
+                <a:solidFill>
+                  <a:srgbClr val="1C2833"/>
+                </a:solidFill>
+                <a:latin typeface="Arial" pitchFamily="34" charset="0"/>
+                <a:ea typeface="Arial" pitchFamily="34" charset="-122"/>
+                <a:cs typeface="Arial" pitchFamily="34" charset="-120"/>
+              </a:rPr>
+              <a:t> (IAST: adraka; lit. "ginger") — fresh ginger rhizome.</a:t>
+            </a:r>
+            <a:endParaRPr lang="en-US" sz="1200" dirty="0"/>
+          </a:p>
+          <a:p>
+            <a:pPr algn="l" marL="342900" indent="-342900">
+              <a:lnSpc>
+                <a:spcPts val="1620"/>
+              </a:lnSpc>
+              <a:spcAft>
+                <a:spcPts val="300"/>
+              </a:spcAft>
+              <a:buSzPct val="100000"/>
+              <a:buChar char="•"/>
+            </a:pPr>
+            <a:r>
+              <a:rPr lang="en-US" sz="1200" i="1" dirty="0">
+                <a:solidFill>
+                  <a:srgbClr val="1C2833"/>
+                </a:solidFill>
+                <a:latin typeface="Arial" pitchFamily="34" charset="0"/>
+                <a:ea typeface="Arial" pitchFamily="34" charset="-122"/>
+                <a:cs typeface="Arial" pitchFamily="34" charset="-120"/>
+              </a:rPr>
+              <a:t>sūnṭhī</a:t>
+            </a:r>
+            <a:pPr algn="l" indent="0" marL="0">
+              <a:lnSpc>
+                <a:spcPts val="1620"/>
+              </a:lnSpc>
+              <a:spcAft>
+                <a:spcPts val="300"/>
+              </a:spcAft>
+              <a:buNone/>
+            </a:pPr>
+            <a:r>
+              <a:rPr lang="en-US" sz="1200" dirty="0">
+                <a:solidFill>
+                  <a:srgbClr val="1C2833"/>
+                </a:solidFill>
+                <a:latin typeface="Arial" pitchFamily="34" charset="0"/>
+                <a:ea typeface="Arial" pitchFamily="34" charset="-122"/>
+                <a:cs typeface="Arial" pitchFamily="34" charset="-120"/>
+              </a:rPr>
+              <a:t> (IAST: sūnṭhī; lit. "dried ginger") — same plant, dried rhizome.</a:t>
+            </a:r>
+            <a:endParaRPr lang="en-US" sz="1200" dirty="0"/>
+          </a:p>
+          <a:p>
+            <a:pPr algn="l" marL="342900" indent="-342900">
+              <a:lnSpc>
+                <a:spcPts val="1620"/>
+              </a:lnSpc>
+              <a:spcAft>
+                <a:spcPts val="300"/>
+              </a:spcAft>
+              <a:buSzPct val="100000"/>
+              <a:buChar char="•"/>
+            </a:pPr>
+            <a:r>
+              <a:rPr lang="en-US" sz="1200" b="1" dirty="0">
+                <a:solidFill>
+                  <a:srgbClr val="1C2833"/>
+                </a:solidFill>
+                <a:latin typeface="Arial" pitchFamily="34" charset="0"/>
+                <a:ea typeface="Arial" pitchFamily="34" charset="-122"/>
+                <a:cs typeface="Arial" pitchFamily="34" charset="-120"/>
+              </a:rPr>
+              <a:t>Gingerol</a:t>
+            </a:r>
+            <a:pPr algn="l" indent="0" marL="0">
+              <a:lnSpc>
+                <a:spcPts val="1620"/>
+              </a:lnSpc>
+              <a:spcAft>
+                <a:spcPts val="300"/>
+              </a:spcAft>
+              <a:buNone/>
+            </a:pPr>
+            <a:r>
+              <a:rPr lang="en-US" sz="1200" dirty="0">
+                <a:solidFill>
+                  <a:srgbClr val="1C2833"/>
+                </a:solidFill>
+                <a:latin typeface="Arial" pitchFamily="34" charset="0"/>
+                <a:ea typeface="Arial" pitchFamily="34" charset="-122"/>
+                <a:cs typeface="Arial" pitchFamily="34" charset="-120"/>
+              </a:rPr>
+              <a:t> — the principal pungent compound in fresh ginger ([6]-gingerol).</a:t>
+            </a:r>
+            <a:endParaRPr lang="en-US" sz="1200" dirty="0"/>
+          </a:p>
+          <a:p>
+            <a:pPr algn="l" marL="342900" indent="-342900">
+              <a:lnSpc>
+                <a:spcPts val="1620"/>
+              </a:lnSpc>
+              <a:spcAft>
+                <a:spcPts val="300"/>
+              </a:spcAft>
+              <a:buSzPct val="100000"/>
+              <a:buChar char="•"/>
+            </a:pPr>
+            <a:r>
+              <a:rPr lang="en-US" sz="1200" b="1" dirty="0">
+                <a:solidFill>
+                  <a:srgbClr val="1C2833"/>
+                </a:solidFill>
+                <a:latin typeface="Arial" pitchFamily="34" charset="0"/>
+                <a:ea typeface="Arial" pitchFamily="34" charset="-122"/>
+                <a:cs typeface="Arial" pitchFamily="34" charset="-120"/>
+              </a:rPr>
+              <a:t>Shogaol</a:t>
+            </a:r>
+            <a:pPr algn="l" indent="0" marL="0">
+              <a:lnSpc>
+                <a:spcPts val="1620"/>
+              </a:lnSpc>
+              <a:spcAft>
+                <a:spcPts val="300"/>
+              </a:spcAft>
+              <a:buNone/>
+            </a:pPr>
+            <a:r>
+              <a:rPr lang="en-US" sz="1200" dirty="0">
+                <a:solidFill>
+                  <a:srgbClr val="1C2833"/>
+                </a:solidFill>
+                <a:latin typeface="Arial" pitchFamily="34" charset="0"/>
+                <a:ea typeface="Arial" pitchFamily="34" charset="-122"/>
+                <a:cs typeface="Arial" pitchFamily="34" charset="-120"/>
+              </a:rPr>
+              <a:t> — formed when gingerol loses a water molecule during drying or heating. More pungent. The dominant pungent compound in dried ginger.</a:t>
+            </a:r>
+            <a:endParaRPr lang="en-US" sz="1200" dirty="0"/>
+          </a:p>
+        </p:txBody>
+      </p:sp>
+      <p:sp>
+        <p:nvSpPr>
+          <p:cNvPr id="5" name="Text 3"/>
           <p:cNvSpPr/>
           <p:nvPr/>
         </p:nvSpPr>
@@ -4332,7 +8979,7 @@
                 <a:ea typeface="Georgia" pitchFamily="34" charset="-122"/>
                 <a:cs typeface="Georgia" pitchFamily="34" charset="-120"/>
               </a:rPr>
-              <a:t>Warm-up (5 min)</a:t>
+              <a:t>Lesson flow</a:t>
             </a:r>
             <a:endParaRPr lang="en-US" sz="1800" dirty="0"/>
           </a:p>
@@ -4341,173 +8988,6 @@
       <p:sp>
         <p:nvSpPr>
           <p:cNvPr id="4" name="Text 2"/>
-          <p:cNvSpPr/>
-          <p:nvPr/>
-        </p:nvSpPr>
-        <p:spPr>
-          <a:xfrm>
-            <a:off x="406301" y="870942"/>
-            <a:ext cx="8498026" cy="213271"/>
-          </a:xfrm>
-          <a:prstGeom prst="rect">
-            <a:avLst/>
-          </a:prstGeom>
-          <a:noFill/>
-          <a:ln/>
-        </p:spPr>
-        <p:txBody>
-          <a:bodyPr wrap="square" lIns="0" tIns="0" rIns="0" bIns="0" rtlCol="0" anchor="t"/>
-          <a:lstStyle/>
-          <a:p>
-            <a:pPr algn="l" indent="0" marL="0">
-              <a:lnSpc>
-                <a:spcPts val="1680"/>
-              </a:lnSpc>
-              <a:spcBef>
-                <a:spcPts val="300"/>
-              </a:spcBef>
-              <a:spcAft>
-                <a:spcPts val="300"/>
-              </a:spcAft>
-              <a:buNone/>
-            </a:pPr>
-            <a:r>
-              <a:rPr lang="en-US" sz="1200" dirty="0">
-                <a:solidFill>
-                  <a:srgbClr val="1C2833"/>
-                </a:solidFill>
-                <a:latin typeface="Arial" pitchFamily="34" charset="0"/>
-                <a:ea typeface="Arial" pitchFamily="34" charset="-122"/>
-                <a:cs typeface="Arial" pitchFamily="34" charset="-120"/>
-              </a:rPr>
-              <a:t>Hold up the fresh ginger and the dried ginger powder.</a:t>
-            </a:r>
-            <a:endParaRPr lang="en-US" sz="1200" dirty="0"/>
-          </a:p>
-        </p:txBody>
-      </p:sp>
-      <p:sp>
-        <p:nvSpPr>
-          <p:cNvPr id="5" name="Text 3"/>
-          <p:cNvSpPr/>
-          <p:nvPr/>
-        </p:nvSpPr>
-        <p:spPr>
-          <a:xfrm>
-            <a:off x="406301" y="1160413"/>
-            <a:ext cx="8498026" cy="213271"/>
-          </a:xfrm>
-          <a:prstGeom prst="rect">
-            <a:avLst/>
-          </a:prstGeom>
-          <a:noFill/>
-          <a:ln/>
-        </p:spPr>
-        <p:txBody>
-          <a:bodyPr wrap="square" lIns="0" tIns="0" rIns="0" bIns="0" rtlCol="0" anchor="t"/>
-          <a:lstStyle/>
-          <a:p>
-            <a:pPr algn="l" indent="0" marL="0">
-              <a:lnSpc>
-                <a:spcPts val="1680"/>
-              </a:lnSpc>
-              <a:spcBef>
-                <a:spcPts val="300"/>
-              </a:spcBef>
-              <a:spcAft>
-                <a:spcPts val="300"/>
-              </a:spcAft>
-              <a:buNone/>
-            </a:pPr>
-            <a:r>
-              <a:rPr lang="en-US" sz="1200" i="1" dirty="0">
-                <a:solidFill>
-                  <a:srgbClr val="1C2833"/>
-                </a:solidFill>
-                <a:latin typeface="Arial" pitchFamily="34" charset="0"/>
-                <a:ea typeface="Arial" pitchFamily="34" charset="-122"/>
-                <a:cs typeface="Arial" pitchFamily="34" charset="-120"/>
-              </a:rPr>
-              <a:t>"Same plant. Same rhizome. One fresh, one dried. Which one will be more pungent?"</a:t>
-            </a:r>
-            <a:pPr algn="l" indent="0" marL="0">
-              <a:lnSpc>
-                <a:spcPts val="1680"/>
-              </a:lnSpc>
-              <a:spcBef>
-                <a:spcPts val="300"/>
-              </a:spcBef>
-              <a:spcAft>
-                <a:spcPts val="300"/>
-              </a:spcAft>
-              <a:buNone/>
-            </a:pPr>
-            <a:r>
-              <a:rPr lang="en-US" sz="1200" dirty="0">
-                <a:solidFill>
-                  <a:srgbClr val="1C2833"/>
-                </a:solidFill>
-                <a:latin typeface="Arial" pitchFamily="34" charset="0"/>
-                <a:ea typeface="Arial" pitchFamily="34" charset="-122"/>
-                <a:cs typeface="Arial" pitchFamily="34" charset="-120"/>
-              </a:rPr>
-              <a:t> Take a vote.</a:t>
-            </a:r>
-            <a:endParaRPr lang="en-US" sz="1200" dirty="0"/>
-          </a:p>
-        </p:txBody>
-      </p:sp>
-      <p:sp>
-        <p:nvSpPr>
-          <p:cNvPr id="6" name="Text 4"/>
-          <p:cNvSpPr/>
-          <p:nvPr/>
-        </p:nvSpPr>
-        <p:spPr>
-          <a:xfrm>
-            <a:off x="406301" y="1449884"/>
-            <a:ext cx="8498026" cy="213271"/>
-          </a:xfrm>
-          <a:prstGeom prst="rect">
-            <a:avLst/>
-          </a:prstGeom>
-          <a:noFill/>
-          <a:ln/>
-        </p:spPr>
-        <p:txBody>
-          <a:bodyPr wrap="square" lIns="0" tIns="0" rIns="0" bIns="0" rtlCol="0" anchor="t"/>
-          <a:lstStyle/>
-          <a:p>
-            <a:pPr algn="l" indent="0" marL="0">
-              <a:lnSpc>
-                <a:spcPts val="1680"/>
-              </a:lnSpc>
-              <a:spcBef>
-                <a:spcPts val="300"/>
-              </a:spcBef>
-              <a:spcAft>
-                <a:spcPts val="300"/>
-              </a:spcAft>
-              <a:buNone/>
-            </a:pPr>
-            <a:r>
-              <a:rPr lang="en-US" sz="1200" dirty="0">
-                <a:solidFill>
-                  <a:srgbClr val="1C2833"/>
-                </a:solidFill>
-                <a:latin typeface="Arial" pitchFamily="34" charset="0"/>
-                <a:ea typeface="Arial" pitchFamily="34" charset="-122"/>
-                <a:cs typeface="Arial" pitchFamily="34" charset="-120"/>
-              </a:rPr>
-              <a:t>Pass tiny crumb of dried ginger and a tiny shaving of fresh ginger to each student (separate plates). Smell only. Discuss.</a:t>
-            </a:r>
-            <a:endParaRPr lang="en-US" sz="1200" dirty="0"/>
-          </a:p>
-        </p:txBody>
-      </p:sp>
-      <p:sp>
-        <p:nvSpPr>
-          <p:cNvPr id="7" name="Text 5"/>
           <p:cNvSpPr/>
           <p:nvPr/>
         </p:nvSpPr>
@@ -4657,7 +9137,7 @@
                 <a:ea typeface="Georgia" pitchFamily="34" charset="-122"/>
                 <a:cs typeface="Georgia" pitchFamily="34" charset="-120"/>
               </a:rPr>
-              <a:t>Activity (15 min) — Ginger tea demo + Formative Quiz Part B</a:t>
+              <a:t>Warm-up (5 min)</a:t>
             </a:r>
             <a:endParaRPr lang="en-US" sz="1800" dirty="0"/>
           </a:p>
@@ -4672,7 +9152,7 @@
         <p:spPr>
           <a:xfrm>
             <a:off x="406301" y="870942"/>
-            <a:ext cx="8498026" cy="1066354"/>
+            <a:ext cx="8498026" cy="213271"/>
           </a:xfrm>
           <a:prstGeom prst="rect">
             <a:avLst/>
@@ -4697,29 +9177,6 @@
               <a:buNone/>
             </a:pPr>
             <a:r>
-              <a:rPr lang="en-US" sz="1200" b="1" dirty="0">
-                <a:solidFill>
-                  <a:srgbClr val="1C2833"/>
-                </a:solidFill>
-                <a:latin typeface="Arial" pitchFamily="34" charset="0"/>
-                <a:ea typeface="Arial" pitchFamily="34" charset="-122"/>
-                <a:cs typeface="Arial" pitchFamily="34" charset="-120"/>
-              </a:rPr>
-              <a:t>First 7 min — Tea demo:</a:t>
-            </a:r>
-            <a:pPr algn="l" indent="0" marL="0">
-              <a:lnSpc>
-                <a:spcPts val="1680"/>
-              </a:lnSpc>
-              <a:spcBef>
-                <a:spcPts val="300"/>
-              </a:spcBef>
-              <a:spcAft>
-                <a:spcPts val="300"/>
-              </a:spcAft>
-              <a:buNone/>
-            </a:pPr>
-            <a:r>
               <a:rPr lang="en-US" sz="1200" dirty="0">
                 <a:solidFill>
                   <a:srgbClr val="1C2833"/>
@@ -4728,7 +9185,7 @@
                 <a:ea typeface="Arial" pitchFamily="34" charset="-122"/>
                 <a:cs typeface="Arial" pitchFamily="34" charset="-120"/>
               </a:rPr>
-              <a:t> – Teacher slices a 1 cm piece of fresh ginger, drops into 200 ml hot water, lets steep 3–4 minutes. – Optional: add a tiny pinch of jaggery and a drop of lemon. – Pour into a clear cup. Pass around so students can see the colour (very pale yellow) and smell the aroma (sharp, pungent, citrus-warm). – Discussion: which compound dominates here — gingerol or shogaol? (Since the ginger is fresh and only briefly heated: mostly gingerol.) If the ginger had been dried first and then steeped: more shogaol.</a:t>
+              <a:t>Hold up the fresh ginger and the dried ginger powder.</a:t>
             </a:r>
             <a:endParaRPr lang="en-US" sz="1200" dirty="0"/>
           </a:p>
@@ -4742,8 +9199,8 @@
         </p:nvSpPr>
         <p:spPr>
           <a:xfrm>
-            <a:off x="406301" y="2013496"/>
-            <a:ext cx="8498026" cy="436066"/>
+            <a:off x="406301" y="1160413"/>
+            <a:ext cx="8498026" cy="213271"/>
           </a:xfrm>
           <a:prstGeom prst="rect">
             <a:avLst/>
@@ -4768,15 +9225,15 @@
               <a:buNone/>
             </a:pPr>
             <a:r>
-              <a:rPr lang="en-US" sz="1200" b="1" dirty="0">
-                <a:solidFill>
-                  <a:srgbClr val="1C2833"/>
-                </a:solidFill>
-                <a:latin typeface="Arial" pitchFamily="34" charset="0"/>
-                <a:ea typeface="Arial" pitchFamily="34" charset="-122"/>
-                <a:cs typeface="Arial" pitchFamily="34" charset="-120"/>
-              </a:rPr>
-              <a:t>Next 8 min — Formative Quiz Part B</a:t>
+              <a:rPr lang="en-US" sz="1200" i="1" dirty="0">
+                <a:solidFill>
+                  <a:srgbClr val="1C2833"/>
+                </a:solidFill>
+                <a:latin typeface="Arial" pitchFamily="34" charset="0"/>
+                <a:ea typeface="Arial" pitchFamily="34" charset="-122"/>
+                <a:cs typeface="Arial" pitchFamily="34" charset="-120"/>
+              </a:rPr>
+              <a:t>"Same plant. Same rhizome. One fresh, one dried. Which one will be more pungent?"</a:t>
             </a:r>
             <a:pPr algn="l" indent="0" marL="0">
               <a:lnSpc>
@@ -4799,8 +9256,33 @@
                 <a:ea typeface="Arial" pitchFamily="34" charset="-122"/>
                 <a:cs typeface="Arial" pitchFamily="34" charset="-120"/>
               </a:rPr>
-              <a:t> (from </a:t>
-            </a:r>
+              <a:t> Take a vote.</a:t>
+            </a:r>
+            <a:endParaRPr lang="en-US" sz="1200" dirty="0"/>
+          </a:p>
+        </p:txBody>
+      </p:sp>
+      <p:sp>
+        <p:nvSpPr>
+          <p:cNvPr id="6" name="Text 4"/>
+          <p:cNvSpPr/>
+          <p:nvPr/>
+        </p:nvSpPr>
+        <p:spPr>
+          <a:xfrm>
+            <a:off x="406301" y="1449884"/>
+            <a:ext cx="8498026" cy="213271"/>
+          </a:xfrm>
+          <a:prstGeom prst="rect">
+            <a:avLst/>
+          </a:prstGeom>
+          <a:noFill/>
+          <a:ln/>
+        </p:spPr>
+        <p:txBody>
+          <a:bodyPr wrap="square" lIns="0" tIns="0" rIns="0" bIns="0" rtlCol="0" anchor="t"/>
+          <a:lstStyle/>
+          <a:p>
             <a:pPr algn="l" indent="0" marL="0">
               <a:lnSpc>
                 <a:spcPts val="1680"/>
@@ -4822,30 +9304,7 @@
                 <a:ea typeface="Arial" pitchFamily="34" charset="-122"/>
                 <a:cs typeface="Arial" pitchFamily="34" charset="-120"/>
               </a:rPr>
-              <a:t>quizzes/formative.md</a:t>
-            </a:r>
-            <a:pPr algn="l" indent="0" marL="0">
-              <a:lnSpc>
-                <a:spcPts val="1680"/>
-              </a:lnSpc>
-              <a:spcBef>
-                <a:spcPts val="300"/>
-              </a:spcBef>
-              <a:spcAft>
-                <a:spcPts val="300"/>
-              </a:spcAft>
-              <a:buNone/>
-            </a:pPr>
-            <a:r>
-              <a:rPr lang="en-US" sz="1200" dirty="0">
-                <a:solidFill>
-                  <a:srgbClr val="1C2833"/>
-                </a:solidFill>
-                <a:latin typeface="Arial" pitchFamily="34" charset="0"/>
-                <a:ea typeface="Arial" pitchFamily="34" charset="-122"/>
-                <a:cs typeface="Arial" pitchFamily="34" charset="-120"/>
-              </a:rPr>
-              <a:t>). Hand out the 10-question slip. Pencils only. Collect at end of class.</a:t>
+              <a:t>Pass tiny crumb of dried ginger and a tiny shaving of fresh ginger to each student (separate plates). Smell only. Discuss.</a:t>
             </a:r>
             <a:endParaRPr lang="en-US" sz="1200" dirty="0"/>
           </a:p>
@@ -4853,7 +9312,7 @@
       </p:sp>
       <p:sp>
         <p:nvSpPr>
-          <p:cNvPr id="6" name="Text 4"/>
+          <p:cNvPr id="7" name="Text 5"/>
           <p:cNvSpPr/>
           <p:nvPr/>
         </p:nvSpPr>
@@ -5003,7 +9462,7 @@
                 <a:ea typeface="Georgia" pitchFamily="34" charset="-122"/>
                 <a:cs typeface="Georgia" pitchFamily="34" charset="-120"/>
               </a:rPr>
-              <a:t>Wrap-up (5 min)</a:t>
+              <a:t>Core (20 min)</a:t>
             </a:r>
             <a:endParaRPr lang="en-US" sz="1800" dirty="0"/>
           </a:p>
@@ -5017,8 +9476,8 @@
         </p:nvSpPr>
         <p:spPr>
           <a:xfrm>
-            <a:off x="406301" y="870942"/>
-            <a:ext cx="8498026" cy="426541"/>
+            <a:off x="634901" y="883593"/>
+            <a:ext cx="8102798" cy="487561"/>
           </a:xfrm>
           <a:prstGeom prst="rect">
             <a:avLst/>
@@ -5030,13 +9489,31 @@
           <a:bodyPr wrap="square" lIns="0" tIns="0" rIns="0" bIns="0" rtlCol="0" anchor="t"/>
           <a:lstStyle/>
           <a:p>
-            <a:pPr algn="l" indent="0" marL="0">
-              <a:lnSpc>
-                <a:spcPts val="1680"/>
-              </a:lnSpc>
-              <a:spcBef>
-                <a:spcPts val="300"/>
-              </a:spcBef>
+            <a:pPr algn="l" marL="342900" indent="-342900">
+              <a:lnSpc>
+                <a:spcPts val="1620"/>
+              </a:lnSpc>
+              <a:spcAft>
+                <a:spcPts val="300"/>
+              </a:spcAft>
+              <a:buSzPct val="100000"/>
+              <a:buChar char="•"/>
+            </a:pPr>
+            <a:r>
+              <a:rPr lang="en-US" sz="1200" b="1" dirty="0">
+                <a:solidFill>
+                  <a:srgbClr val="1C2833"/>
+                </a:solidFill>
+                <a:latin typeface="Arial" pitchFamily="34" charset="0"/>
+                <a:ea typeface="Arial" pitchFamily="34" charset="-122"/>
+                <a:cs typeface="Arial" pitchFamily="34" charset="-120"/>
+              </a:rPr>
+              <a:t>Identify it.</a:t>
+            </a:r>
+            <a:pPr algn="l" indent="0" marL="0">
+              <a:lnSpc>
+                <a:spcPts val="1620"/>
+              </a:lnSpc>
               <a:spcAft>
                 <a:spcPts val="300"/>
               </a:spcAft>
@@ -5051,38 +9528,32 @@
                 <a:ea typeface="Arial" pitchFamily="34" charset="-122"/>
                 <a:cs typeface="Arial" pitchFamily="34" charset="-120"/>
               </a:rPr>
-              <a:t>– Restate safety rule + the anti-nausea note ("ginger has more clinical evidence than most herbs, but for </a:t>
-            </a:r>
-            <a:pPr algn="l" indent="0" marL="0">
-              <a:lnSpc>
-                <a:spcPts val="1680"/>
-              </a:lnSpc>
-              <a:spcBef>
-                <a:spcPts val="300"/>
-              </a:spcBef>
-              <a:spcAft>
-                <a:spcPts val="300"/>
-              </a:spcAft>
-              <a:buNone/>
-            </a:pPr>
-            <a:r>
-              <a:rPr lang="en-US" sz="1200" i="1" dirty="0">
-                <a:solidFill>
-                  <a:srgbClr val="1C2833"/>
-                </a:solidFill>
-                <a:latin typeface="Arial" pitchFamily="34" charset="0"/>
-                <a:ea typeface="Arial" pitchFamily="34" charset="-122"/>
-                <a:cs typeface="Arial" pitchFamily="34" charset="-120"/>
-              </a:rPr>
-              <a:t>specific</a:t>
-            </a:r>
-            <a:pPr algn="l" indent="0" marL="0">
-              <a:lnSpc>
-                <a:spcPts val="1680"/>
-              </a:lnSpc>
-              <a:spcBef>
-                <a:spcPts val="300"/>
-              </a:spcBef>
+              <a:t> Like turmeric, ginger is a </a:t>
+            </a:r>
+            <a:pPr algn="l" indent="0" marL="0">
+              <a:lnSpc>
+                <a:spcPts val="1620"/>
+              </a:lnSpc>
+              <a:spcAft>
+                <a:spcPts val="300"/>
+              </a:spcAft>
+              <a:buNone/>
+            </a:pPr>
+            <a:r>
+              <a:rPr lang="en-US" sz="1200" b="1" dirty="0">
+                <a:solidFill>
+                  <a:srgbClr val="1C2833"/>
+                </a:solidFill>
+                <a:latin typeface="Arial" pitchFamily="34" charset="0"/>
+                <a:ea typeface="Arial" pitchFamily="34" charset="-122"/>
+                <a:cs typeface="Arial" pitchFamily="34" charset="-120"/>
+              </a:rPr>
+              <a:t>rhizome</a:t>
+            </a:r>
+            <a:pPr algn="l" indent="0" marL="0">
+              <a:lnSpc>
+                <a:spcPts val="1620"/>
+              </a:lnSpc>
               <a:spcAft>
                 <a:spcPts val="300"/>
               </a:spcAft>
@@ -5097,30 +9568,7 @@
                 <a:ea typeface="Arial" pitchFamily="34" charset="-122"/>
                 <a:cs typeface="Arial" pitchFamily="34" charset="-120"/>
               </a:rPr>
-              <a:t> uses"). – Preview Day 6: </a:t>
-            </a:r>
-            <a:pPr algn="l" indent="0" marL="0">
-              <a:lnSpc>
-                <a:spcPts val="1680"/>
-              </a:lnSpc>
-              <a:spcBef>
-                <a:spcPts val="300"/>
-              </a:spcBef>
-              <a:spcAft>
-                <a:spcPts val="300"/>
-              </a:spcAft>
-              <a:buNone/>
-            </a:pPr>
-            <a:r>
-              <a:rPr lang="en-US" sz="1200" i="1" dirty="0">
-                <a:solidFill>
-                  <a:srgbClr val="1C2833"/>
-                </a:solidFill>
-                <a:latin typeface="Arial" pitchFamily="34" charset="0"/>
-                <a:ea typeface="Arial" pitchFamily="34" charset="-122"/>
-                <a:cs typeface="Arial" pitchFamily="34" charset="-120"/>
-              </a:rPr>
-              <a:t>"Tomorrow we meet a seed that takes the digestive role even further — ajwain."</a:t>
+              <a:t> — underground stem. The two plants are related (same family: Zingiberaceae). Differences:</a:t>
             </a:r>
             <a:endParaRPr lang="en-US" sz="1200" dirty="0"/>
           </a:p>
@@ -5129,6 +9577,160 @@
       <p:sp>
         <p:nvSpPr>
           <p:cNvPr id="5" name="Text 3"/>
+          <p:cNvSpPr/>
+          <p:nvPr/>
+        </p:nvSpPr>
+        <p:spPr>
+          <a:xfrm>
+            <a:off x="634901" y="1472654"/>
+            <a:ext cx="8102798" cy="769441"/>
+          </a:xfrm>
+          <a:prstGeom prst="rect">
+            <a:avLst/>
+          </a:prstGeom>
+          <a:noFill/>
+          <a:ln/>
+        </p:spPr>
+        <p:txBody>
+          <a:bodyPr wrap="square" lIns="0" tIns="0" rIns="0" bIns="0" rtlCol="0" anchor="t"/>
+          <a:lstStyle/>
+          <a:p>
+            <a:pPr algn="l" marL="342900" indent="-342900">
+              <a:lnSpc>
+                <a:spcPts val="1620"/>
+              </a:lnSpc>
+              <a:spcAft>
+                <a:spcPts val="300"/>
+              </a:spcAft>
+              <a:buSzPct val="100000"/>
+              <a:buChar char="•"/>
+            </a:pPr>
+            <a:r>
+              <a:rPr lang="en-US" sz="1200" b="1" dirty="0">
+                <a:solidFill>
+                  <a:srgbClr val="1C2833"/>
+                </a:solidFill>
+                <a:latin typeface="Arial" pitchFamily="34" charset="0"/>
+                <a:ea typeface="Arial" pitchFamily="34" charset="-122"/>
+                <a:cs typeface="Arial" pitchFamily="34" charset="-120"/>
+              </a:rPr>
+              <a:t>Ginger:</a:t>
+            </a:r>
+            <a:pPr algn="l" indent="0" marL="0">
+              <a:lnSpc>
+                <a:spcPts val="1620"/>
+              </a:lnSpc>
+              <a:spcAft>
+                <a:spcPts val="300"/>
+              </a:spcAft>
+              <a:buNone/>
+            </a:pPr>
+            <a:r>
+              <a:rPr lang="en-US" sz="1200" dirty="0">
+                <a:solidFill>
+                  <a:srgbClr val="1C2833"/>
+                </a:solidFill>
+                <a:latin typeface="Arial" pitchFamily="34" charset="0"/>
+                <a:ea typeface="Arial" pitchFamily="34" charset="-122"/>
+                <a:cs typeface="Arial" pitchFamily="34" charset="-120"/>
+              </a:rPr>
+              <a:t> pale tan skin; pale yellow-white interior; spicy-pungent smell.</a:t>
+            </a:r>
+            <a:endParaRPr lang="en-US" sz="1200" dirty="0"/>
+          </a:p>
+          <a:p>
+            <a:pPr algn="l" marL="342900" indent="-342900">
+              <a:lnSpc>
+                <a:spcPts val="1620"/>
+              </a:lnSpc>
+              <a:spcAft>
+                <a:spcPts val="300"/>
+              </a:spcAft>
+              <a:buSzPct val="100000"/>
+              <a:buChar char="•"/>
+            </a:pPr>
+            <a:r>
+              <a:rPr lang="en-US" sz="1200" b="1" dirty="0">
+                <a:solidFill>
+                  <a:srgbClr val="1C2833"/>
+                </a:solidFill>
+                <a:latin typeface="Arial" pitchFamily="34" charset="0"/>
+                <a:ea typeface="Arial" pitchFamily="34" charset="-122"/>
+                <a:cs typeface="Arial" pitchFamily="34" charset="-120"/>
+              </a:rPr>
+              <a:t>Turmeric:</a:t>
+            </a:r>
+            <a:pPr algn="l" indent="0" marL="0">
+              <a:lnSpc>
+                <a:spcPts val="1620"/>
+              </a:lnSpc>
+              <a:spcAft>
+                <a:spcPts val="300"/>
+              </a:spcAft>
+              <a:buNone/>
+            </a:pPr>
+            <a:r>
+              <a:rPr lang="en-US" sz="1200" dirty="0">
+                <a:solidFill>
+                  <a:srgbClr val="1C2833"/>
+                </a:solidFill>
+                <a:latin typeface="Arial" pitchFamily="34" charset="0"/>
+                <a:ea typeface="Arial" pitchFamily="34" charset="-122"/>
+                <a:cs typeface="Arial" pitchFamily="34" charset="-120"/>
+              </a:rPr>
+              <a:t> pale brown skin; bright orange interior; earthy-pepper smell.</a:t>
+            </a:r>
+            <a:endParaRPr lang="en-US" sz="1200" dirty="0"/>
+          </a:p>
+          <a:p>
+            <a:pPr algn="l" marL="342900" indent="-342900">
+              <a:lnSpc>
+                <a:spcPts val="1620"/>
+              </a:lnSpc>
+              <a:spcAft>
+                <a:spcPts val="300"/>
+              </a:spcAft>
+              <a:buSzPct val="100000"/>
+              <a:buChar char="•"/>
+            </a:pPr>
+            <a:r>
+              <a:rPr lang="en-US" sz="1200" b="1" dirty="0">
+                <a:solidFill>
+                  <a:srgbClr val="1C2833"/>
+                </a:solidFill>
+                <a:latin typeface="Arial" pitchFamily="34" charset="0"/>
+                <a:ea typeface="Arial" pitchFamily="34" charset="-122"/>
+                <a:cs typeface="Arial" pitchFamily="34" charset="-120"/>
+              </a:rPr>
+              <a:t>Leaves above ground:</a:t>
+            </a:r>
+            <a:pPr algn="l" indent="0" marL="0">
+              <a:lnSpc>
+                <a:spcPts val="1620"/>
+              </a:lnSpc>
+              <a:spcAft>
+                <a:spcPts val="300"/>
+              </a:spcAft>
+              <a:buNone/>
+            </a:pPr>
+            <a:r>
+              <a:rPr lang="en-US" sz="1200" dirty="0">
+                <a:solidFill>
+                  <a:srgbClr val="1C2833"/>
+                </a:solidFill>
+                <a:latin typeface="Arial" pitchFamily="34" charset="0"/>
+                <a:ea typeface="Arial" pitchFamily="34" charset="-122"/>
+                <a:cs typeface="Arial" pitchFamily="34" charset="-120"/>
+              </a:rPr>
+              <a:t> very similar — long, blade-like, alternating up a stem.</a:t>
+            </a:r>
+            <a:endParaRPr lang="en-US" sz="1200" dirty="0"/>
+          </a:p>
+        </p:txBody>
+      </p:sp>
+      <p:sp>
+        <p:nvSpPr>
+          <p:cNvPr id="6" name="Text 4"/>
           <p:cNvSpPr/>
           <p:nvPr/>
         </p:nvSpPr>
@@ -5278,7 +9880,7 @@
                 <a:ea typeface="Georgia" pitchFamily="34" charset="-122"/>
                 <a:cs typeface="Georgia" pitchFamily="34" charset="-120"/>
               </a:rPr>
-              <a:t>Student-facing content</a:t>
+              <a:t>Core (20 min) (cont.)</a:t>
             </a:r>
             <a:endParaRPr lang="en-US" sz="1800" dirty="0"/>
           </a:p>
@@ -5292,50 +9894,401 @@
         </p:nvSpPr>
         <p:spPr>
           <a:xfrm>
-            <a:off x="406301" y="883593"/>
-            <a:ext cx="8331398" cy="3419475"/>
-          </a:xfrm>
-          <a:prstGeom prst="rect">
-            <a:avLst/>
-          </a:prstGeom>
-          <a:solidFill>
-            <a:srgbClr val="F4F8F9"/>
-          </a:solidFill>
+            <a:off x="634901" y="883593"/>
+            <a:ext cx="8102798" cy="281880"/>
+          </a:xfrm>
+          <a:prstGeom prst="rect">
+            <a:avLst/>
+          </a:prstGeom>
+          <a:noFill/>
           <a:ln/>
         </p:spPr>
         <p:txBody>
-          <a:bodyPr wrap="square" rtlCol="0" anchor="ctr"/>
-          <a:lstStyle/>
-          <a:p>
-            <a:pPr indent="0" marL="0">
-              <a:buNone/>
-            </a:pPr>
-            <a:endParaRPr lang="en-US" dirty="0"/>
-          </a:p>
-        </p:txBody>
-      </p:sp>
-      <p:sp>
-        <p:nvSpPr>
-          <p:cNvPr id="5" name="Shape 3"/>
+          <a:bodyPr wrap="square" lIns="0" tIns="0" rIns="0" bIns="0" rtlCol="0" anchor="t"/>
+          <a:lstStyle/>
+          <a:p>
+            <a:pPr algn="l" marL="342900" indent="-342900">
+              <a:lnSpc>
+                <a:spcPts val="1620"/>
+              </a:lnSpc>
+              <a:spcAft>
+                <a:spcPts val="300"/>
+              </a:spcAft>
+              <a:buSzPct val="100000"/>
+              <a:buChar char="•"/>
+            </a:pPr>
+            <a:r>
+              <a:rPr lang="en-US" sz="1200" b="1" dirty="0">
+                <a:solidFill>
+                  <a:srgbClr val="1C2833"/>
+                </a:solidFill>
+                <a:latin typeface="Arial" pitchFamily="34" charset="0"/>
+                <a:ea typeface="Arial" pitchFamily="34" charset="-122"/>
+                <a:cs typeface="Arial" pitchFamily="34" charset="-120"/>
+              </a:rPr>
+              <a:t>The fresh-vs-dried switch.</a:t>
+            </a:r>
+            <a:pPr algn="l" indent="0" marL="0">
+              <a:lnSpc>
+                <a:spcPts val="1620"/>
+              </a:lnSpc>
+              <a:spcAft>
+                <a:spcPts val="300"/>
+              </a:spcAft>
+              <a:buNone/>
+            </a:pPr>
+            <a:r>
+              <a:rPr lang="en-US" sz="1200" dirty="0">
+                <a:solidFill>
+                  <a:srgbClr val="1C2833"/>
+                </a:solidFill>
+                <a:latin typeface="Arial" pitchFamily="34" charset="0"/>
+                <a:ea typeface="Arial" pitchFamily="34" charset="-122"/>
+                <a:cs typeface="Arial" pitchFamily="34" charset="-120"/>
+              </a:rPr>
+              <a:t> This is the chemistry of the day.</a:t>
+            </a:r>
+            <a:endParaRPr lang="en-US" sz="1200" dirty="0"/>
+          </a:p>
+        </p:txBody>
+      </p:sp>
+      <p:sp>
+        <p:nvSpPr>
+          <p:cNvPr id="5" name="Text 3"/>
           <p:cNvSpPr/>
           <p:nvPr/>
         </p:nvSpPr>
         <p:spPr>
           <a:xfrm>
-            <a:off x="434876" y="883593"/>
-            <a:ext cx="0" cy="3419475"/>
-          </a:xfrm>
-          <a:prstGeom prst="line">
+            <a:off x="634901" y="1266974"/>
+            <a:ext cx="8102798" cy="1630263"/>
+          </a:xfrm>
+          <a:prstGeom prst="rect">
             <a:avLst/>
           </a:prstGeom>
           <a:noFill/>
-          <a:ln w="57150">
-            <a:solidFill>
-              <a:srgbClr val="FE4447"/>
-            </a:solidFill>
-            <a:prstDash val="solid"/>
-          </a:ln>
-        </p:spPr>
+          <a:ln/>
+        </p:spPr>
+        <p:txBody>
+          <a:bodyPr wrap="square" lIns="0" tIns="0" rIns="0" bIns="0" rtlCol="0" anchor="t"/>
+          <a:lstStyle/>
+          <a:p>
+            <a:pPr algn="l" marL="342900" indent="-342900">
+              <a:lnSpc>
+                <a:spcPts val="1620"/>
+              </a:lnSpc>
+              <a:spcAft>
+                <a:spcPts val="300"/>
+              </a:spcAft>
+              <a:buSzPct val="100000"/>
+              <a:buChar char="•"/>
+            </a:pPr>
+            <a:r>
+              <a:rPr lang="en-US" sz="1200" b="1" dirty="0">
+                <a:solidFill>
+                  <a:srgbClr val="1C2833"/>
+                </a:solidFill>
+                <a:latin typeface="Arial" pitchFamily="34" charset="0"/>
+                <a:ea typeface="Arial" pitchFamily="34" charset="-122"/>
+                <a:cs typeface="Arial" pitchFamily="34" charset="-120"/>
+              </a:rPr>
+              <a:t>Fresh ginger</a:t>
+            </a:r>
+            <a:pPr algn="l" indent="0" marL="0">
+              <a:lnSpc>
+                <a:spcPts val="1620"/>
+              </a:lnSpc>
+              <a:spcAft>
+                <a:spcPts val="300"/>
+              </a:spcAft>
+              <a:buNone/>
+            </a:pPr>
+            <a:r>
+              <a:rPr lang="en-US" sz="1200" dirty="0">
+                <a:solidFill>
+                  <a:srgbClr val="1C2833"/>
+                </a:solidFill>
+                <a:latin typeface="Arial" pitchFamily="34" charset="0"/>
+                <a:ea typeface="Arial" pitchFamily="34" charset="-122"/>
+                <a:cs typeface="Arial" pitchFamily="34" charset="-120"/>
+              </a:rPr>
+              <a:t> is dominated by </a:t>
+            </a:r>
+            <a:pPr algn="l" indent="0" marL="0">
+              <a:lnSpc>
+                <a:spcPts val="1620"/>
+              </a:lnSpc>
+              <a:spcAft>
+                <a:spcPts val="300"/>
+              </a:spcAft>
+              <a:buNone/>
+            </a:pPr>
+            <a:r>
+              <a:rPr lang="en-US" sz="1200" b="1" dirty="0">
+                <a:solidFill>
+                  <a:srgbClr val="1C2833"/>
+                </a:solidFill>
+                <a:latin typeface="Arial" pitchFamily="34" charset="0"/>
+                <a:ea typeface="Arial" pitchFamily="34" charset="-122"/>
+                <a:cs typeface="Arial" pitchFamily="34" charset="-120"/>
+              </a:rPr>
+              <a:t>[6]-gingerol</a:t>
+            </a:r>
+            <a:pPr algn="l" indent="0" marL="0">
+              <a:lnSpc>
+                <a:spcPts val="1620"/>
+              </a:lnSpc>
+              <a:spcAft>
+                <a:spcPts val="300"/>
+              </a:spcAft>
+              <a:buNone/>
+            </a:pPr>
+            <a:r>
+              <a:rPr lang="en-US" sz="1200" dirty="0">
+                <a:solidFill>
+                  <a:srgbClr val="1C2833"/>
+                </a:solidFill>
+                <a:latin typeface="Arial" pitchFamily="34" charset="0"/>
+                <a:ea typeface="Arial" pitchFamily="34" charset="-122"/>
+                <a:cs typeface="Arial" pitchFamily="34" charset="-120"/>
+              </a:rPr>
+              <a:t> — a phenolic compound with a long carbon side-chain ending in a hydroxyl (–OH).</a:t>
+            </a:r>
+            <a:endParaRPr lang="en-US" sz="1200" dirty="0"/>
+          </a:p>
+          <a:p>
+            <a:pPr algn="l" marL="342900" indent="-342900">
+              <a:lnSpc>
+                <a:spcPts val="1620"/>
+              </a:lnSpc>
+              <a:spcAft>
+                <a:spcPts val="300"/>
+              </a:spcAft>
+              <a:buSzPct val="100000"/>
+              <a:buChar char="•"/>
+            </a:pPr>
+            <a:r>
+              <a:rPr lang="en-US" sz="1200" dirty="0">
+                <a:solidFill>
+                  <a:srgbClr val="1C2833"/>
+                </a:solidFill>
+                <a:latin typeface="Arial" pitchFamily="34" charset="0"/>
+                <a:ea typeface="Arial" pitchFamily="34" charset="-122"/>
+                <a:cs typeface="Arial" pitchFamily="34" charset="-120"/>
+              </a:rPr>
+              <a:t>When ginger is </a:t>
+            </a:r>
+            <a:pPr algn="l" indent="0" marL="0">
+              <a:lnSpc>
+                <a:spcPts val="1620"/>
+              </a:lnSpc>
+              <a:spcAft>
+                <a:spcPts val="300"/>
+              </a:spcAft>
+              <a:buNone/>
+            </a:pPr>
+            <a:r>
+              <a:rPr lang="en-US" sz="1200" b="1" dirty="0">
+                <a:solidFill>
+                  <a:srgbClr val="1C2833"/>
+                </a:solidFill>
+                <a:latin typeface="Arial" pitchFamily="34" charset="0"/>
+                <a:ea typeface="Arial" pitchFamily="34" charset="-122"/>
+                <a:cs typeface="Arial" pitchFamily="34" charset="-120"/>
+              </a:rPr>
+              <a:t>dried</a:t>
+            </a:r>
+            <a:pPr algn="l" indent="0" marL="0">
+              <a:lnSpc>
+                <a:spcPts val="1620"/>
+              </a:lnSpc>
+              <a:spcAft>
+                <a:spcPts val="300"/>
+              </a:spcAft>
+              <a:buNone/>
+            </a:pPr>
+            <a:r>
+              <a:rPr lang="en-US" sz="1200" dirty="0">
+                <a:solidFill>
+                  <a:srgbClr val="1C2833"/>
+                </a:solidFill>
+                <a:latin typeface="Arial" pitchFamily="34" charset="0"/>
+                <a:ea typeface="Arial" pitchFamily="34" charset="-122"/>
+                <a:cs typeface="Arial" pitchFamily="34" charset="-120"/>
+              </a:rPr>
+              <a:t> (loses water content) or heated, gingerol undergoes a dehydration reaction. The hydroxyl group is lost as water, leaving </a:t>
+            </a:r>
+            <a:pPr algn="l" indent="0" marL="0">
+              <a:lnSpc>
+                <a:spcPts val="1620"/>
+              </a:lnSpc>
+              <a:spcAft>
+                <a:spcPts val="300"/>
+              </a:spcAft>
+              <a:buNone/>
+            </a:pPr>
+            <a:r>
+              <a:rPr lang="en-US" sz="1200" b="1" dirty="0">
+                <a:solidFill>
+                  <a:srgbClr val="1C2833"/>
+                </a:solidFill>
+                <a:latin typeface="Arial" pitchFamily="34" charset="0"/>
+                <a:ea typeface="Arial" pitchFamily="34" charset="-122"/>
+                <a:cs typeface="Arial" pitchFamily="34" charset="-120"/>
+              </a:rPr>
+              <a:t>[6]-shogaol</a:t>
+            </a:r>
+            <a:pPr algn="l" indent="0" marL="0">
+              <a:lnSpc>
+                <a:spcPts val="1620"/>
+              </a:lnSpc>
+              <a:spcAft>
+                <a:spcPts val="300"/>
+              </a:spcAft>
+              <a:buNone/>
+            </a:pPr>
+            <a:r>
+              <a:rPr lang="en-US" sz="1200" dirty="0">
+                <a:solidFill>
+                  <a:srgbClr val="1C2833"/>
+                </a:solidFill>
+                <a:latin typeface="Arial" pitchFamily="34" charset="0"/>
+                <a:ea typeface="Arial" pitchFamily="34" charset="-122"/>
+                <a:cs typeface="Arial" pitchFamily="34" charset="-120"/>
+              </a:rPr>
+              <a:t>.</a:t>
+            </a:r>
+            <a:endParaRPr lang="en-US" sz="1200" dirty="0"/>
+          </a:p>
+          <a:p>
+            <a:pPr algn="l" marL="342900" indent="-342900">
+              <a:lnSpc>
+                <a:spcPts val="1620"/>
+              </a:lnSpc>
+              <a:spcAft>
+                <a:spcPts val="300"/>
+              </a:spcAft>
+              <a:buSzPct val="100000"/>
+              <a:buChar char="•"/>
+            </a:pPr>
+            <a:r>
+              <a:rPr lang="en-US" sz="1200" dirty="0">
+                <a:solidFill>
+                  <a:srgbClr val="1C2833"/>
+                </a:solidFill>
+                <a:latin typeface="Arial" pitchFamily="34" charset="0"/>
+                <a:ea typeface="Arial" pitchFamily="34" charset="-122"/>
+                <a:cs typeface="Arial" pitchFamily="34" charset="-120"/>
+              </a:rPr>
+              <a:t>Shogaol is more pungent than gingerol — it's why dried ginger powder is sharper on the tongue than fresh ginger.</a:t>
+            </a:r>
+            <a:endParaRPr lang="en-US" sz="1200" dirty="0"/>
+          </a:p>
+          <a:p>
+            <a:pPr algn="l" marL="342900" indent="-342900">
+              <a:lnSpc>
+                <a:spcPts val="1620"/>
+              </a:lnSpc>
+              <a:spcAft>
+                <a:spcPts val="300"/>
+              </a:spcAft>
+              <a:buSzPct val="100000"/>
+              <a:buChar char="•"/>
+            </a:pPr>
+            <a:r>
+              <a:rPr lang="en-US" sz="1200" dirty="0">
+                <a:solidFill>
+                  <a:srgbClr val="1C2833"/>
+                </a:solidFill>
+                <a:latin typeface="Arial" pitchFamily="34" charset="0"/>
+                <a:ea typeface="Arial" pitchFamily="34" charset="-122"/>
+                <a:cs typeface="Arial" pitchFamily="34" charset="-120"/>
+              </a:rPr>
+              <a:t>In Ayurveda, this same transformation is noticed: </a:t>
+            </a:r>
+            <a:pPr algn="l" indent="0" marL="0">
+              <a:lnSpc>
+                <a:spcPts val="1620"/>
+              </a:lnSpc>
+              <a:spcAft>
+                <a:spcPts val="300"/>
+              </a:spcAft>
+              <a:buNone/>
+            </a:pPr>
+            <a:r>
+              <a:rPr lang="en-US" sz="1200" i="1" dirty="0">
+                <a:solidFill>
+                  <a:srgbClr val="1C2833"/>
+                </a:solidFill>
+                <a:latin typeface="Arial" pitchFamily="34" charset="0"/>
+                <a:ea typeface="Arial" pitchFamily="34" charset="-122"/>
+                <a:cs typeface="Arial" pitchFamily="34" charset="-120"/>
+              </a:rPr>
+              <a:t>adraka</a:t>
+            </a:r>
+            <a:pPr algn="l" indent="0" marL="0">
+              <a:lnSpc>
+                <a:spcPts val="1620"/>
+              </a:lnSpc>
+              <a:spcAft>
+                <a:spcPts val="300"/>
+              </a:spcAft>
+              <a:buNone/>
+            </a:pPr>
+            <a:r>
+              <a:rPr lang="en-US" sz="1200" dirty="0">
+                <a:solidFill>
+                  <a:srgbClr val="1C2833"/>
+                </a:solidFill>
+                <a:latin typeface="Arial" pitchFamily="34" charset="0"/>
+                <a:ea typeface="Arial" pitchFamily="34" charset="-122"/>
+                <a:cs typeface="Arial" pitchFamily="34" charset="-120"/>
+              </a:rPr>
+              <a:t> (fresh) is described as somewhat less heating than </a:t>
+            </a:r>
+            <a:pPr algn="l" indent="0" marL="0">
+              <a:lnSpc>
+                <a:spcPts val="1620"/>
+              </a:lnSpc>
+              <a:spcAft>
+                <a:spcPts val="300"/>
+              </a:spcAft>
+              <a:buNone/>
+            </a:pPr>
+            <a:r>
+              <a:rPr lang="en-US" sz="1200" i="1" dirty="0">
+                <a:solidFill>
+                  <a:srgbClr val="1C2833"/>
+                </a:solidFill>
+                <a:latin typeface="Arial" pitchFamily="34" charset="0"/>
+                <a:ea typeface="Arial" pitchFamily="34" charset="-122"/>
+                <a:cs typeface="Arial" pitchFamily="34" charset="-120"/>
+              </a:rPr>
+              <a:t>sūnṭhī</a:t>
+            </a:r>
+            <a:pPr algn="l" indent="0" marL="0">
+              <a:lnSpc>
+                <a:spcPts val="1620"/>
+              </a:lnSpc>
+              <a:spcAft>
+                <a:spcPts val="300"/>
+              </a:spcAft>
+              <a:buNone/>
+            </a:pPr>
+            <a:r>
+              <a:rPr lang="en-US" sz="1200" dirty="0">
+                <a:solidFill>
+                  <a:srgbClr val="1C2833"/>
+                </a:solidFill>
+                <a:latin typeface="Arial" pitchFamily="34" charset="0"/>
+                <a:ea typeface="Arial" pitchFamily="34" charset="-122"/>
+                <a:cs typeface="Arial" pitchFamily="34" charset="-120"/>
+              </a:rPr>
+              <a:t> (dried). The classical text and the modern molecule agree.</a:t>
+            </a:r>
+            <a:endParaRPr lang="en-US" sz="1200" dirty="0"/>
+          </a:p>
+        </p:txBody>
       </p:sp>
       <p:sp>
         <p:nvSpPr>
@@ -5345,920 +10298,7 @@
         </p:nvSpPr>
         <p:spPr>
           <a:xfrm>
-            <a:off x="692051" y="1074093"/>
-            <a:ext cx="7973389" cy="230981"/>
-          </a:xfrm>
-          <a:prstGeom prst="rect">
-            <a:avLst/>
-          </a:prstGeom>
-          <a:noFill/>
-          <a:ln/>
-        </p:spPr>
-        <p:txBody>
-          <a:bodyPr wrap="square" lIns="0" tIns="0" rIns="0" bIns="0" rtlCol="0" anchor="t"/>
-          <a:lstStyle/>
-          <a:p>
-            <a:pPr algn="l" indent="0" marL="0">
-              <a:lnSpc>
-                <a:spcPts val="1820"/>
-              </a:lnSpc>
-              <a:spcBef>
-                <a:spcPts val="300"/>
-              </a:spcBef>
-              <a:spcAft>
-                <a:spcPts val="300"/>
-              </a:spcAft>
-              <a:buNone/>
-            </a:pPr>
-            <a:r>
-              <a:rPr lang="en-US" sz="1300" b="1" i="1" dirty="0">
-                <a:solidFill>
-                  <a:srgbClr val="1C2833"/>
-                </a:solidFill>
-                <a:latin typeface="Georgia" pitchFamily="34" charset="0"/>
-                <a:ea typeface="Georgia" pitchFamily="34" charset="-122"/>
-                <a:cs typeface="Georgia" pitchFamily="34" charset="-120"/>
-              </a:rPr>
-              <a:t>Adraka</a:t>
-            </a:r>
-            <a:pPr algn="l" indent="0" marL="0">
-              <a:lnSpc>
-                <a:spcPts val="1820"/>
-              </a:lnSpc>
-              <a:spcBef>
-                <a:spcPts val="300"/>
-              </a:spcBef>
-              <a:spcAft>
-                <a:spcPts val="300"/>
-              </a:spcAft>
-              <a:buNone/>
-            </a:pPr>
-            <a:r>
-              <a:rPr lang="en-US" sz="1300" dirty="0">
-                <a:solidFill>
-                  <a:srgbClr val="1C2833"/>
-                </a:solidFill>
-                <a:latin typeface="Georgia" pitchFamily="34" charset="0"/>
-                <a:ea typeface="Georgia" pitchFamily="34" charset="-122"/>
-                <a:cs typeface="Georgia" pitchFamily="34" charset="-120"/>
-              </a:rPr>
-              <a:t> (</a:t>
-            </a:r>
-            <a:pPr algn="l" indent="0" marL="0">
-              <a:lnSpc>
-                <a:spcPts val="1820"/>
-              </a:lnSpc>
-              <a:spcBef>
-                <a:spcPts val="300"/>
-              </a:spcBef>
-              <a:spcAft>
-                <a:spcPts val="300"/>
-              </a:spcAft>
-              <a:buNone/>
-            </a:pPr>
-            <a:r>
-              <a:rPr lang="en-US" sz="1300" i="1" dirty="0">
-                <a:solidFill>
-                  <a:srgbClr val="1C2833"/>
-                </a:solidFill>
-                <a:latin typeface="Georgia" pitchFamily="34" charset="0"/>
-                <a:ea typeface="Georgia" pitchFamily="34" charset="-122"/>
-                <a:cs typeface="Georgia" pitchFamily="34" charset="-120"/>
-              </a:rPr>
-              <a:t>Zingiber officinale</a:t>
-            </a:r>
-            <a:pPr algn="l" indent="0" marL="0">
-              <a:lnSpc>
-                <a:spcPts val="1820"/>
-              </a:lnSpc>
-              <a:spcBef>
-                <a:spcPts val="300"/>
-              </a:spcBef>
-              <a:spcAft>
-                <a:spcPts val="300"/>
-              </a:spcAft>
-              <a:buNone/>
-            </a:pPr>
-            <a:r>
-              <a:rPr lang="en-US" sz="1300" dirty="0">
-                <a:solidFill>
-                  <a:srgbClr val="1C2833"/>
-                </a:solidFill>
-                <a:latin typeface="Georgia" pitchFamily="34" charset="0"/>
-                <a:ea typeface="Georgia" pitchFamily="34" charset="-122"/>
-                <a:cs typeface="Georgia" pitchFamily="34" charset="-120"/>
-              </a:rPr>
-              <a:t>) — known in English as ginger.</a:t>
-            </a:r>
-            <a:endParaRPr lang="en-US" sz="1300" dirty="0"/>
-          </a:p>
-        </p:txBody>
-      </p:sp>
-      <p:sp>
-        <p:nvSpPr>
-          <p:cNvPr id="7" name="Text 5"/>
-          <p:cNvSpPr/>
-          <p:nvPr/>
-        </p:nvSpPr>
-        <p:spPr>
-          <a:xfrm>
-            <a:off x="692051" y="1343174"/>
-            <a:ext cx="7973389" cy="230981"/>
-          </a:xfrm>
-          <a:prstGeom prst="rect">
-            <a:avLst/>
-          </a:prstGeom>
-          <a:noFill/>
-          <a:ln/>
-        </p:spPr>
-        <p:txBody>
-          <a:bodyPr wrap="square" lIns="0" tIns="0" rIns="0" bIns="0" rtlCol="0" anchor="t"/>
-          <a:lstStyle/>
-          <a:p>
-            <a:pPr algn="l" indent="0" marL="0">
-              <a:lnSpc>
-                <a:spcPts val="1820"/>
-              </a:lnSpc>
-              <a:spcBef>
-                <a:spcPts val="300"/>
-              </a:spcBef>
-              <a:spcAft>
-                <a:spcPts val="300"/>
-              </a:spcAft>
-              <a:buNone/>
-            </a:pPr>
-            <a:r>
-              <a:rPr lang="en-US" sz="1300" b="1" i="1" dirty="0">
-                <a:solidFill>
-                  <a:srgbClr val="1C2833"/>
-                </a:solidFill>
-                <a:latin typeface="Georgia" pitchFamily="34" charset="0"/>
-                <a:ea typeface="Georgia" pitchFamily="34" charset="-122"/>
-                <a:cs typeface="Georgia" pitchFamily="34" charset="-120"/>
-              </a:rPr>
-              <a:t>What it is:</a:t>
-            </a:r>
-            <a:pPr algn="l" indent="0" marL="0">
-              <a:lnSpc>
-                <a:spcPts val="1820"/>
-              </a:lnSpc>
-              <a:spcBef>
-                <a:spcPts val="300"/>
-              </a:spcBef>
-              <a:spcAft>
-                <a:spcPts val="300"/>
-              </a:spcAft>
-              <a:buNone/>
-            </a:pPr>
-            <a:r>
-              <a:rPr lang="en-US" sz="1300" dirty="0">
-                <a:solidFill>
-                  <a:srgbClr val="1C2833"/>
-                </a:solidFill>
-                <a:latin typeface="Georgia" pitchFamily="34" charset="0"/>
-                <a:ea typeface="Georgia" pitchFamily="34" charset="-122"/>
-                <a:cs typeface="Georgia" pitchFamily="34" charset="-120"/>
-              </a:rPr>
-              <a:t> A </a:t>
-            </a:r>
-            <a:pPr algn="l" indent="0" marL="0">
-              <a:lnSpc>
-                <a:spcPts val="1820"/>
-              </a:lnSpc>
-              <a:spcBef>
-                <a:spcPts val="300"/>
-              </a:spcBef>
-              <a:spcAft>
-                <a:spcPts val="300"/>
-              </a:spcAft>
-              <a:buNone/>
-            </a:pPr>
-            <a:r>
-              <a:rPr lang="en-US" sz="1300" b="1" i="1" dirty="0">
-                <a:solidFill>
-                  <a:srgbClr val="1C2833"/>
-                </a:solidFill>
-                <a:latin typeface="Georgia" pitchFamily="34" charset="0"/>
-                <a:ea typeface="Georgia" pitchFamily="34" charset="-122"/>
-                <a:cs typeface="Georgia" pitchFamily="34" charset="-120"/>
-              </a:rPr>
-              <a:t>rhizome</a:t>
-            </a:r>
-            <a:pPr algn="l" indent="0" marL="0">
-              <a:lnSpc>
-                <a:spcPts val="1820"/>
-              </a:lnSpc>
-              <a:spcBef>
-                <a:spcPts val="300"/>
-              </a:spcBef>
-              <a:spcAft>
-                <a:spcPts val="300"/>
-              </a:spcAft>
-              <a:buNone/>
-            </a:pPr>
-            <a:r>
-              <a:rPr lang="en-US" sz="1300" dirty="0">
-                <a:solidFill>
-                  <a:srgbClr val="1C2833"/>
-                </a:solidFill>
-                <a:latin typeface="Georgia" pitchFamily="34" charset="0"/>
-                <a:ea typeface="Georgia" pitchFamily="34" charset="-122"/>
-                <a:cs typeface="Georgia" pitchFamily="34" charset="-120"/>
-              </a:rPr>
-              <a:t> (underground stem), related to turmeric. Pale tan outside, pale yellow inside.</a:t>
-            </a:r>
-            <a:endParaRPr lang="en-US" sz="1300" dirty="0"/>
-          </a:p>
-        </p:txBody>
-      </p:sp>
-      <p:sp>
-        <p:nvSpPr>
-          <p:cNvPr id="8" name="Text 6"/>
-          <p:cNvSpPr/>
-          <p:nvPr/>
-        </p:nvSpPr>
-        <p:spPr>
-          <a:xfrm>
-            <a:off x="692051" y="1612255"/>
-            <a:ext cx="7973389" cy="230981"/>
-          </a:xfrm>
-          <a:prstGeom prst="rect">
-            <a:avLst/>
-          </a:prstGeom>
-          <a:noFill/>
-          <a:ln/>
-        </p:spPr>
-        <p:txBody>
-          <a:bodyPr wrap="square" lIns="0" tIns="0" rIns="0" bIns="0" rtlCol="0" anchor="t"/>
-          <a:lstStyle/>
-          <a:p>
-            <a:pPr algn="l" indent="0" marL="0">
-              <a:lnSpc>
-                <a:spcPts val="1820"/>
-              </a:lnSpc>
-              <a:spcBef>
-                <a:spcPts val="300"/>
-              </a:spcBef>
-              <a:spcAft>
-                <a:spcPts val="300"/>
-              </a:spcAft>
-              <a:buNone/>
-            </a:pPr>
-            <a:r>
-              <a:rPr lang="en-US" sz="1300" b="1" i="1" dirty="0">
-                <a:solidFill>
-                  <a:srgbClr val="1C2833"/>
-                </a:solidFill>
-                <a:latin typeface="Georgia" pitchFamily="34" charset="0"/>
-                <a:ea typeface="Georgia" pitchFamily="34" charset="-122"/>
-                <a:cs typeface="Georgia" pitchFamily="34" charset="-120"/>
-              </a:rPr>
-              <a:t>Fresh vs dried — same plant, different chemistry:</a:t>
-            </a:r>
-            <a:endParaRPr lang="en-US" sz="1300" dirty="0"/>
-          </a:p>
-        </p:txBody>
-      </p:sp>
-      <p:sp>
-        <p:nvSpPr>
-          <p:cNvPr id="9" name="Text 7"/>
-          <p:cNvSpPr/>
-          <p:nvPr/>
-        </p:nvSpPr>
-        <p:spPr>
-          <a:xfrm>
-            <a:off x="692051" y="1881336"/>
-            <a:ext cx="7973389" cy="461963"/>
-          </a:xfrm>
-          <a:prstGeom prst="rect">
-            <a:avLst/>
-          </a:prstGeom>
-          <a:noFill/>
-          <a:ln/>
-        </p:spPr>
-        <p:txBody>
-          <a:bodyPr wrap="square" lIns="0" tIns="0" rIns="0" bIns="0" rtlCol="0" anchor="t"/>
-          <a:lstStyle/>
-          <a:p>
-            <a:pPr algn="l" indent="0" marL="0">
-              <a:lnSpc>
-                <a:spcPts val="1820"/>
-              </a:lnSpc>
-              <a:spcBef>
-                <a:spcPts val="300"/>
-              </a:spcBef>
-              <a:spcAft>
-                <a:spcPts val="300"/>
-              </a:spcAft>
-              <a:buNone/>
-            </a:pPr>
-            <a:r>
-              <a:rPr lang="en-US" sz="1300" dirty="0">
-                <a:solidFill>
-                  <a:srgbClr val="1C2833"/>
-                </a:solidFill>
-                <a:latin typeface="Georgia" pitchFamily="34" charset="0"/>
-                <a:ea typeface="Georgia" pitchFamily="34" charset="-122"/>
-                <a:cs typeface="Georgia" pitchFamily="34" charset="-120"/>
-              </a:rPr>
-              <a:t>| Form | Sanskrit name | Dominant compound | |------|----------------|--------------------| | Fresh rhizome | </a:t>
-            </a:r>
-            <a:pPr algn="l" indent="0" marL="0">
-              <a:lnSpc>
-                <a:spcPts val="1820"/>
-              </a:lnSpc>
-              <a:spcBef>
-                <a:spcPts val="300"/>
-              </a:spcBef>
-              <a:spcAft>
-                <a:spcPts val="300"/>
-              </a:spcAft>
-              <a:buNone/>
-            </a:pPr>
-            <a:r>
-              <a:rPr lang="en-US" sz="1300" i="1" dirty="0">
-                <a:solidFill>
-                  <a:srgbClr val="1C2833"/>
-                </a:solidFill>
-                <a:latin typeface="Georgia" pitchFamily="34" charset="0"/>
-                <a:ea typeface="Georgia" pitchFamily="34" charset="-122"/>
-                <a:cs typeface="Georgia" pitchFamily="34" charset="-120"/>
-              </a:rPr>
-              <a:t>adraka</a:t>
-            </a:r>
-            <a:pPr algn="l" indent="0" marL="0">
-              <a:lnSpc>
-                <a:spcPts val="1820"/>
-              </a:lnSpc>
-              <a:spcBef>
-                <a:spcPts val="300"/>
-              </a:spcBef>
-              <a:spcAft>
-                <a:spcPts val="300"/>
-              </a:spcAft>
-              <a:buNone/>
-            </a:pPr>
-            <a:r>
-              <a:rPr lang="en-US" sz="1300" dirty="0">
-                <a:solidFill>
-                  <a:srgbClr val="1C2833"/>
-                </a:solidFill>
-                <a:latin typeface="Georgia" pitchFamily="34" charset="0"/>
-                <a:ea typeface="Georgia" pitchFamily="34" charset="-122"/>
-                <a:cs typeface="Georgia" pitchFamily="34" charset="-120"/>
-              </a:rPr>
-              <a:t> | </a:t>
-            </a:r>
-            <a:pPr algn="l" indent="0" marL="0">
-              <a:lnSpc>
-                <a:spcPts val="1820"/>
-              </a:lnSpc>
-              <a:spcBef>
-                <a:spcPts val="300"/>
-              </a:spcBef>
-              <a:spcAft>
-                <a:spcPts val="300"/>
-              </a:spcAft>
-              <a:buNone/>
-            </a:pPr>
-            <a:r>
-              <a:rPr lang="en-US" sz="1300" b="1" i="1" dirty="0">
-                <a:solidFill>
-                  <a:srgbClr val="1C2833"/>
-                </a:solidFill>
-                <a:latin typeface="Georgia" pitchFamily="34" charset="0"/>
-                <a:ea typeface="Georgia" pitchFamily="34" charset="-122"/>
-                <a:cs typeface="Georgia" pitchFamily="34" charset="-120"/>
-              </a:rPr>
-              <a:t>gingerol</a:t>
-            </a:r>
-            <a:pPr algn="l" indent="0" marL="0">
-              <a:lnSpc>
-                <a:spcPts val="1820"/>
-              </a:lnSpc>
-              <a:spcBef>
-                <a:spcPts val="300"/>
-              </a:spcBef>
-              <a:spcAft>
-                <a:spcPts val="300"/>
-              </a:spcAft>
-              <a:buNone/>
-            </a:pPr>
-            <a:r>
-              <a:rPr lang="en-US" sz="1300" dirty="0">
-                <a:solidFill>
-                  <a:srgbClr val="1C2833"/>
-                </a:solidFill>
-                <a:latin typeface="Georgia" pitchFamily="34" charset="0"/>
-                <a:ea typeface="Georgia" pitchFamily="34" charset="-122"/>
-                <a:cs typeface="Georgia" pitchFamily="34" charset="-120"/>
-              </a:rPr>
-              <a:t> | | Dried rhizome | </a:t>
-            </a:r>
-            <a:pPr algn="l" indent="0" marL="0">
-              <a:lnSpc>
-                <a:spcPts val="1820"/>
-              </a:lnSpc>
-              <a:spcBef>
-                <a:spcPts val="300"/>
-              </a:spcBef>
-              <a:spcAft>
-                <a:spcPts val="300"/>
-              </a:spcAft>
-              <a:buNone/>
-            </a:pPr>
-            <a:r>
-              <a:rPr lang="en-US" sz="1300" i="1" dirty="0">
-                <a:solidFill>
-                  <a:srgbClr val="1C2833"/>
-                </a:solidFill>
-                <a:latin typeface="Georgia" pitchFamily="34" charset="0"/>
-                <a:ea typeface="Georgia" pitchFamily="34" charset="-122"/>
-                <a:cs typeface="Georgia" pitchFamily="34" charset="-120"/>
-              </a:rPr>
-              <a:t>sūnṭhī</a:t>
-            </a:r>
-            <a:pPr algn="l" indent="0" marL="0">
-              <a:lnSpc>
-                <a:spcPts val="1820"/>
-              </a:lnSpc>
-              <a:spcBef>
-                <a:spcPts val="300"/>
-              </a:spcBef>
-              <a:spcAft>
-                <a:spcPts val="300"/>
-              </a:spcAft>
-              <a:buNone/>
-            </a:pPr>
-            <a:r>
-              <a:rPr lang="en-US" sz="1300" dirty="0">
-                <a:solidFill>
-                  <a:srgbClr val="1C2833"/>
-                </a:solidFill>
-                <a:latin typeface="Georgia" pitchFamily="34" charset="0"/>
-                <a:ea typeface="Georgia" pitchFamily="34" charset="-122"/>
-                <a:cs typeface="Georgia" pitchFamily="34" charset="-120"/>
-              </a:rPr>
-              <a:t> | </a:t>
-            </a:r>
-            <a:pPr algn="l" indent="0" marL="0">
-              <a:lnSpc>
-                <a:spcPts val="1820"/>
-              </a:lnSpc>
-              <a:spcBef>
-                <a:spcPts val="300"/>
-              </a:spcBef>
-              <a:spcAft>
-                <a:spcPts val="300"/>
-              </a:spcAft>
-              <a:buNone/>
-            </a:pPr>
-            <a:r>
-              <a:rPr lang="en-US" sz="1300" b="1" i="1" dirty="0">
-                <a:solidFill>
-                  <a:srgbClr val="1C2833"/>
-                </a:solidFill>
-                <a:latin typeface="Georgia" pitchFamily="34" charset="0"/>
-                <a:ea typeface="Georgia" pitchFamily="34" charset="-122"/>
-                <a:cs typeface="Georgia" pitchFamily="34" charset="-120"/>
-              </a:rPr>
-              <a:t>shogaol</a:t>
-            </a:r>
-            <a:pPr algn="l" indent="0" marL="0">
-              <a:lnSpc>
-                <a:spcPts val="1820"/>
-              </a:lnSpc>
-              <a:spcBef>
-                <a:spcPts val="300"/>
-              </a:spcBef>
-              <a:spcAft>
-                <a:spcPts val="300"/>
-              </a:spcAft>
-              <a:buNone/>
-            </a:pPr>
-            <a:r>
-              <a:rPr lang="en-US" sz="1300" dirty="0">
-                <a:solidFill>
-                  <a:srgbClr val="1C2833"/>
-                </a:solidFill>
-                <a:latin typeface="Georgia" pitchFamily="34" charset="0"/>
-                <a:ea typeface="Georgia" pitchFamily="34" charset="-122"/>
-                <a:cs typeface="Georgia" pitchFamily="34" charset="-120"/>
-              </a:rPr>
-              <a:t> (more pungent) |</a:t>
-            </a:r>
-            <a:endParaRPr lang="en-US" sz="1300" dirty="0"/>
-          </a:p>
-        </p:txBody>
-      </p:sp>
-      <p:sp>
-        <p:nvSpPr>
-          <p:cNvPr id="10" name="Text 8"/>
-          <p:cNvSpPr/>
-          <p:nvPr/>
-        </p:nvSpPr>
-        <p:spPr>
-          <a:xfrm>
-            <a:off x="692051" y="2381399"/>
-            <a:ext cx="7973389" cy="230981"/>
-          </a:xfrm>
-          <a:prstGeom prst="rect">
-            <a:avLst/>
-          </a:prstGeom>
-          <a:noFill/>
-          <a:ln/>
-        </p:spPr>
-        <p:txBody>
-          <a:bodyPr wrap="square" lIns="0" tIns="0" rIns="0" bIns="0" rtlCol="0" anchor="t"/>
-          <a:lstStyle/>
-          <a:p>
-            <a:pPr algn="l" indent="0" marL="0">
-              <a:lnSpc>
-                <a:spcPts val="1820"/>
-              </a:lnSpc>
-              <a:spcBef>
-                <a:spcPts val="300"/>
-              </a:spcBef>
-              <a:spcAft>
-                <a:spcPts val="300"/>
-              </a:spcAft>
-              <a:buNone/>
-            </a:pPr>
-            <a:r>
-              <a:rPr lang="en-US" sz="1300" i="1" dirty="0">
-                <a:solidFill>
-                  <a:srgbClr val="1C2833"/>
-                </a:solidFill>
-                <a:latin typeface="Georgia" pitchFamily="34" charset="0"/>
-                <a:ea typeface="Georgia" pitchFamily="34" charset="-122"/>
-                <a:cs typeface="Georgia" pitchFamily="34" charset="-120"/>
-              </a:rPr>
-              <a:t>When ginger dries or heats, gingerol loses a water molecule and becomes shogaol.</a:t>
-            </a:r>
-            <a:endParaRPr lang="en-US" sz="1300" dirty="0"/>
-          </a:p>
-        </p:txBody>
-      </p:sp>
-      <p:sp>
-        <p:nvSpPr>
-          <p:cNvPr id="11" name="Text 9"/>
-          <p:cNvSpPr/>
-          <p:nvPr/>
-        </p:nvSpPr>
-        <p:spPr>
-          <a:xfrm>
-            <a:off x="692051" y="2650480"/>
-            <a:ext cx="7973389" cy="692944"/>
-          </a:xfrm>
-          <a:prstGeom prst="rect">
-            <a:avLst/>
-          </a:prstGeom>
-          <a:noFill/>
-          <a:ln/>
-        </p:spPr>
-        <p:txBody>
-          <a:bodyPr wrap="square" lIns="0" tIns="0" rIns="0" bIns="0" rtlCol="0" anchor="t"/>
-          <a:lstStyle/>
-          <a:p>
-            <a:pPr algn="l" indent="0" marL="0">
-              <a:lnSpc>
-                <a:spcPts val="1820"/>
-              </a:lnSpc>
-              <a:spcBef>
-                <a:spcPts val="300"/>
-              </a:spcBef>
-              <a:spcAft>
-                <a:spcPts val="300"/>
-              </a:spcAft>
-              <a:buNone/>
-            </a:pPr>
-            <a:r>
-              <a:rPr lang="en-US" sz="1300" b="1" i="1" dirty="0">
-                <a:solidFill>
-                  <a:srgbClr val="1C2833"/>
-                </a:solidFill>
-                <a:latin typeface="Georgia" pitchFamily="34" charset="0"/>
-                <a:ea typeface="Georgia" pitchFamily="34" charset="-122"/>
-                <a:cs typeface="Georgia" pitchFamily="34" charset="-120"/>
-              </a:rPr>
-              <a:t>Well-supported modern uses:</a:t>
-            </a:r>
-            <a:pPr algn="l" indent="0" marL="0">
-              <a:lnSpc>
-                <a:spcPts val="1820"/>
-              </a:lnSpc>
-              <a:spcBef>
-                <a:spcPts val="300"/>
-              </a:spcBef>
-              <a:spcAft>
-                <a:spcPts val="300"/>
-              </a:spcAft>
-              <a:buNone/>
-            </a:pPr>
-            <a:r>
-              <a:rPr lang="en-US" sz="1300" dirty="0">
-                <a:solidFill>
-                  <a:srgbClr val="1C2833"/>
-                </a:solidFill>
-                <a:latin typeface="Georgia" pitchFamily="34" charset="0"/>
-                <a:ea typeface="Georgia" pitchFamily="34" charset="-122"/>
-                <a:cs typeface="Georgia" pitchFamily="34" charset="-120"/>
-              </a:rPr>
-              <a:t> - Anti-nausea, especially motion sickness and pregnancy-related (under medical supervision). - Mild warming effect (activates TRPV1 receptors — same as chilli's capsaicin). - Digestive support in culinary amounts.</a:t>
-            </a:r>
-            <a:endParaRPr lang="en-US" sz="1300" dirty="0"/>
-          </a:p>
-        </p:txBody>
-      </p:sp>
-      <p:sp>
-        <p:nvSpPr>
-          <p:cNvPr id="12" name="Text 10"/>
-          <p:cNvSpPr/>
-          <p:nvPr/>
-        </p:nvSpPr>
-        <p:spPr>
-          <a:xfrm>
-            <a:off x="692051" y="3381524"/>
-            <a:ext cx="7973389" cy="230981"/>
-          </a:xfrm>
-          <a:prstGeom prst="rect">
-            <a:avLst/>
-          </a:prstGeom>
-          <a:noFill/>
-          <a:ln/>
-        </p:spPr>
-        <p:txBody>
-          <a:bodyPr wrap="square" lIns="0" tIns="0" rIns="0" bIns="0" rtlCol="0" anchor="t"/>
-          <a:lstStyle/>
-          <a:p>
-            <a:pPr algn="l" indent="0" marL="0">
-              <a:lnSpc>
-                <a:spcPts val="1820"/>
-              </a:lnSpc>
-              <a:spcBef>
-                <a:spcPts val="300"/>
-              </a:spcBef>
-              <a:spcAft>
-                <a:spcPts val="300"/>
-              </a:spcAft>
-              <a:buNone/>
-            </a:pPr>
-            <a:r>
-              <a:rPr lang="en-US" sz="1300" b="1" i="1" dirty="0">
-                <a:solidFill>
-                  <a:srgbClr val="1C2833"/>
-                </a:solidFill>
-                <a:latin typeface="Georgia" pitchFamily="34" charset="0"/>
-                <a:ea typeface="Georgia" pitchFamily="34" charset="-122"/>
-                <a:cs typeface="Georgia" pitchFamily="34" charset="-120"/>
-              </a:rPr>
-              <a:t>Ayurvedic classification:</a:t>
-            </a:r>
-            <a:pPr algn="l" indent="0" marL="0">
-              <a:lnSpc>
-                <a:spcPts val="1820"/>
-              </a:lnSpc>
-              <a:spcBef>
-                <a:spcPts val="300"/>
-              </a:spcBef>
-              <a:spcAft>
-                <a:spcPts val="300"/>
-              </a:spcAft>
-              <a:buNone/>
-            </a:pPr>
-            <a:r>
-              <a:rPr lang="en-US" sz="1300" dirty="0">
-                <a:solidFill>
-                  <a:srgbClr val="1C2833"/>
-                </a:solidFill>
-                <a:latin typeface="Georgia" pitchFamily="34" charset="0"/>
-                <a:ea typeface="Georgia" pitchFamily="34" charset="-122"/>
-                <a:cs typeface="Georgia" pitchFamily="34" charset="-120"/>
-              </a:rPr>
-              <a:t> </a:t>
-            </a:r>
-            <a:pPr algn="l" indent="0" marL="0">
-              <a:lnSpc>
-                <a:spcPts val="1820"/>
-              </a:lnSpc>
-              <a:spcBef>
-                <a:spcPts val="300"/>
-              </a:spcBef>
-              <a:spcAft>
-                <a:spcPts val="300"/>
-              </a:spcAft>
-              <a:buNone/>
-            </a:pPr>
-            <a:r>
-              <a:rPr lang="en-US" sz="1300" i="1" dirty="0">
-                <a:solidFill>
-                  <a:srgbClr val="1C2833"/>
-                </a:solidFill>
-                <a:latin typeface="Georgia" pitchFamily="34" charset="0"/>
-                <a:ea typeface="Georgia" pitchFamily="34" charset="-122"/>
-                <a:cs typeface="Georgia" pitchFamily="34" charset="-120"/>
-              </a:rPr>
-              <a:t>kaṭu</a:t>
-            </a:r>
-            <a:pPr algn="l" indent="0" marL="0">
-              <a:lnSpc>
-                <a:spcPts val="1820"/>
-              </a:lnSpc>
-              <a:spcBef>
-                <a:spcPts val="300"/>
-              </a:spcBef>
-              <a:spcAft>
-                <a:spcPts val="300"/>
-              </a:spcAft>
-              <a:buNone/>
-            </a:pPr>
-            <a:r>
-              <a:rPr lang="en-US" sz="1300" dirty="0">
-                <a:solidFill>
-                  <a:srgbClr val="1C2833"/>
-                </a:solidFill>
-                <a:latin typeface="Georgia" pitchFamily="34" charset="0"/>
-                <a:ea typeface="Georgia" pitchFamily="34" charset="-122"/>
-                <a:cs typeface="Georgia" pitchFamily="34" charset="-120"/>
-              </a:rPr>
-              <a:t> (pungent) in taste, </a:t>
-            </a:r>
-            <a:pPr algn="l" indent="0" marL="0">
-              <a:lnSpc>
-                <a:spcPts val="1820"/>
-              </a:lnSpc>
-              <a:spcBef>
-                <a:spcPts val="300"/>
-              </a:spcBef>
-              <a:spcAft>
-                <a:spcPts val="300"/>
-              </a:spcAft>
-              <a:buNone/>
-            </a:pPr>
-            <a:r>
-              <a:rPr lang="en-US" sz="1300" i="1" dirty="0">
-                <a:solidFill>
-                  <a:srgbClr val="1C2833"/>
-                </a:solidFill>
-                <a:latin typeface="Georgia" pitchFamily="34" charset="0"/>
-                <a:ea typeface="Georgia" pitchFamily="34" charset="-122"/>
-                <a:cs typeface="Georgia" pitchFamily="34" charset="-120"/>
-              </a:rPr>
-              <a:t>uṣṇa</a:t>
-            </a:r>
-            <a:pPr algn="l" indent="0" marL="0">
-              <a:lnSpc>
-                <a:spcPts val="1820"/>
-              </a:lnSpc>
-              <a:spcBef>
-                <a:spcPts val="300"/>
-              </a:spcBef>
-              <a:spcAft>
-                <a:spcPts val="300"/>
-              </a:spcAft>
-              <a:buNone/>
-            </a:pPr>
-            <a:r>
-              <a:rPr lang="en-US" sz="1300" dirty="0">
-                <a:solidFill>
-                  <a:srgbClr val="1C2833"/>
-                </a:solidFill>
-                <a:latin typeface="Georgia" pitchFamily="34" charset="0"/>
-                <a:ea typeface="Georgia" pitchFamily="34" charset="-122"/>
-                <a:cs typeface="Georgia" pitchFamily="34" charset="-120"/>
-              </a:rPr>
-              <a:t> (heating) in </a:t>
-            </a:r>
-            <a:pPr algn="l" indent="0" marL="0">
-              <a:lnSpc>
-                <a:spcPts val="1820"/>
-              </a:lnSpc>
-              <a:spcBef>
-                <a:spcPts val="300"/>
-              </a:spcBef>
-              <a:spcAft>
-                <a:spcPts val="300"/>
-              </a:spcAft>
-              <a:buNone/>
-            </a:pPr>
-            <a:r>
-              <a:rPr lang="en-US" sz="1300" i="1" dirty="0">
-                <a:solidFill>
-                  <a:srgbClr val="1C2833"/>
-                </a:solidFill>
-                <a:latin typeface="Georgia" pitchFamily="34" charset="0"/>
-                <a:ea typeface="Georgia" pitchFamily="34" charset="-122"/>
-                <a:cs typeface="Georgia" pitchFamily="34" charset="-120"/>
-              </a:rPr>
-              <a:t>vīrya</a:t>
-            </a:r>
-            <a:pPr algn="l" indent="0" marL="0">
-              <a:lnSpc>
-                <a:spcPts val="1820"/>
-              </a:lnSpc>
-              <a:spcBef>
-                <a:spcPts val="300"/>
-              </a:spcBef>
-              <a:spcAft>
-                <a:spcPts val="300"/>
-              </a:spcAft>
-              <a:buNone/>
-            </a:pPr>
-            <a:r>
-              <a:rPr lang="en-US" sz="1300" dirty="0">
-                <a:solidFill>
-                  <a:srgbClr val="1C2833"/>
-                </a:solidFill>
-                <a:latin typeface="Georgia" pitchFamily="34" charset="0"/>
-                <a:ea typeface="Georgia" pitchFamily="34" charset="-122"/>
-                <a:cs typeface="Georgia" pitchFamily="34" charset="-120"/>
-              </a:rPr>
-              <a:t>.</a:t>
-            </a:r>
-            <a:endParaRPr lang="en-US" sz="1300" dirty="0"/>
-          </a:p>
-        </p:txBody>
-      </p:sp>
-      <p:sp>
-        <p:nvSpPr>
-          <p:cNvPr id="13" name="Text 11"/>
-          <p:cNvSpPr/>
-          <p:nvPr/>
-        </p:nvSpPr>
-        <p:spPr>
-          <a:xfrm>
-            <a:off x="692051" y="3650605"/>
-            <a:ext cx="7973389" cy="461963"/>
-          </a:xfrm>
-          <a:prstGeom prst="rect">
-            <a:avLst/>
-          </a:prstGeom>
-          <a:noFill/>
-          <a:ln/>
-        </p:spPr>
-        <p:txBody>
-          <a:bodyPr wrap="square" lIns="0" tIns="0" rIns="0" bIns="0" rtlCol="0" anchor="t"/>
-          <a:lstStyle/>
-          <a:p>
-            <a:pPr algn="l" indent="0" marL="0">
-              <a:lnSpc>
-                <a:spcPts val="1820"/>
-              </a:lnSpc>
-              <a:spcBef>
-                <a:spcPts val="300"/>
-              </a:spcBef>
-              <a:spcAft>
-                <a:spcPts val="300"/>
-              </a:spcAft>
-              <a:buNone/>
-            </a:pPr>
-            <a:r>
-              <a:rPr lang="en-US" sz="1300" b="1" i="1" dirty="0">
-                <a:solidFill>
-                  <a:srgbClr val="1C2833"/>
-                </a:solidFill>
-                <a:latin typeface="Georgia" pitchFamily="34" charset="0"/>
-                <a:ea typeface="Georgia" pitchFamily="34" charset="-122"/>
-                <a:cs typeface="Georgia" pitchFamily="34" charset="-120"/>
-              </a:rPr>
-              <a:t>Cautions:</a:t>
-            </a:r>
-            <a:pPr algn="l" indent="0" marL="0">
-              <a:lnSpc>
-                <a:spcPts val="1820"/>
-              </a:lnSpc>
-              <a:spcBef>
-                <a:spcPts val="300"/>
-              </a:spcBef>
-              <a:spcAft>
-                <a:spcPts val="300"/>
-              </a:spcAft>
-              <a:buNone/>
-            </a:pPr>
-            <a:r>
-              <a:rPr lang="en-US" sz="1300" dirty="0">
-                <a:solidFill>
-                  <a:srgbClr val="1C2833"/>
-                </a:solidFill>
-                <a:latin typeface="Georgia" pitchFamily="34" charset="0"/>
-                <a:ea typeface="Georgia" pitchFamily="34" charset="-122"/>
-                <a:cs typeface="Georgia" pitchFamily="34" charset="-120"/>
-              </a:rPr>
-              <a:t> Large doses → heartburn or stomach upset; pregnancy doses need a doctor; interactions with blood-thinning medications.</a:t>
-            </a:r>
-            <a:endParaRPr lang="en-US" sz="1300" dirty="0"/>
-          </a:p>
-        </p:txBody>
-      </p:sp>
-      <p:sp>
-        <p:nvSpPr>
-          <p:cNvPr id="14" name="Text 12"/>
-          <p:cNvSpPr/>
-          <p:nvPr/>
-        </p:nvSpPr>
-        <p:spPr>
-          <a:xfrm>
-            <a:off x="406301" y="4468118"/>
+            <a:off x="406301" y="4434929"/>
             <a:ext cx="8498026" cy="213271"/>
           </a:xfrm>
           <a:prstGeom prst="rect">
@@ -6402,7 +10442,7 @@
                 <a:ea typeface="Georgia" pitchFamily="34" charset="-122"/>
                 <a:cs typeface="Georgia" pitchFamily="34" charset="-120"/>
               </a:rPr>
-              <a:t>Homework</a:t>
+              <a:t>Core (20 min) (cont.)</a:t>
             </a:r>
             <a:endParaRPr lang="en-US" sz="1800" dirty="0"/>
           </a:p>
@@ -6417,7 +10457,7 @@
         <p:spPr>
           <a:xfrm>
             <a:off x="406301" y="870942"/>
-            <a:ext cx="8498026" cy="426541"/>
+            <a:ext cx="8498026" cy="213271"/>
           </a:xfrm>
           <a:prstGeom prst="rect">
             <a:avLst/>
@@ -6450,7 +10490,7 @@
                 <a:ea typeface="Arial" pitchFamily="34" charset="-122"/>
                 <a:cs typeface="Arial" pitchFamily="34" charset="-120"/>
               </a:rPr>
-              <a:t>– Watch what ginger is used in your home over the next two days. List 3 dishes / drinks that contain it. For each, guess: fresh or dried? Heating or just flavour?</a:t>
+              <a:t>Sketch on board:</a:t>
             </a:r>
             <a:endParaRPr lang="en-US" sz="1200" dirty="0"/>
           </a:p>
@@ -6459,6 +10499,143 @@
       <p:sp>
         <p:nvSpPr>
           <p:cNvPr id="5" name="Text 3"/>
+          <p:cNvSpPr/>
+          <p:nvPr/>
+        </p:nvSpPr>
+        <p:spPr>
+          <a:xfrm>
+            <a:off x="406301" y="1173063"/>
+            <a:ext cx="8331398" cy="603052"/>
+          </a:xfrm>
+          <a:prstGeom prst="rect">
+            <a:avLst/>
+          </a:prstGeom>
+          <a:solidFill>
+            <a:srgbClr val="F4F8F9"/>
+          </a:solidFill>
+          <a:ln/>
+        </p:spPr>
+        <p:txBody>
+          <a:bodyPr wrap="square" rtlCol="0" anchor="ctr"/>
+          <a:lstStyle/>
+          <a:p>
+            <a:pPr indent="0" marL="0">
+              <a:buNone/>
+            </a:pPr>
+            <a:endParaRPr lang="en-US" dirty="0"/>
+          </a:p>
+        </p:txBody>
+      </p:sp>
+      <p:sp>
+        <p:nvSpPr>
+          <p:cNvPr id="6" name="Shape 4"/>
+          <p:cNvSpPr/>
+          <p:nvPr/>
+        </p:nvSpPr>
+        <p:spPr>
+          <a:xfrm>
+            <a:off x="430113" y="1173063"/>
+            <a:ext cx="0" cy="603052"/>
+          </a:xfrm>
+          <a:prstGeom prst="line">
+            <a:avLst/>
+          </a:prstGeom>
+          <a:noFill/>
+          <a:ln w="47625">
+            <a:solidFill>
+              <a:srgbClr val="277884"/>
+            </a:solidFill>
+            <a:prstDash val="solid"/>
+          </a:ln>
+        </p:spPr>
+      </p:sp>
+      <p:sp>
+        <p:nvSpPr>
+          <p:cNvPr id="7" name="Text 5"/>
+          <p:cNvSpPr/>
+          <p:nvPr/>
+        </p:nvSpPr>
+        <p:spPr>
+          <a:xfrm>
+            <a:off x="631627" y="1300014"/>
+            <a:ext cx="8086939" cy="174575"/>
+          </a:xfrm>
+          <a:prstGeom prst="rect">
+            <a:avLst/>
+          </a:prstGeom>
+          <a:noFill/>
+          <a:ln/>
+        </p:spPr>
+        <p:txBody>
+          <a:bodyPr wrap="square" lIns="0" tIns="0" rIns="0" bIns="0" rtlCol="0" anchor="t"/>
+          <a:lstStyle/>
+          <a:p>
+            <a:pPr algn="l" indent="0" marL="0">
+              <a:lnSpc>
+                <a:spcPts val="1375"/>
+              </a:lnSpc>
+              <a:buNone/>
+            </a:pPr>
+            <a:r>
+              <a:rPr lang="en-US" sz="1100" dirty="0">
+                <a:solidFill>
+                  <a:srgbClr val="1C2833"/>
+                </a:solidFill>
+                <a:latin typeface="Courier New" pitchFamily="34" charset="0"/>
+                <a:ea typeface="Courier New" pitchFamily="34" charset="-122"/>
+                <a:cs typeface="Courier New" pitchFamily="34" charset="-120"/>
+              </a:rPr>
+              <a:t>gingerol  →  (drying / heating)  →  shogaol  +  H₂O</a:t>
+            </a:r>
+            <a:endParaRPr lang="en-US" sz="1100" dirty="0"/>
+          </a:p>
+        </p:txBody>
+      </p:sp>
+      <p:sp>
+        <p:nvSpPr>
+          <p:cNvPr id="8" name="Text 6"/>
+          <p:cNvSpPr/>
+          <p:nvPr/>
+        </p:nvSpPr>
+        <p:spPr>
+          <a:xfrm>
+            <a:off x="631627" y="1474589"/>
+            <a:ext cx="8086939" cy="174575"/>
+          </a:xfrm>
+          <a:prstGeom prst="rect">
+            <a:avLst/>
+          </a:prstGeom>
+          <a:noFill/>
+          <a:ln/>
+        </p:spPr>
+        <p:txBody>
+          <a:bodyPr wrap="square" lIns="0" tIns="0" rIns="0" bIns="0" rtlCol="0" anchor="t"/>
+          <a:lstStyle/>
+          <a:p>
+            <a:pPr algn="l" indent="0" marL="0">
+              <a:lnSpc>
+                <a:spcPts val="1375"/>
+              </a:lnSpc>
+              <a:buNone/>
+            </a:pPr>
+            <a:r>
+              <a:rPr lang="en-US" sz="1100" dirty="0">
+                <a:solidFill>
+                  <a:srgbClr val="1C2833"/>
+                </a:solidFill>
+                <a:latin typeface="Courier New" pitchFamily="34" charset="0"/>
+                <a:ea typeface="Courier New" pitchFamily="34" charset="-122"/>
+                <a:cs typeface="Courier New" pitchFamily="34" charset="-120"/>
+              </a:rPr>
+              <a:t>(fresh)                            (dried, more pungent)</a:t>
+            </a:r>
+            <a:endParaRPr lang="en-US" sz="1100" dirty="0"/>
+          </a:p>
+        </p:txBody>
+      </p:sp>
+      <p:sp>
+        <p:nvSpPr>
+          <p:cNvPr id="9" name="Text 7"/>
           <p:cNvSpPr/>
           <p:nvPr/>
         </p:nvSpPr>
